--- a/lecons/F3/34_FORM4_LESSON30_The_Atmosphere.pptx
+++ b/lecons/F3/34_FORM4_LESSON30_The_Atmosphere.pptx
@@ -51,9 +51,12 @@
     <p:sldId id="299" r:id="rId45"/>
     <p:sldId id="300" r:id="rId46"/>
     <p:sldId id="301" r:id="rId47"/>
+    <p:sldId id="302" r:id="rId48"/>
+    <p:sldId id="303" r:id="rId49"/>
+    <p:sldId id="304" r:id="rId50"/>
   </p:sldIdLst>
   <p:notesMasterIdLst>
-    <p:notesMasterId r:id="rId48"/>
+    <p:notesMasterId r:id="rId51"/>
   </p:notesMasterIdLst>
   <p:sldSz cx="12192000" cy="6858000"/>
   <p:notesSz cx="6858000" cy="12192000"/>
@@ -635,7 +638,7 @@
           <a:p>
             <a:r>
               <a:rPr lang="en-US" dirty="0"/>
-              <a:t>Listen carefully to this situation from real life. Nafissatou flies from Garoua to Douala. The pilot says: "We are at 11,000 metres. The temperature outside is minus 50 degrees." She is surprised, because the plane is closer to the Sun. Think about it, because I am going to ask you some questions.</a:t>
+              <a:t>Listen carefully to this situation from real life. Nafissatou flies from Garoua to Douala. The pilot says: "We are at 11,000 metres. The temperature outside is minus 50 degrees." She is surprised, because the plane is closer to the Sun. She asks: "What is this air around the Earth made of, and why is it so cold up there?" Think about it, because I am going to ask you some questions.</a:t>
             </a:r>
             <a:endParaRPr lang="en-US" dirty="0"/>
           </a:p>
@@ -811,7 +814,7 @@
           <a:p>
             <a:r>
               <a:rPr lang="en-US" dirty="0"/>
-              <a:t>Good. Nafissatou does not understand why it is so cold high up.</a:t>
+              <a:t>Good. Nafissatou does not understand what the atmosphere is and why it is colder higher up.</a:t>
             </a:r>
             <a:endParaRPr lang="en-US" dirty="0"/>
           </a:p>
@@ -1075,7 +1078,7 @@
           <a:p>
             <a:r>
               <a:rPr lang="en-US" dirty="0"/>
-              <a:t>Question 3: What happens to temperature as we go up? Think for a moment, then raise your hand to answer.</a:t>
+              <a:t>Question 3: In which layer of air does the plane fly? Think for a moment, then raise your hand to answer.</a:t>
             </a:r>
             <a:endParaRPr lang="en-US" dirty="0"/>
           </a:p>
@@ -1163,7 +1166,7 @@
           <a:p>
             <a:r>
               <a:rPr lang="en-US" dirty="0"/>
-              <a:t>Good. It falls.</a:t>
+              <a:t>Good. In the upper troposphere.</a:t>
             </a:r>
             <a:endParaRPr lang="en-US" dirty="0"/>
           </a:p>
@@ -1427,7 +1430,7 @@
           <a:p>
             <a:r>
               <a:rPr lang="en-US" dirty="0"/>
-              <a:t>Activity 1. Look carefully at this picture: the view from a plane above the clouds. Observe every detail before I ask the question.</a:t>
+              <a:t>Activity 1. Look carefully at this picture: the view from an aeroplane. Observe every detail before I ask the question.</a:t>
             </a:r>
             <a:endParaRPr lang="en-US" dirty="0"/>
           </a:p>
@@ -1603,7 +1606,7 @@
           <a:p>
             <a:r>
               <a:rPr lang="en-US" dirty="0"/>
-              <a:t>Here is the question for Activity 1: The plane flies in the air around the Earth. What is this layer of air called? Take one minute to think and write your answer in your rough notebook.</a:t>
+              <a:t>Here is the question for Activity 1: The plane flies in the layer of air around the Earth. What is this layer called? Take one minute to think and write your answer in your rough notebook.</a:t>
             </a:r>
             <a:endParaRPr lang="en-US" dirty="0"/>
           </a:p>
@@ -1779,7 +1782,7 @@
           <a:p>
             <a:r>
               <a:rPr lang="en-US" dirty="0"/>
-              <a:t>Activity 2. Look carefully at this diagram: the four layers of the atmosphere. Observe every detail before I ask the question.</a:t>
+              <a:t>Activity 2. Look carefully at this diagram: the layers of the atmosphere. Observe every detail before I ask the question.</a:t>
             </a:r>
             <a:endParaRPr lang="en-US" dirty="0"/>
           </a:p>
@@ -2043,7 +2046,7 @@
           <a:p>
             <a:r>
               <a:rPr lang="en-US" dirty="0"/>
-              <a:t>Activity 3. Look carefully at this picture: a map of the ozone layer over Antarctica, made from satellite data. Observe every detail before I ask the question.</a:t>
+              <a:t>Activity 3. Look carefully at this picture: the ozone hole over Antarctica. Observe every detail before I ask the question.</a:t>
             </a:r>
             <a:endParaRPr lang="en-US" dirty="0"/>
           </a:p>
@@ -2131,7 +2134,7 @@
           <a:p>
             <a:r>
               <a:rPr lang="en-US" dirty="0"/>
-              <a:t>Here is the question for Activity 3: The ozone layer protects us from the rays of the Sun. What damaged it? Take one minute to think and write your answer in your rough notebook.</a:t>
+              <a:t>Here is the question for Activity 3: The ozone layer protects us from harmful rays of the Sun. What has damaged it? Take one minute to think and write your answer in your rough notebook.</a:t>
             </a:r>
             <a:endParaRPr lang="en-US" dirty="0"/>
           </a:p>
@@ -2219,7 +2222,7 @@
           <a:p>
             <a:r>
               <a:rPr lang="en-US" dirty="0"/>
-              <a:t>Let us check the answer together. Chemicals (CFCs) from old fridges and sprays.</a:t>
+              <a:t>Let us check the answer together. Chemicals called CFCs, from old fridges, air conditioners and sprays.</a:t>
             </a:r>
             <a:endParaRPr lang="en-US" dirty="0"/>
           </a:p>
@@ -2395,7 +2398,7 @@
           <a:p>
             <a:r>
               <a:rPr lang="en-US" dirty="0"/>
-              <a:t>Let us copy Meaning of the Atmosphere. The atmosphere is defined as follows. On this slide we have Atmosphere and Composition. Write each point on a new line, with the key term first, and explain it in your own words when we revise.</a:t>
+              <a:t>Let us copy the definitions. The key terms of this lesson are defined as follows. On this slide we have Atmosphere. Write each point on a new line, with the key term first, and explain it in your own words when we revise. When you finish, we go to the next slide.</a:t>
             </a:r>
             <a:endParaRPr lang="en-US" dirty="0"/>
           </a:p>
@@ -2571,7 +2574,7 @@
           <a:p>
             <a:r>
               <a:rPr lang="en-US" dirty="0"/>
-              <a:t>Let us copy Structure of the Atmosphere. The atmosphere has the following main layers. On this slide we have Troposphere. Write each point on a new line, with the key term first, and explain it in your own words when we revise. When you finish, we go to the next slide.</a:t>
+              <a:t>We continue with the definitions. On this slide we have Ozone layer and Ozone depletion. Write each point on a new line, with the key term first, and explain it in your own words when we revise.</a:t>
             </a:r>
             <a:endParaRPr lang="en-US" dirty="0"/>
           </a:p>
@@ -2659,7 +2662,7 @@
           <a:p>
             <a:r>
               <a:rPr lang="en-US" dirty="0"/>
-              <a:t>We continue with Structure of the Atmosphere. On this slide we have Stratosphere, Mesosphere and Thermosphere. Write each point on a new line, with the key term first, and explain it in your own words when we revise.</a:t>
+              <a:t>Let us copy Structure of the Atmosphere. The atmosphere has the following main layers. Copy the point on Troposphere on the left, then draw the diagram on the right: the layers of the atmosphere. Give it a title and label it clearly.</a:t>
             </a:r>
             <a:endParaRPr lang="en-US" dirty="0"/>
           </a:p>
@@ -2747,7 +2750,7 @@
           <a:p>
             <a:r>
               <a:rPr lang="en-US" dirty="0"/>
-              <a:t>Now draw this illustration in your notebook: the layers of the atmosphere. Give it a title and label it clearly.</a:t>
+              <a:t>We continue with Structure of the Atmosphere. On this slide we have Stratosphere, Mesosphere and Thermosphere. Write each point on a new line, with the key term first, and explain it in your own words when we revise.</a:t>
             </a:r>
             <a:endParaRPr lang="en-US" dirty="0"/>
           </a:p>
@@ -2835,7 +2838,7 @@
           <a:p>
             <a:r>
               <a:rPr lang="en-US" dirty="0"/>
-              <a:t>Let us copy Ozone Layer Depletion. The depletion of the ozone layer is explained as follows. On this slide we have Ozone layer and Cause. Write each point on a new line, with the key term first, and explain it in your own words when we revise. When you finish, we go to the next slide.</a:t>
+              <a:t>Let us copy Thermal Structure in the Troposphere and the Stratosphere. Temperature changes with height as follows. Copy the point on Troposphere on the left, then draw the diagram on the right: temperature and height. Give it a title and label it clearly.</a:t>
             </a:r>
             <a:endParaRPr lang="en-US" dirty="0"/>
           </a:p>
@@ -2923,7 +2926,7 @@
           <a:p>
             <a:r>
               <a:rPr lang="en-US" dirty="0"/>
-              <a:t>We continue with Ozone Layer Depletion. On this slide we have Effects and Solution. Write each point on a new line, with the key term first, and explain it in your own words when we revise.</a:t>
+              <a:t>We continue with Thermal Structure in the Troposphere and the Stratosphere. On this slide we have Tropopause and Stratosphere. Write each point on a new line, with the key term first, and explain it in your own words when we revise.</a:t>
             </a:r>
             <a:endParaRPr lang="en-US" dirty="0"/>
           </a:p>
@@ -3011,7 +3014,7 @@
           <a:p>
             <a:r>
               <a:rPr lang="en-US" dirty="0"/>
-              <a:t>Now let us check what you have understood. Question 1: In which layer does the weather happen? Answer in your exercise book.</a:t>
+              <a:t>Let us copy Ozone Layer Depletion. Ozone layer depletion is explained as follows. Copy the point on Causes on the left, then draw the diagram on the right: the ozone hole. Give it a title and label it clearly.</a:t>
             </a:r>
             <a:endParaRPr lang="en-US" dirty="0"/>
           </a:p>
@@ -3099,7 +3102,7 @@
           <a:p>
             <a:r>
               <a:rPr lang="en-US" dirty="0"/>
-              <a:t>The expected answer is: in the troposphere. If you got it right, well done.</a:t>
+              <a:t>We continue with Ozone Layer Depletion. On this slide we have Effects on people and Effects on nature. Write each point on a new line, with the key term first, and explain it in your own words when we revise. When you finish, we go to the next slide.</a:t>
             </a:r>
             <a:endParaRPr lang="en-US" dirty="0"/>
           </a:p>
@@ -3187,7 +3190,7 @@
           <a:p>
             <a:r>
               <a:rPr lang="en-US" dirty="0"/>
-              <a:t>Now let us check what you have understood. Question 2: What is the role of the ozone layer? Answer in your exercise book.</a:t>
+              <a:t>We continue with Ozone Layer Depletion. On this slide we have Solutions. Write each point on a new line, with the key term first, and explain it in your own words when we revise.</a:t>
             </a:r>
             <a:endParaRPr lang="en-US" dirty="0"/>
           </a:p>
@@ -3275,7 +3278,7 @@
           <a:p>
             <a:r>
               <a:rPr lang="en-US" dirty="0"/>
-              <a:t>The expected answer is: it stops harmful rays from the Sun. If you got it right, well done.</a:t>
+              <a:t>Now let us check what you have understood. Question 1: In which layer does the weather happen? Answer in your exercise book.</a:t>
             </a:r>
             <a:endParaRPr lang="en-US" dirty="0"/>
           </a:p>
@@ -3363,7 +3366,7 @@
           <a:p>
             <a:r>
               <a:rPr lang="en-US" dirty="0"/>
-              <a:t>For those who need more practice, fill in the blanks in your exercise book. The answers are: number 1, atmosphere; number 2, troposphere; number 3, stratosphere.</a:t>
+              <a:t>The expected answer is: in the troposphere. If you got it right, well done.</a:t>
             </a:r>
             <a:endParaRPr lang="en-US" dirty="0"/>
           </a:p>
@@ -3539,7 +3542,7 @@
           <a:p>
             <a:r>
               <a:rPr lang="en-US" dirty="0"/>
-              <a:t>For your homework: Watch or listen to a weather forecast on television or radio. Write down two pieces of information it gives (for example temperature, rain or wind). We shall correct it at the beginning of our next lesson.</a:t>
+              <a:t>Now let us check what you have understood. Question 2: What is the role of the ozone layer? Answer in your exercise book.</a:t>
             </a:r>
             <a:endParaRPr lang="en-US" dirty="0"/>
           </a:p>
@@ -3627,7 +3630,7 @@
           <a:p>
             <a:r>
               <a:rPr lang="en-US" dirty="0"/>
-              <a:t>Our next lesson will be on Lesson 31: Weather and Climate. Thank you for your attention, and see you next time.</a:t>
+              <a:t>The expected answer is: it stops harmful rays from the Sun. If you got it right, well done.</a:t>
             </a:r>
             <a:endParaRPr lang="en-US" dirty="0"/>
           </a:p>
@@ -3715,7 +3718,7 @@
           <a:p>
             <a:r>
               <a:rPr lang="en-US" dirty="0"/>
-              <a:t>Let us play the bilingual game. I say a word in English, and you give me the French word. Then we do the reverse.</a:t>
+              <a:t>For those who need more practice, fill in the blanks in your exercise book. The answers are: number 1, atmosphere; number 2, troposphere; number 3, stratosphere.</a:t>
             </a:r>
             <a:endParaRPr lang="en-US" dirty="0"/>
           </a:p>
@@ -3803,7 +3806,7 @@
           <a:p>
             <a:r>
               <a:rPr lang="en-US" dirty="0"/>
-              <a:t>I record this information in the official logbook of the class after the lesson.</a:t>
+              <a:t>For your homework: Watch or listen to a weather forecast on television or radio. Write down two pieces of information it gives (for example temperature, rain or wind). We shall correct it at the beginning of our next lesson.</a:t>
             </a:r>
             <a:endParaRPr lang="en-US" dirty="0"/>
           </a:p>
@@ -3891,7 +3894,7 @@
           <a:p>
             <a:r>
               <a:rPr lang="en-US" dirty="0"/>
-              <a:t>I complete the second page of the logbook: the matter taught, the evaluation, the homework and the attendance.</a:t>
+              <a:t>Our next lesson will be on Lesson 31: Weather and Climate. Thank you for your attention, and see you next time.</a:t>
             </a:r>
             <a:endParaRPr lang="en-US" dirty="0"/>
           </a:p>
@@ -3979,7 +3982,7 @@
           <a:p>
             <a:r>
               <a:rPr lang="en-US" dirty="0"/>
-              <a:t>This slide is for me, the teacher: it gives the timing of the lesson and what to do if the projector is not available.</a:t>
+              <a:t>Let us play the bilingual game. I say a word in English, and you give me the French word. Then we do the reverse.</a:t>
             </a:r>
             <a:endParaRPr lang="en-US" dirty="0"/>
           </a:p>
@@ -4067,7 +4070,7 @@
           <a:p>
             <a:r>
               <a:rPr lang="en-US" dirty="0"/>
-              <a:t>These are the references and picture credits used to prepare this lesson.</a:t>
+              <a:t>I record this information in the official logbook of the class after the lesson.</a:t>
             </a:r>
             <a:endParaRPr lang="en-US" dirty="0"/>
           </a:p>
@@ -4091,6 +4094,270 @@
             <a:fld id="{F7021451-1387-4CA6-816F-3879F97B5CBC}" type="slidenum">
               <a:rPr lang="en-US"/>
               <a:t>46</a:t>
+            </a:fld>
+            <a:endParaRPr lang="en-US"/>
+          </a:p>
+        </p:txBody>
+      </p:sp>
+    </p:spTree>
+    <p:extLst>
+      <p:ext uri="{BB962C8B-B14F-4D97-AF65-F5344CB8AC3E}">
+        <p14:creationId xmlns:p14="http://schemas.microsoft.com/office/powerpoint/2010/main" val="1024086991"/>
+      </p:ext>
+    </p:extLst>
+  </p:cSld>
+  <p:clrMapOvr>
+    <a:masterClrMapping/>
+  </p:clrMapOvr>
+</p:notes>
+</file>
+
+<file path=ppt/notesSlides/notesSlide47.xml><?xml version="1.0" encoding="utf-8"?>
+<p:notes xmlns:a="http://schemas.openxmlformats.org/drawingml/2006/main" xmlns:r="http://schemas.openxmlformats.org/officeDocument/2006/relationships" xmlns:p="http://schemas.openxmlformats.org/presentationml/2006/main">
+  <p:cSld>
+    <p:spTree>
+      <p:nvGrpSpPr>
+        <p:cNvPr id="1" name=""/>
+        <p:cNvGrpSpPr/>
+        <p:nvPr/>
+      </p:nvGrpSpPr>
+      <p:grpSpPr>
+        <a:xfrm>
+          <a:off x="0" y="0"/>
+          <a:ext cx="0" cy="0"/>
+          <a:chOff x="0" y="0"/>
+          <a:chExt cx="0" cy="0"/>
+        </a:xfrm>
+      </p:grpSpPr>
+      <p:sp>
+        <p:nvSpPr>
+          <p:cNvPr id="2" name="Slide Image Placeholder 1"/>
+          <p:cNvSpPr>
+            <a:spLocks noGrp="1" noRot="1" noChangeAspect="1"/>
+          </p:cNvSpPr>
+          <p:nvPr>
+            <p:ph type="sldImg"/>
+          </p:nvPr>
+        </p:nvSpPr>
+        <p:spPr/>
+      </p:sp>
+      <p:sp>
+        <p:nvSpPr>
+          <p:cNvPr id="3" name="Notes Placeholder 2"/>
+          <p:cNvSpPr>
+            <a:spLocks noGrp="1"/>
+          </p:cNvSpPr>
+          <p:nvPr>
+            <p:ph type="body" idx="1"/>
+          </p:nvPr>
+        </p:nvSpPr>
+        <p:spPr/>
+        <p:txBody>
+          <a:bodyPr/>
+          <a:lstStyle/>
+          <a:p>
+            <a:r>
+              <a:rPr lang="en-US" dirty="0"/>
+              <a:t>I complete the second page of the logbook: the matter taught, the evaluation, the homework and the attendance.</a:t>
+            </a:r>
+            <a:endParaRPr lang="en-US" dirty="0"/>
+          </a:p>
+        </p:txBody>
+      </p:sp>
+      <p:sp>
+        <p:nvSpPr>
+          <p:cNvPr id="4" name="Slide Number Placeholder 3"/>
+          <p:cNvSpPr>
+            <a:spLocks noGrp="1"/>
+          </p:cNvSpPr>
+          <p:nvPr>
+            <p:ph type="sldNum" sz="quarter" idx="10"/>
+          </p:nvPr>
+        </p:nvSpPr>
+        <p:spPr/>
+        <p:txBody>
+          <a:bodyPr/>
+          <a:lstStyle/>
+          <a:p>
+            <a:fld id="{F7021451-1387-4CA6-816F-3879F97B5CBC}" type="slidenum">
+              <a:rPr lang="en-US"/>
+              <a:t>47</a:t>
+            </a:fld>
+            <a:endParaRPr lang="en-US"/>
+          </a:p>
+        </p:txBody>
+      </p:sp>
+    </p:spTree>
+    <p:extLst>
+      <p:ext uri="{BB962C8B-B14F-4D97-AF65-F5344CB8AC3E}">
+        <p14:creationId xmlns:p14="http://schemas.microsoft.com/office/powerpoint/2010/main" val="1024086991"/>
+      </p:ext>
+    </p:extLst>
+  </p:cSld>
+  <p:clrMapOvr>
+    <a:masterClrMapping/>
+  </p:clrMapOvr>
+</p:notes>
+</file>
+
+<file path=ppt/notesSlides/notesSlide48.xml><?xml version="1.0" encoding="utf-8"?>
+<p:notes xmlns:a="http://schemas.openxmlformats.org/drawingml/2006/main" xmlns:r="http://schemas.openxmlformats.org/officeDocument/2006/relationships" xmlns:p="http://schemas.openxmlformats.org/presentationml/2006/main">
+  <p:cSld>
+    <p:spTree>
+      <p:nvGrpSpPr>
+        <p:cNvPr id="1" name=""/>
+        <p:cNvGrpSpPr/>
+        <p:nvPr/>
+      </p:nvGrpSpPr>
+      <p:grpSpPr>
+        <a:xfrm>
+          <a:off x="0" y="0"/>
+          <a:ext cx="0" cy="0"/>
+          <a:chOff x="0" y="0"/>
+          <a:chExt cx="0" cy="0"/>
+        </a:xfrm>
+      </p:grpSpPr>
+      <p:sp>
+        <p:nvSpPr>
+          <p:cNvPr id="2" name="Slide Image Placeholder 1"/>
+          <p:cNvSpPr>
+            <a:spLocks noGrp="1" noRot="1" noChangeAspect="1"/>
+          </p:cNvSpPr>
+          <p:nvPr>
+            <p:ph type="sldImg"/>
+          </p:nvPr>
+        </p:nvSpPr>
+        <p:spPr/>
+      </p:sp>
+      <p:sp>
+        <p:nvSpPr>
+          <p:cNvPr id="3" name="Notes Placeholder 2"/>
+          <p:cNvSpPr>
+            <a:spLocks noGrp="1"/>
+          </p:cNvSpPr>
+          <p:nvPr>
+            <p:ph type="body" idx="1"/>
+          </p:nvPr>
+        </p:nvSpPr>
+        <p:spPr/>
+        <p:txBody>
+          <a:bodyPr/>
+          <a:lstStyle/>
+          <a:p>
+            <a:r>
+              <a:rPr lang="en-US" dirty="0"/>
+              <a:t>This slide is for me, the teacher: it gives the timing of the lesson and what to do if the projector is not available.</a:t>
+            </a:r>
+            <a:endParaRPr lang="en-US" dirty="0"/>
+          </a:p>
+        </p:txBody>
+      </p:sp>
+      <p:sp>
+        <p:nvSpPr>
+          <p:cNvPr id="4" name="Slide Number Placeholder 3"/>
+          <p:cNvSpPr>
+            <a:spLocks noGrp="1"/>
+          </p:cNvSpPr>
+          <p:nvPr>
+            <p:ph type="sldNum" sz="quarter" idx="10"/>
+          </p:nvPr>
+        </p:nvSpPr>
+        <p:spPr/>
+        <p:txBody>
+          <a:bodyPr/>
+          <a:lstStyle/>
+          <a:p>
+            <a:fld id="{F7021451-1387-4CA6-816F-3879F97B5CBC}" type="slidenum">
+              <a:rPr lang="en-US"/>
+              <a:t>48</a:t>
+            </a:fld>
+            <a:endParaRPr lang="en-US"/>
+          </a:p>
+        </p:txBody>
+      </p:sp>
+    </p:spTree>
+    <p:extLst>
+      <p:ext uri="{BB962C8B-B14F-4D97-AF65-F5344CB8AC3E}">
+        <p14:creationId xmlns:p14="http://schemas.microsoft.com/office/powerpoint/2010/main" val="1024086991"/>
+      </p:ext>
+    </p:extLst>
+  </p:cSld>
+  <p:clrMapOvr>
+    <a:masterClrMapping/>
+  </p:clrMapOvr>
+</p:notes>
+</file>
+
+<file path=ppt/notesSlides/notesSlide49.xml><?xml version="1.0" encoding="utf-8"?>
+<p:notes xmlns:a="http://schemas.openxmlformats.org/drawingml/2006/main" xmlns:r="http://schemas.openxmlformats.org/officeDocument/2006/relationships" xmlns:p="http://schemas.openxmlformats.org/presentationml/2006/main">
+  <p:cSld>
+    <p:spTree>
+      <p:nvGrpSpPr>
+        <p:cNvPr id="1" name=""/>
+        <p:cNvGrpSpPr/>
+        <p:nvPr/>
+      </p:nvGrpSpPr>
+      <p:grpSpPr>
+        <a:xfrm>
+          <a:off x="0" y="0"/>
+          <a:ext cx="0" cy="0"/>
+          <a:chOff x="0" y="0"/>
+          <a:chExt cx="0" cy="0"/>
+        </a:xfrm>
+      </p:grpSpPr>
+      <p:sp>
+        <p:nvSpPr>
+          <p:cNvPr id="2" name="Slide Image Placeholder 1"/>
+          <p:cNvSpPr>
+            <a:spLocks noGrp="1" noRot="1" noChangeAspect="1"/>
+          </p:cNvSpPr>
+          <p:nvPr>
+            <p:ph type="sldImg"/>
+          </p:nvPr>
+        </p:nvSpPr>
+        <p:spPr/>
+      </p:sp>
+      <p:sp>
+        <p:nvSpPr>
+          <p:cNvPr id="3" name="Notes Placeholder 2"/>
+          <p:cNvSpPr>
+            <a:spLocks noGrp="1"/>
+          </p:cNvSpPr>
+          <p:nvPr>
+            <p:ph type="body" idx="1"/>
+          </p:nvPr>
+        </p:nvSpPr>
+        <p:spPr/>
+        <p:txBody>
+          <a:bodyPr/>
+          <a:lstStyle/>
+          <a:p>
+            <a:r>
+              <a:rPr lang="en-US" dirty="0"/>
+              <a:t>These are the references and picture credits used to prepare this lesson.</a:t>
+            </a:r>
+            <a:endParaRPr lang="en-US" dirty="0"/>
+          </a:p>
+        </p:txBody>
+      </p:sp>
+      <p:sp>
+        <p:nvSpPr>
+          <p:cNvPr id="4" name="Slide Number Placeholder 3"/>
+          <p:cNvSpPr>
+            <a:spLocks noGrp="1"/>
+          </p:cNvSpPr>
+          <p:nvPr>
+            <p:ph type="sldNum" sz="quarter" idx="10"/>
+          </p:nvPr>
+        </p:nvSpPr>
+        <p:spPr/>
+        <p:txBody>
+          <a:bodyPr/>
+          <a:lstStyle/>
+          <a:p>
+            <a:fld id="{F7021451-1387-4CA6-816F-3879F97B5CBC}" type="slidenum">
+              <a:rPr lang="en-US"/>
+              <a:t>49</a:t>
             </a:fld>
             <a:endParaRPr lang="en-US"/>
           </a:p>
@@ -4419,7 +4686,7 @@
           <a:p>
             <a:r>
               <a:rPr lang="en-US" dirty="0"/>
-              <a:t>By the end of this lesson, you should be able to do three things. Number 1: define the atmosphere. Number 2: identify the main layers of the atmosphere on a diagram. Number 3: describe how temperature changes in the troposphere and the stratosphere. Number 4: explain the causes, effects and solutions of ozone layer depletion.</a:t>
+              <a:t>By the end of this lesson, you should be able to do four things. Number 1: define the atmosphere. Number 2: identify the main layers of the atmosphere on a diagram. Number 3: describe how temperature changes in the troposphere and the stratosphere. Number 4: explain the causes, effects and solutions of ozone layer depletion.</a:t>
             </a:r>
             <a:endParaRPr lang="en-US" dirty="0"/>
           </a:p>
@@ -5887,7 +6154,7 @@
         <p:spPr>
           <a:xfrm>
             <a:off x="0" y="658368"/>
-            <a:ext cx="5120640" cy="5833872"/>
+            <a:ext cx="1463040" cy="5833872"/>
           </a:xfrm>
           <a:prstGeom prst="rect">
             <a:avLst/>
@@ -5902,8 +6169,8 @@
         </p:nvSpPr>
         <p:spPr>
           <a:xfrm>
-            <a:off x="5349240" y="1005840"/>
-            <a:ext cx="6522415" cy="731520"/>
+            <a:off x="1691640" y="1005840"/>
+            <a:ext cx="10180015" cy="731520"/>
           </a:xfrm>
           <a:prstGeom prst="rect">
             <a:avLst/>
@@ -5943,8 +6210,8 @@
         </p:nvSpPr>
         <p:spPr>
           <a:xfrm>
-            <a:off x="5349240" y="1783080"/>
-            <a:ext cx="6522415" cy="4663440"/>
+            <a:off x="1691640" y="1783080"/>
+            <a:ext cx="10180015" cy="4663440"/>
           </a:xfrm>
           <a:prstGeom prst="rect">
             <a:avLst/>
@@ -5971,7 +6238,7 @@
                 <a:ea typeface="Times New Roman" pitchFamily="34" charset="-122"/>
                 <a:cs typeface="Times New Roman" pitchFamily="34" charset="-120"/>
               </a:rPr>
-              <a:t>Nafissatou flies from Garoua to Douala. The pilot says: "We are at 11,000 metres. The temperature outside is minus 50 degrees." She is surprised, because the plane is closer to the Sun.</a:t>
+              <a:t>Nafissatou flies from Garoua to Douala. The pilot says: "We are at 11,000 metres. The temperature outside is minus 50 degrees." She is surprised, because the plane is closer to the Sun. She asks: "What is this air around the Earth made of, and why is it so cold up there?"</a:t>
             </a:r>
             <a:endParaRPr lang="en-US" sz="4000" dirty="0"/>
           </a:p>
@@ -6409,7 +6676,7 @@
                 <a:ea typeface="Times New Roman" pitchFamily="34" charset="-122"/>
                 <a:cs typeface="Times New Roman" pitchFamily="34" charset="-120"/>
               </a:rPr>
-              <a:t>Nafissatou does not understand why it is so cold high up.</a:t>
+              <a:t>Nafissatou does not understand what the atmosphere is and why it is colder higher up.</a:t>
             </a:r>
             <a:endParaRPr lang="en-US" sz="4000" dirty="0"/>
           </a:p>
@@ -7066,7 +7333,7 @@
                 <a:ea typeface="Times New Roman" pitchFamily="34" charset="-122"/>
                 <a:cs typeface="Times New Roman" pitchFamily="34" charset="-120"/>
               </a:rPr>
-              <a:t>What happens to temperature as we go up?</a:t>
+              <a:t>In which layer of air does the plane fly?</a:t>
             </a:r>
             <a:endParaRPr lang="en-US" sz="4000" dirty="0"/>
           </a:p>
@@ -7285,7 +7552,7 @@
                 <a:ea typeface="Times New Roman" pitchFamily="34" charset="-122"/>
                 <a:cs typeface="Times New Roman" pitchFamily="34" charset="-120"/>
               </a:rPr>
-              <a:t>It falls.</a:t>
+              <a:t>In the upper troposphere.</a:t>
             </a:r>
             <a:endParaRPr lang="en-US" sz="4000" dirty="0"/>
           </a:p>
@@ -7835,7 +8102,7 @@
                 <a:ea typeface="Calibri" pitchFamily="34" charset="-122"/>
                 <a:cs typeface="Calibri" pitchFamily="34" charset="-120"/>
               </a:rPr>
-              <a:t>1. MEANING OF THE ATMOSPHERE</a:t>
+              <a:t>DEFINITIONS</a:t>
             </a:r>
             <a:endParaRPr lang="en-US" sz="1400" dirty="0"/>
           </a:p>
@@ -7937,7 +8204,7 @@
                 <a:ea typeface="Times New Roman" pitchFamily="34" charset="-122"/>
                 <a:cs typeface="Times New Roman" pitchFamily="34" charset="-120"/>
               </a:rPr>
-              <a:t>The view from a plane above the clouds.</a:t>
+              <a:t>The view from an aeroplane.</a:t>
             </a:r>
             <a:endParaRPr lang="en-US" sz="1800" dirty="0"/>
           </a:p>
@@ -8644,7 +8911,7 @@
                 <a:ea typeface="Calibri" pitchFamily="34" charset="-122"/>
                 <a:cs typeface="Calibri" pitchFamily="34" charset="-120"/>
               </a:rPr>
-              <a:t>1. MEANING OF THE ATMOSPHERE</a:t>
+              <a:t>DEFINITIONS</a:t>
             </a:r>
             <a:endParaRPr lang="en-US" sz="1400" dirty="0"/>
           </a:p>
@@ -8751,7 +9018,7 @@
                 <a:ea typeface="Times New Roman" pitchFamily="34" charset="-122"/>
                 <a:cs typeface="Times New Roman" pitchFamily="34" charset="-120"/>
               </a:rPr>
-              <a:t>The plane flies in the air around the Earth. What is this layer of air called?</a:t>
+              <a:t>The plane flies in the layer of air around the Earth. What is this layer called?</a:t>
             </a:r>
             <a:endParaRPr lang="en-US" sz="4000" dirty="0"/>
           </a:p>
@@ -8863,7 +9130,7 @@
                 <a:ea typeface="Calibri" pitchFamily="34" charset="-122"/>
                 <a:cs typeface="Calibri" pitchFamily="34" charset="-120"/>
               </a:rPr>
-              <a:t>1. MEANING OF THE ATMOSPHERE</a:t>
+              <a:t>DEFINITIONS</a:t>
             </a:r>
             <a:endParaRPr lang="en-US" sz="1400" dirty="0"/>
           </a:p>
@@ -9082,7 +9349,7 @@
                 <a:ea typeface="Calibri" pitchFamily="34" charset="-122"/>
                 <a:cs typeface="Calibri" pitchFamily="34" charset="-120"/>
               </a:rPr>
-              <a:t>2. STRUCTURE OF THE ATMOSPHERE</a:t>
+              <a:t>1. STRUCTURE OF THE ATMOSPHERE</a:t>
             </a:r>
             <a:endParaRPr lang="en-US" sz="1400" dirty="0"/>
           </a:p>
@@ -9184,7 +9451,7 @@
                 <a:ea typeface="Times New Roman" pitchFamily="34" charset="-122"/>
                 <a:cs typeface="Times New Roman" pitchFamily="34" charset="-120"/>
               </a:rPr>
-              <a:t>The four layers of the atmosphere.</a:t>
+              <a:t>The layers of the atmosphere.</a:t>
             </a:r>
             <a:endParaRPr lang="en-US" sz="1800" dirty="0"/>
           </a:p>
@@ -9296,7 +9563,7 @@
                 <a:ea typeface="Calibri" pitchFamily="34" charset="-122"/>
                 <a:cs typeface="Calibri" pitchFamily="34" charset="-120"/>
               </a:rPr>
-              <a:t>2. STRUCTURE OF THE ATMOSPHERE</a:t>
+              <a:t>1. STRUCTURE OF THE ATMOSPHERE</a:t>
             </a:r>
             <a:endParaRPr lang="en-US" sz="1400" dirty="0"/>
           </a:p>
@@ -9515,7 +9782,7 @@
                 <a:ea typeface="Calibri" pitchFamily="34" charset="-122"/>
                 <a:cs typeface="Calibri" pitchFamily="34" charset="-120"/>
               </a:rPr>
-              <a:t>2. STRUCTURE OF THE ATMOSPHERE</a:t>
+              <a:t>1. STRUCTURE OF THE ATMOSPHERE</a:t>
             </a:r>
             <a:endParaRPr lang="en-US" sz="1400" dirty="0"/>
           </a:p>
@@ -9836,7 +10103,7 @@
                 <a:ea typeface="Times New Roman" pitchFamily="34" charset="-122"/>
                 <a:cs typeface="Times New Roman" pitchFamily="34" charset="-120"/>
               </a:rPr>
-              <a:t>A map of the ozone layer over Antarctica, made from satellite data.</a:t>
+              <a:t>The ozone hole over Antarctica.</a:t>
             </a:r>
             <a:endParaRPr lang="en-US" sz="1800" dirty="0"/>
           </a:p>
@@ -10055,7 +10322,7 @@
                 <a:ea typeface="Times New Roman" pitchFamily="34" charset="-122"/>
                 <a:cs typeface="Times New Roman" pitchFamily="34" charset="-120"/>
               </a:rPr>
-              <a:t>The ozone layer protects us from the rays of the Sun. What damaged it?</a:t>
+              <a:t>The ozone layer protects us from harmful rays of the Sun. What has damaged it?</a:t>
             </a:r>
             <a:endParaRPr lang="en-US" sz="4000" dirty="0"/>
           </a:p>
@@ -10274,7 +10541,7 @@
                 <a:ea typeface="Times New Roman" pitchFamily="34" charset="-122"/>
                 <a:cs typeface="Times New Roman" pitchFamily="34" charset="-120"/>
               </a:rPr>
-              <a:t>Chemicals (CFCs) from old fridges and sprays.</a:t>
+              <a:t>Chemicals called CFCs, from old fridges, air conditioners and sprays.</a:t>
             </a:r>
             <a:endParaRPr lang="en-US" sz="4000" dirty="0"/>
           </a:p>
@@ -10668,7 +10935,7 @@
         <p:spPr>
           <a:xfrm>
             <a:off x="0" y="658368"/>
-            <a:ext cx="2468880" cy="5833872"/>
+            <a:ext cx="5120640" cy="5833872"/>
           </a:xfrm>
           <a:prstGeom prst="rect">
             <a:avLst/>
@@ -10683,8 +10950,8 @@
         </p:nvSpPr>
         <p:spPr>
           <a:xfrm>
-            <a:off x="2697480" y="1005840"/>
-            <a:ext cx="9174175" cy="731520"/>
+            <a:off x="5349240" y="1005840"/>
+            <a:ext cx="6522415" cy="731520"/>
           </a:xfrm>
           <a:prstGeom prst="rect">
             <a:avLst/>
@@ -10710,7 +10977,7 @@
                 <a:ea typeface="Times New Roman" pitchFamily="34" charset="-122"/>
                 <a:cs typeface="Times New Roman" pitchFamily="34" charset="-120"/>
               </a:rPr>
-              <a:t>1. Meaning of the Atmosphere</a:t>
+              <a:t>DEFINITIONS</a:t>
             </a:r>
             <a:endParaRPr lang="en-US" sz="3600" dirty="0"/>
           </a:p>
@@ -10724,8 +10991,8 @@
         </p:nvSpPr>
         <p:spPr>
           <a:xfrm>
-            <a:off x="2697480" y="1783080"/>
-            <a:ext cx="9174175" cy="4663440"/>
+            <a:off x="5349240" y="1783080"/>
+            <a:ext cx="6522415" cy="4663440"/>
           </a:xfrm>
           <a:prstGeom prst="rect">
             <a:avLst/>
@@ -10752,7 +11019,7 @@
                 <a:ea typeface="Times New Roman" pitchFamily="34" charset="-122"/>
                 <a:cs typeface="Times New Roman" pitchFamily="34" charset="-120"/>
               </a:rPr>
-              <a:t>The atmosphere is defined as follows:</a:t>
+              <a:t>The key terms of this lesson are defined as follows:</a:t>
             </a:r>
             <a:endParaRPr lang="en-US" sz="4000" dirty="0"/>
           </a:p>
@@ -10789,44 +11056,7 @@
                 <a:ea typeface="Times New Roman" pitchFamily="34" charset="-122"/>
                 <a:cs typeface="Times New Roman" pitchFamily="34" charset="-120"/>
               </a:rPr>
-              <a:t>It is the layer of air that surrounds the Earth.</a:t>
-            </a:r>
-            <a:endParaRPr lang="en-US" sz="4000" dirty="0"/>
-          </a:p>
-          <a:p>
-            <a:pPr algn="l" indent="0" marL="0">
-              <a:spcAft>
-                <a:spcPts val="800"/>
-              </a:spcAft>
-              <a:buNone/>
-            </a:pPr>
-            <a:r>
-              <a:rPr lang="en-US" sz="4000" b="1" dirty="0">
-                <a:solidFill>
-                  <a:srgbClr val="111111"/>
-                </a:solidFill>
-                <a:latin typeface="Times New Roman" pitchFamily="34" charset="0"/>
-                <a:ea typeface="Times New Roman" pitchFamily="34" charset="-122"/>
-                <a:cs typeface="Times New Roman" pitchFamily="34" charset="-120"/>
-              </a:rPr>
-              <a:t>Composition: </a:t>
-            </a:r>
-            <a:pPr algn="l" indent="0" marL="0">
-              <a:spcAft>
-                <a:spcPts val="800"/>
-              </a:spcAft>
-              <a:buNone/>
-            </a:pPr>
-            <a:r>
-              <a:rPr lang="en-US" sz="4000" dirty="0">
-                <a:solidFill>
-                  <a:srgbClr val="111111"/>
-                </a:solidFill>
-                <a:latin typeface="Times New Roman" pitchFamily="34" charset="0"/>
-                <a:ea typeface="Times New Roman" pitchFamily="34" charset="-122"/>
-                <a:cs typeface="Times New Roman" pitchFamily="34" charset="-120"/>
-              </a:rPr>
-              <a:t>It is made of about 78 % nitrogen, 21 % oxygen and small amounts of carbon dioxide, water vapour and other gases.</a:t>
+              <a:t>It is the layer of gases (air) that surrounds the Earth and is held by gravity.</a:t>
             </a:r>
             <a:endParaRPr lang="en-US" sz="4000" dirty="0"/>
           </a:p>
@@ -12012,7 +12242,7 @@
                 <a:ea typeface="Times New Roman" pitchFamily="34" charset="-122"/>
                 <a:cs typeface="Times New Roman" pitchFamily="34" charset="-120"/>
               </a:rPr>
-              <a:t>2. Structure of the Atmosphere</a:t>
+              <a:t>DEFINITIONS (continued)</a:t>
             </a:r>
             <a:endParaRPr lang="en-US" sz="3600" dirty="0"/>
           </a:p>
@@ -12046,7 +12276,7 @@
               <a:buNone/>
             </a:pPr>
             <a:r>
-              <a:rPr lang="en-US" sz="4000" i="1" dirty="0">
+              <a:rPr lang="en-US" sz="4000" b="1" dirty="0">
                 <a:solidFill>
                   <a:srgbClr val="111111"/>
                 </a:solidFill>
@@ -12054,11 +12284,8 @@
                 <a:ea typeface="Times New Roman" pitchFamily="34" charset="-122"/>
                 <a:cs typeface="Times New Roman" pitchFamily="34" charset="-120"/>
               </a:rPr>
-              <a:t>The atmosphere has the following main layers:</a:t>
-            </a:r>
-            <a:endParaRPr lang="en-US" sz="4000" dirty="0"/>
-          </a:p>
-          <a:p>
+              <a:t>Ozone layer: </a:t>
+            </a:r>
             <a:pPr algn="l" indent="0" marL="0">
               <a:spcAft>
                 <a:spcPts val="800"/>
@@ -12066,7 +12293,7 @@
               <a:buNone/>
             </a:pPr>
             <a:r>
-              <a:rPr lang="en-US" sz="4000" b="1" dirty="0">
+              <a:rPr lang="en-US" sz="4000" dirty="0">
                 <a:solidFill>
                   <a:srgbClr val="111111"/>
                 </a:solidFill>
@@ -12074,8 +12301,11 @@
                 <a:ea typeface="Times New Roman" pitchFamily="34" charset="-122"/>
                 <a:cs typeface="Times New Roman" pitchFamily="34" charset="-120"/>
               </a:rPr>
-              <a:t>Troposphere: </a:t>
-            </a:r>
+              <a:t>It is a layer of ozone gas in the stratosphere that absorbs the harmful ultraviolet rays of the Sun.</a:t>
+            </a:r>
+            <a:endParaRPr lang="en-US" sz="4000" dirty="0"/>
+          </a:p>
+          <a:p>
             <a:pPr algn="l" indent="0" marL="0">
               <a:spcAft>
                 <a:spcPts val="800"/>
@@ -12083,7 +12313,7 @@
               <a:buNone/>
             </a:pPr>
             <a:r>
-              <a:rPr lang="en-US" sz="4000" dirty="0">
+              <a:rPr lang="en-US" sz="4000" b="1" dirty="0">
                 <a:solidFill>
                   <a:srgbClr val="111111"/>
                 </a:solidFill>
@@ -12091,7 +12321,24 @@
                 <a:ea typeface="Times New Roman" pitchFamily="34" charset="-122"/>
                 <a:cs typeface="Times New Roman" pitchFamily="34" charset="-120"/>
               </a:rPr>
-              <a:t>It is the lowest layer, from 0 to about 12 km, where weather occurs and temperature falls with height.</a:t>
+              <a:t>Ozone depletion: </a:t>
+            </a:r>
+            <a:pPr algn="l" indent="0" marL="0">
+              <a:spcAft>
+                <a:spcPts val="800"/>
+              </a:spcAft>
+              <a:buNone/>
+            </a:pPr>
+            <a:r>
+              <a:rPr lang="en-US" sz="4000" dirty="0">
+                <a:solidFill>
+                  <a:srgbClr val="111111"/>
+                </a:solidFill>
+                <a:latin typeface="Times New Roman" pitchFamily="34" charset="0"/>
+                <a:ea typeface="Times New Roman" pitchFamily="34" charset="-122"/>
+                <a:cs typeface="Times New Roman" pitchFamily="34" charset="-120"/>
+              </a:rPr>
+              <a:t>It is the thinning of the ozone layer.</a:t>
             </a:r>
             <a:endParaRPr lang="en-US" sz="4000" dirty="0"/>
           </a:p>
@@ -12209,9 +12456,129 @@
           </a:p>
         </p:txBody>
       </p:sp>
+      <p:sp>
+        <p:nvSpPr>
+          <p:cNvPr id="3" name="Text 1"/>
+          <p:cNvSpPr/>
+          <p:nvPr/>
+        </p:nvSpPr>
+        <p:spPr>
+          <a:xfrm>
+            <a:off x="365760" y="1005840"/>
+            <a:ext cx="11460175" cy="731520"/>
+          </a:xfrm>
+          <a:prstGeom prst="rect">
+            <a:avLst/>
+          </a:prstGeom>
+          <a:noFill/>
+          <a:ln/>
+        </p:spPr>
+        <p:txBody>
+          <a:bodyPr wrap="square" lIns="0" tIns="0" rIns="0" bIns="0" rtlCol="0" anchor="ctr">
+            <a:normAutofit/>
+          </a:bodyPr>
+          <a:lstStyle/>
+          <a:p>
+            <a:pPr algn="ctr" indent="0" marL="0">
+              <a:buNone/>
+            </a:pPr>
+            <a:r>
+              <a:rPr lang="en-US" sz="3600" b="1" dirty="0">
+                <a:solidFill>
+                  <a:srgbClr val="990011"/>
+                </a:solidFill>
+                <a:latin typeface="Times New Roman" pitchFamily="34" charset="0"/>
+                <a:ea typeface="Times New Roman" pitchFamily="34" charset="-122"/>
+                <a:cs typeface="Times New Roman" pitchFamily="34" charset="-120"/>
+              </a:rPr>
+              <a:t>1. Structure of the Atmosphere</a:t>
+            </a:r>
+            <a:endParaRPr lang="en-US" sz="3600" dirty="0"/>
+          </a:p>
+        </p:txBody>
+      </p:sp>
+      <p:sp>
+        <p:nvSpPr>
+          <p:cNvPr id="4" name="Text 2"/>
+          <p:cNvSpPr/>
+          <p:nvPr/>
+        </p:nvSpPr>
+        <p:spPr>
+          <a:xfrm>
+            <a:off x="365760" y="1783080"/>
+            <a:ext cx="4846320" cy="4617720"/>
+          </a:xfrm>
+          <a:prstGeom prst="rect">
+            <a:avLst/>
+          </a:prstGeom>
+          <a:noFill/>
+          <a:ln/>
+        </p:spPr>
+        <p:txBody>
+          <a:bodyPr wrap="square" lIns="0" tIns="0" rIns="0" bIns="0" rtlCol="0" anchor="t"/>
+          <a:lstStyle/>
+          <a:p>
+            <a:pPr algn="l" indent="0" marL="0">
+              <a:spcAft>
+                <a:spcPts val="800"/>
+              </a:spcAft>
+              <a:buNone/>
+            </a:pPr>
+            <a:r>
+              <a:rPr lang="en-US" sz="3600" i="1" dirty="0">
+                <a:solidFill>
+                  <a:srgbClr val="111111"/>
+                </a:solidFill>
+                <a:latin typeface="Times New Roman" pitchFamily="34" charset="0"/>
+                <a:ea typeface="Times New Roman" pitchFamily="34" charset="-122"/>
+                <a:cs typeface="Times New Roman" pitchFamily="34" charset="-120"/>
+              </a:rPr>
+              <a:t>The atmosphere has the following main layers:</a:t>
+            </a:r>
+            <a:endParaRPr lang="en-US" sz="3600" dirty="0"/>
+          </a:p>
+          <a:p>
+            <a:pPr algn="l" indent="0" marL="0">
+              <a:spcAft>
+                <a:spcPts val="800"/>
+              </a:spcAft>
+              <a:buNone/>
+            </a:pPr>
+            <a:r>
+              <a:rPr lang="en-US" sz="3600" b="1" dirty="0">
+                <a:solidFill>
+                  <a:srgbClr val="111111"/>
+                </a:solidFill>
+                <a:latin typeface="Times New Roman" pitchFamily="34" charset="0"/>
+                <a:ea typeface="Times New Roman" pitchFamily="34" charset="-122"/>
+                <a:cs typeface="Times New Roman" pitchFamily="34" charset="-120"/>
+              </a:rPr>
+              <a:t>Troposphere: </a:t>
+            </a:r>
+            <a:pPr algn="l" indent="0" marL="0">
+              <a:spcAft>
+                <a:spcPts val="800"/>
+              </a:spcAft>
+              <a:buNone/>
+            </a:pPr>
+            <a:r>
+              <a:rPr lang="en-US" sz="3600" dirty="0">
+                <a:solidFill>
+                  <a:srgbClr val="111111"/>
+                </a:solidFill>
+                <a:latin typeface="Times New Roman" pitchFamily="34" charset="0"/>
+                <a:ea typeface="Times New Roman" pitchFamily="34" charset="-122"/>
+                <a:cs typeface="Times New Roman" pitchFamily="34" charset="-120"/>
+              </a:rPr>
+              <a:t>It is the lowest layer, from 0 to about 12 km, where clouds, rain and weather occur.</a:t>
+            </a:r>
+            <a:endParaRPr lang="en-US" sz="3600" dirty="0"/>
+          </a:p>
+        </p:txBody>
+      </p:sp>
       <p:pic>
         <p:nvPicPr>
-          <p:cNvPr id="3" name="Image 0" descr="/home/claude/f4/img/minesec_sheet.png">    </p:cNvPr>
+          <p:cNvPr id="5" name="Image 0" descr="/home/claude/f4/img/v2/atmosphere_big.png">    </p:cNvPr>
           <p:cNvPicPr>
             <a:picLocks noChangeAspect="1"/>
           </p:cNvPicPr>
@@ -12225,8 +12592,8 @@
         </p:blipFill>
         <p:spPr>
           <a:xfrm>
-            <a:off x="0" y="658368"/>
-            <a:ext cx="1463040" cy="5833872"/>
+            <a:off x="5349240" y="2617506"/>
+            <a:ext cx="6659575" cy="2601397"/>
           </a:xfrm>
           <a:prstGeom prst="rect">
             <a:avLst/>
@@ -12235,14 +12602,14 @@
       </p:pic>
       <p:sp>
         <p:nvSpPr>
-          <p:cNvPr id="4" name="Text 1"/>
+          <p:cNvPr id="6" name="Text 3"/>
           <p:cNvSpPr/>
           <p:nvPr/>
         </p:nvSpPr>
         <p:spPr>
           <a:xfrm>
-            <a:off x="1691640" y="1005840"/>
-            <a:ext cx="10180015" cy="731520"/>
+            <a:off x="5349240" y="6089904"/>
+            <a:ext cx="6659575" cy="347472"/>
           </a:xfrm>
           <a:prstGeom prst="rect">
             <a:avLst/>
@@ -12251,159 +12618,24 @@
           <a:ln/>
         </p:spPr>
         <p:txBody>
-          <a:bodyPr wrap="square" lIns="0" tIns="0" rIns="0" bIns="0" rtlCol="0" anchor="ctr">
-            <a:normAutofit/>
-          </a:bodyPr>
+          <a:bodyPr wrap="square" lIns="0" tIns="0" rIns="0" bIns="0" rtlCol="0" anchor="ctr"/>
           <a:lstStyle/>
           <a:p>
             <a:pPr algn="ctr" indent="0" marL="0">
               <a:buNone/>
             </a:pPr>
             <a:r>
-              <a:rPr lang="en-US" sz="3600" b="1" dirty="0">
-                <a:solidFill>
-                  <a:srgbClr val="990011"/>
+              <a:rPr lang="en-US" sz="1600" i="1" dirty="0">
+                <a:solidFill>
+                  <a:srgbClr val="555555"/>
                 </a:solidFill>
                 <a:latin typeface="Times New Roman" pitchFamily="34" charset="0"/>
                 <a:ea typeface="Times New Roman" pitchFamily="34" charset="-122"/>
                 <a:cs typeface="Times New Roman" pitchFamily="34" charset="-120"/>
               </a:rPr>
-              <a:t>2. Structure of the Atmosphere (continued)</a:t>
-            </a:r>
-            <a:endParaRPr lang="en-US" sz="3600" dirty="0"/>
-          </a:p>
-        </p:txBody>
-      </p:sp>
-      <p:sp>
-        <p:nvSpPr>
-          <p:cNvPr id="5" name="Text 2"/>
-          <p:cNvSpPr/>
-          <p:nvPr/>
-        </p:nvSpPr>
-        <p:spPr>
-          <a:xfrm>
-            <a:off x="1691640" y="1783080"/>
-            <a:ext cx="10180015" cy="4663440"/>
-          </a:xfrm>
-          <a:prstGeom prst="rect">
-            <a:avLst/>
-          </a:prstGeom>
-          <a:noFill/>
-          <a:ln/>
-        </p:spPr>
-        <p:txBody>
-          <a:bodyPr wrap="square" lIns="0" tIns="0" rIns="0" bIns="0" rtlCol="0" anchor="t"/>
-          <a:lstStyle/>
-          <a:p>
-            <a:pPr algn="l" indent="0" marL="0">
-              <a:spcAft>
-                <a:spcPts val="800"/>
-              </a:spcAft>
-              <a:buNone/>
-            </a:pPr>
-            <a:r>
-              <a:rPr lang="en-US" sz="4000" b="1" dirty="0">
-                <a:solidFill>
-                  <a:srgbClr val="111111"/>
-                </a:solidFill>
-                <a:latin typeface="Times New Roman" pitchFamily="34" charset="0"/>
-                <a:ea typeface="Times New Roman" pitchFamily="34" charset="-122"/>
-                <a:cs typeface="Times New Roman" pitchFamily="34" charset="-120"/>
-              </a:rPr>
-              <a:t>Stratosphere: </a:t>
-            </a:r>
-            <a:pPr algn="l" indent="0" marL="0">
-              <a:spcAft>
-                <a:spcPts val="800"/>
-              </a:spcAft>
-              <a:buNone/>
-            </a:pPr>
-            <a:r>
-              <a:rPr lang="en-US" sz="4000" dirty="0">
-                <a:solidFill>
-                  <a:srgbClr val="111111"/>
-                </a:solidFill>
-                <a:latin typeface="Times New Roman" pitchFamily="34" charset="0"/>
-                <a:ea typeface="Times New Roman" pitchFamily="34" charset="-122"/>
-                <a:cs typeface="Times New Roman" pitchFamily="34" charset="-120"/>
-              </a:rPr>
-              <a:t>It is the layer from about 12 to 50 km, which contains the ozone layer and where temperature rises with height.</a:t>
-            </a:r>
-            <a:endParaRPr lang="en-US" sz="4000" dirty="0"/>
-          </a:p>
-          <a:p>
-            <a:pPr algn="l" indent="0" marL="0">
-              <a:spcAft>
-                <a:spcPts val="800"/>
-              </a:spcAft>
-              <a:buNone/>
-            </a:pPr>
-            <a:r>
-              <a:rPr lang="en-US" sz="4000" b="1" dirty="0">
-                <a:solidFill>
-                  <a:srgbClr val="111111"/>
-                </a:solidFill>
-                <a:latin typeface="Times New Roman" pitchFamily="34" charset="0"/>
-                <a:ea typeface="Times New Roman" pitchFamily="34" charset="-122"/>
-                <a:cs typeface="Times New Roman" pitchFamily="34" charset="-120"/>
-              </a:rPr>
-              <a:t>Mesosphere: </a:t>
-            </a:r>
-            <a:pPr algn="l" indent="0" marL="0">
-              <a:spcAft>
-                <a:spcPts val="800"/>
-              </a:spcAft>
-              <a:buNone/>
-            </a:pPr>
-            <a:r>
-              <a:rPr lang="en-US" sz="4000" dirty="0">
-                <a:solidFill>
-                  <a:srgbClr val="111111"/>
-                </a:solidFill>
-                <a:latin typeface="Times New Roman" pitchFamily="34" charset="0"/>
-                <a:ea typeface="Times New Roman" pitchFamily="34" charset="-122"/>
-                <a:cs typeface="Times New Roman" pitchFamily="34" charset="-120"/>
-              </a:rPr>
-              <a:t>It is the layer from about 50 to 85 km, which is very cold.</a:t>
-            </a:r>
-            <a:endParaRPr lang="en-US" sz="4000" dirty="0"/>
-          </a:p>
-          <a:p>
-            <a:pPr algn="l" indent="0" marL="0">
-              <a:spcAft>
-                <a:spcPts val="800"/>
-              </a:spcAft>
-              <a:buNone/>
-            </a:pPr>
-            <a:r>
-              <a:rPr lang="en-US" sz="4000" b="1" dirty="0">
-                <a:solidFill>
-                  <a:srgbClr val="111111"/>
-                </a:solidFill>
-                <a:latin typeface="Times New Roman" pitchFamily="34" charset="0"/>
-                <a:ea typeface="Times New Roman" pitchFamily="34" charset="-122"/>
-                <a:cs typeface="Times New Roman" pitchFamily="34" charset="-120"/>
-              </a:rPr>
-              <a:t>Thermosphere: </a:t>
-            </a:r>
-            <a:pPr algn="l" indent="0" marL="0">
-              <a:spcAft>
-                <a:spcPts val="800"/>
-              </a:spcAft>
-              <a:buNone/>
-            </a:pPr>
-            <a:r>
-              <a:rPr lang="en-US" sz="4000" dirty="0">
-                <a:solidFill>
-                  <a:srgbClr val="111111"/>
-                </a:solidFill>
-                <a:latin typeface="Times New Roman" pitchFamily="34" charset="0"/>
-                <a:ea typeface="Times New Roman" pitchFamily="34" charset="-122"/>
-                <a:cs typeface="Times New Roman" pitchFamily="34" charset="-120"/>
-              </a:rPr>
-              <a:t>It is the upper layer above about 85 km, where temperature rises again.</a:t>
-            </a:r>
-            <a:endParaRPr lang="en-US" sz="4000" dirty="0"/>
+              <a:t>Illustration: the layers of the atmosphere</a:t>
+            </a:r>
+            <a:endParaRPr lang="en-US" sz="1600" dirty="0"/>
           </a:p>
         </p:txBody>
       </p:sp>
@@ -12519,48 +12751,9 @@
           </a:p>
         </p:txBody>
       </p:sp>
-      <p:sp>
-        <p:nvSpPr>
-          <p:cNvPr id="3" name="Text 1"/>
-          <p:cNvSpPr/>
-          <p:nvPr/>
-        </p:nvSpPr>
-        <p:spPr>
-          <a:xfrm>
-            <a:off x="457200" y="1005840"/>
-            <a:ext cx="11277295" cy="731520"/>
-          </a:xfrm>
-          <a:prstGeom prst="rect">
-            <a:avLst/>
-          </a:prstGeom>
-          <a:noFill/>
-          <a:ln/>
-        </p:spPr>
-        <p:txBody>
-          <a:bodyPr wrap="square" lIns="0" tIns="0" rIns="0" bIns="0" rtlCol="0" anchor="ctr"/>
-          <a:lstStyle/>
-          <a:p>
-            <a:pPr algn="ctr" indent="0" marL="0">
-              <a:buNone/>
-            </a:pPr>
-            <a:r>
-              <a:rPr lang="en-US" sz="3600" b="1" dirty="0">
-                <a:solidFill>
-                  <a:srgbClr val="990011"/>
-                </a:solidFill>
-                <a:latin typeface="Times New Roman" pitchFamily="34" charset="0"/>
-                <a:ea typeface="Times New Roman" pitchFamily="34" charset="-122"/>
-                <a:cs typeface="Times New Roman" pitchFamily="34" charset="-120"/>
-              </a:rPr>
-              <a:t>2. Structure of the Atmosphere</a:t>
-            </a:r>
-            <a:endParaRPr lang="en-US" sz="3600" dirty="0"/>
-          </a:p>
-        </p:txBody>
-      </p:sp>
       <p:pic>
         <p:nvPicPr>
-          <p:cNvPr id="4" name="Image 0" descr="/home/claude/f4/img/v2/atmosphere_big.png">    </p:cNvPr>
+          <p:cNvPr id="3" name="Image 0" descr="/home/claude/f4/img/minesec_sheet.png">    </p:cNvPr>
           <p:cNvPicPr>
             <a:picLocks noChangeAspect="1"/>
           </p:cNvPicPr>
@@ -12574,8 +12767,8 @@
         </p:blipFill>
         <p:spPr>
           <a:xfrm>
-            <a:off x="629930" y="1783080"/>
-            <a:ext cx="10931835" cy="4270248"/>
+            <a:off x="0" y="658368"/>
+            <a:ext cx="1463040" cy="5833872"/>
           </a:xfrm>
           <a:prstGeom prst="rect">
             <a:avLst/>
@@ -12584,14 +12777,14 @@
       </p:pic>
       <p:sp>
         <p:nvSpPr>
-          <p:cNvPr id="5" name="Text 2"/>
+          <p:cNvPr id="4" name="Text 1"/>
           <p:cNvSpPr/>
           <p:nvPr/>
         </p:nvSpPr>
         <p:spPr>
           <a:xfrm>
-            <a:off x="457200" y="6089904"/>
-            <a:ext cx="11277295" cy="347472"/>
+            <a:off x="1691640" y="1005840"/>
+            <a:ext cx="10180015" cy="731520"/>
           </a:xfrm>
           <a:prstGeom prst="rect">
             <a:avLst/>
@@ -12600,24 +12793,159 @@
           <a:ln/>
         </p:spPr>
         <p:txBody>
-          <a:bodyPr wrap="square" lIns="0" tIns="0" rIns="0" bIns="0" rtlCol="0" anchor="ctr"/>
+          <a:bodyPr wrap="square" lIns="0" tIns="0" rIns="0" bIns="0" rtlCol="0" anchor="ctr">
+            <a:normAutofit/>
+          </a:bodyPr>
           <a:lstStyle/>
           <a:p>
             <a:pPr algn="ctr" indent="0" marL="0">
               <a:buNone/>
             </a:pPr>
             <a:r>
-              <a:rPr lang="en-US" sz="1800" i="1" dirty="0">
-                <a:solidFill>
-                  <a:srgbClr val="555555"/>
+              <a:rPr lang="en-US" sz="3600" b="1" dirty="0">
+                <a:solidFill>
+                  <a:srgbClr val="990011"/>
                 </a:solidFill>
                 <a:latin typeface="Times New Roman" pitchFamily="34" charset="0"/>
                 <a:ea typeface="Times New Roman" pitchFamily="34" charset="-122"/>
                 <a:cs typeface="Times New Roman" pitchFamily="34" charset="-120"/>
               </a:rPr>
-              <a:t>Illustration: the layers of the atmosphere</a:t>
-            </a:r>
-            <a:endParaRPr lang="en-US" sz="1800" dirty="0"/>
+              <a:t>1. Structure of the Atmosphere</a:t>
+            </a:r>
+            <a:endParaRPr lang="en-US" sz="3600" dirty="0"/>
+          </a:p>
+        </p:txBody>
+      </p:sp>
+      <p:sp>
+        <p:nvSpPr>
+          <p:cNvPr id="5" name="Text 2"/>
+          <p:cNvSpPr/>
+          <p:nvPr/>
+        </p:nvSpPr>
+        <p:spPr>
+          <a:xfrm>
+            <a:off x="1691640" y="1783080"/>
+            <a:ext cx="10180015" cy="4663440"/>
+          </a:xfrm>
+          <a:prstGeom prst="rect">
+            <a:avLst/>
+          </a:prstGeom>
+          <a:noFill/>
+          <a:ln/>
+        </p:spPr>
+        <p:txBody>
+          <a:bodyPr wrap="square" lIns="0" tIns="0" rIns="0" bIns="0" rtlCol="0" anchor="t"/>
+          <a:lstStyle/>
+          <a:p>
+            <a:pPr algn="l" indent="0" marL="0">
+              <a:spcAft>
+                <a:spcPts val="800"/>
+              </a:spcAft>
+              <a:buNone/>
+            </a:pPr>
+            <a:r>
+              <a:rPr lang="en-US" sz="4000" b="1" dirty="0">
+                <a:solidFill>
+                  <a:srgbClr val="111111"/>
+                </a:solidFill>
+                <a:latin typeface="Times New Roman" pitchFamily="34" charset="0"/>
+                <a:ea typeface="Times New Roman" pitchFamily="34" charset="-122"/>
+                <a:cs typeface="Times New Roman" pitchFamily="34" charset="-120"/>
+              </a:rPr>
+              <a:t>Stratosphere: </a:t>
+            </a:r>
+            <a:pPr algn="l" indent="0" marL="0">
+              <a:spcAft>
+                <a:spcPts val="800"/>
+              </a:spcAft>
+              <a:buNone/>
+            </a:pPr>
+            <a:r>
+              <a:rPr lang="en-US" sz="4000" dirty="0">
+                <a:solidFill>
+                  <a:srgbClr val="111111"/>
+                </a:solidFill>
+                <a:latin typeface="Times New Roman" pitchFamily="34" charset="0"/>
+                <a:ea typeface="Times New Roman" pitchFamily="34" charset="-122"/>
+                <a:cs typeface="Times New Roman" pitchFamily="34" charset="-120"/>
+              </a:rPr>
+              <a:t>It is the layer from about 12 to 50 km, which contains the ozone layer.</a:t>
+            </a:r>
+            <a:endParaRPr lang="en-US" sz="4000" dirty="0"/>
+          </a:p>
+          <a:p>
+            <a:pPr algn="l" indent="0" marL="0">
+              <a:spcAft>
+                <a:spcPts val="800"/>
+              </a:spcAft>
+              <a:buNone/>
+            </a:pPr>
+            <a:r>
+              <a:rPr lang="en-US" sz="4000" b="1" dirty="0">
+                <a:solidFill>
+                  <a:srgbClr val="111111"/>
+                </a:solidFill>
+                <a:latin typeface="Times New Roman" pitchFamily="34" charset="0"/>
+                <a:ea typeface="Times New Roman" pitchFamily="34" charset="-122"/>
+                <a:cs typeface="Times New Roman" pitchFamily="34" charset="-120"/>
+              </a:rPr>
+              <a:t>Mesosphere: </a:t>
+            </a:r>
+            <a:pPr algn="l" indent="0" marL="0">
+              <a:spcAft>
+                <a:spcPts val="800"/>
+              </a:spcAft>
+              <a:buNone/>
+            </a:pPr>
+            <a:r>
+              <a:rPr lang="en-US" sz="4000" dirty="0">
+                <a:solidFill>
+                  <a:srgbClr val="111111"/>
+                </a:solidFill>
+                <a:latin typeface="Times New Roman" pitchFamily="34" charset="0"/>
+                <a:ea typeface="Times New Roman" pitchFamily="34" charset="-122"/>
+                <a:cs typeface="Times New Roman" pitchFamily="34" charset="-120"/>
+              </a:rPr>
+              <a:t>It is the layer from about 50 to 85 km, which is the coldest.</a:t>
+            </a:r>
+            <a:endParaRPr lang="en-US" sz="4000" dirty="0"/>
+          </a:p>
+          <a:p>
+            <a:pPr algn="l" indent="0" marL="0">
+              <a:spcAft>
+                <a:spcPts val="800"/>
+              </a:spcAft>
+              <a:buNone/>
+            </a:pPr>
+            <a:r>
+              <a:rPr lang="en-US" sz="4000" b="1" dirty="0">
+                <a:solidFill>
+                  <a:srgbClr val="111111"/>
+                </a:solidFill>
+                <a:latin typeface="Times New Roman" pitchFamily="34" charset="0"/>
+                <a:ea typeface="Times New Roman" pitchFamily="34" charset="-122"/>
+                <a:cs typeface="Times New Roman" pitchFamily="34" charset="-120"/>
+              </a:rPr>
+              <a:t>Thermosphere: </a:t>
+            </a:r>
+            <a:pPr algn="l" indent="0" marL="0">
+              <a:spcAft>
+                <a:spcPts val="800"/>
+              </a:spcAft>
+              <a:buNone/>
+            </a:pPr>
+            <a:r>
+              <a:rPr lang="en-US" sz="4000" dirty="0">
+                <a:solidFill>
+                  <a:srgbClr val="111111"/>
+                </a:solidFill>
+                <a:latin typeface="Times New Roman" pitchFamily="34" charset="0"/>
+                <a:ea typeface="Times New Roman" pitchFamily="34" charset="-122"/>
+                <a:cs typeface="Times New Roman" pitchFamily="34" charset="-120"/>
+              </a:rPr>
+              <a:t>It is the upper layer above about 85 km, where the air is very thin.</a:t>
+            </a:r>
+            <a:endParaRPr lang="en-US" sz="4000" dirty="0"/>
           </a:p>
         </p:txBody>
       </p:sp>
@@ -12733,9 +13061,129 @@
           </a:p>
         </p:txBody>
       </p:sp>
+      <p:sp>
+        <p:nvSpPr>
+          <p:cNvPr id="3" name="Text 1"/>
+          <p:cNvSpPr/>
+          <p:nvPr/>
+        </p:nvSpPr>
+        <p:spPr>
+          <a:xfrm>
+            <a:off x="365760" y="1005840"/>
+            <a:ext cx="11460175" cy="731520"/>
+          </a:xfrm>
+          <a:prstGeom prst="rect">
+            <a:avLst/>
+          </a:prstGeom>
+          <a:noFill/>
+          <a:ln/>
+        </p:spPr>
+        <p:txBody>
+          <a:bodyPr wrap="square" lIns="0" tIns="0" rIns="0" bIns="0" rtlCol="0" anchor="ctr">
+            <a:normAutofit/>
+          </a:bodyPr>
+          <a:lstStyle/>
+          <a:p>
+            <a:pPr algn="ctr" indent="0" marL="0">
+              <a:buNone/>
+            </a:pPr>
+            <a:r>
+              <a:rPr lang="en-US" sz="3600" b="1" dirty="0">
+                <a:solidFill>
+                  <a:srgbClr val="990011"/>
+                </a:solidFill>
+                <a:latin typeface="Times New Roman" pitchFamily="34" charset="0"/>
+                <a:ea typeface="Times New Roman" pitchFamily="34" charset="-122"/>
+                <a:cs typeface="Times New Roman" pitchFamily="34" charset="-120"/>
+              </a:rPr>
+              <a:t>2. Thermal Structure in the Troposphere and the Stratosphere</a:t>
+            </a:r>
+            <a:endParaRPr lang="en-US" sz="3600" dirty="0"/>
+          </a:p>
+        </p:txBody>
+      </p:sp>
+      <p:sp>
+        <p:nvSpPr>
+          <p:cNvPr id="4" name="Text 2"/>
+          <p:cNvSpPr/>
+          <p:nvPr/>
+        </p:nvSpPr>
+        <p:spPr>
+          <a:xfrm>
+            <a:off x="365760" y="1783080"/>
+            <a:ext cx="4846320" cy="4617720"/>
+          </a:xfrm>
+          <a:prstGeom prst="rect">
+            <a:avLst/>
+          </a:prstGeom>
+          <a:noFill/>
+          <a:ln/>
+        </p:spPr>
+        <p:txBody>
+          <a:bodyPr wrap="square" lIns="0" tIns="0" rIns="0" bIns="0" rtlCol="0" anchor="t"/>
+          <a:lstStyle/>
+          <a:p>
+            <a:pPr algn="l" indent="0" marL="0">
+              <a:spcAft>
+                <a:spcPts val="800"/>
+              </a:spcAft>
+              <a:buNone/>
+            </a:pPr>
+            <a:r>
+              <a:rPr lang="en-US" sz="3600" i="1" dirty="0">
+                <a:solidFill>
+                  <a:srgbClr val="111111"/>
+                </a:solidFill>
+                <a:latin typeface="Times New Roman" pitchFamily="34" charset="0"/>
+                <a:ea typeface="Times New Roman" pitchFamily="34" charset="-122"/>
+                <a:cs typeface="Times New Roman" pitchFamily="34" charset="-120"/>
+              </a:rPr>
+              <a:t>Temperature changes with height as follows:</a:t>
+            </a:r>
+            <a:endParaRPr lang="en-US" sz="3600" dirty="0"/>
+          </a:p>
+          <a:p>
+            <a:pPr algn="l" indent="0" marL="0">
+              <a:spcAft>
+                <a:spcPts val="800"/>
+              </a:spcAft>
+              <a:buNone/>
+            </a:pPr>
+            <a:r>
+              <a:rPr lang="en-US" sz="3600" b="1" dirty="0">
+                <a:solidFill>
+                  <a:srgbClr val="111111"/>
+                </a:solidFill>
+                <a:latin typeface="Times New Roman" pitchFamily="34" charset="0"/>
+                <a:ea typeface="Times New Roman" pitchFamily="34" charset="-122"/>
+                <a:cs typeface="Times New Roman" pitchFamily="34" charset="-120"/>
+              </a:rPr>
+              <a:t>Troposphere: </a:t>
+            </a:r>
+            <a:pPr algn="l" indent="0" marL="0">
+              <a:spcAft>
+                <a:spcPts val="800"/>
+              </a:spcAft>
+              <a:buNone/>
+            </a:pPr>
+            <a:r>
+              <a:rPr lang="en-US" sz="3600" dirty="0">
+                <a:solidFill>
+                  <a:srgbClr val="111111"/>
+                </a:solidFill>
+                <a:latin typeface="Times New Roman" pitchFamily="34" charset="0"/>
+                <a:ea typeface="Times New Roman" pitchFamily="34" charset="-122"/>
+                <a:cs typeface="Times New Roman" pitchFamily="34" charset="-120"/>
+              </a:rPr>
+              <a:t>Temperature falls with height by about 6.5 °C per 1,000 m, because the air is heated from the ground.</a:t>
+            </a:r>
+            <a:endParaRPr lang="en-US" sz="3600" dirty="0"/>
+          </a:p>
+        </p:txBody>
+      </p:sp>
       <p:pic>
         <p:nvPicPr>
-          <p:cNvPr id="3" name="Image 0" descr="/home/claude/f4/img/minesec_sheet.png">    </p:cNvPr>
+          <p:cNvPr id="5" name="Image 0" descr="/home/claude/f4/img/v2/temp_profile_big.png">    </p:cNvPr>
           <p:cNvPicPr>
             <a:picLocks noChangeAspect="1"/>
           </p:cNvPicPr>
@@ -12749,8 +13197,8 @@
         </p:blipFill>
         <p:spPr>
           <a:xfrm>
-            <a:off x="0" y="658368"/>
-            <a:ext cx="1463040" cy="5833872"/>
+            <a:off x="5349240" y="2461422"/>
+            <a:ext cx="6659575" cy="2913564"/>
           </a:xfrm>
           <a:prstGeom prst="rect">
             <a:avLst/>
@@ -12759,14 +13207,14 @@
       </p:pic>
       <p:sp>
         <p:nvSpPr>
-          <p:cNvPr id="4" name="Text 1"/>
+          <p:cNvPr id="6" name="Text 3"/>
           <p:cNvSpPr/>
           <p:nvPr/>
         </p:nvSpPr>
         <p:spPr>
           <a:xfrm>
-            <a:off x="1691640" y="1005840"/>
-            <a:ext cx="10180015" cy="731520"/>
+            <a:off x="5349240" y="6089904"/>
+            <a:ext cx="6659575" cy="347472"/>
           </a:xfrm>
           <a:prstGeom prst="rect">
             <a:avLst/>
@@ -12775,142 +13223,24 @@
           <a:ln/>
         </p:spPr>
         <p:txBody>
-          <a:bodyPr wrap="square" lIns="0" tIns="0" rIns="0" bIns="0" rtlCol="0" anchor="ctr">
-            <a:normAutofit/>
-          </a:bodyPr>
+          <a:bodyPr wrap="square" lIns="0" tIns="0" rIns="0" bIns="0" rtlCol="0" anchor="ctr"/>
           <a:lstStyle/>
           <a:p>
             <a:pPr algn="ctr" indent="0" marL="0">
               <a:buNone/>
             </a:pPr>
             <a:r>
-              <a:rPr lang="en-US" sz="3600" b="1" dirty="0">
-                <a:solidFill>
-                  <a:srgbClr val="990011"/>
+              <a:rPr lang="en-US" sz="1600" i="1" dirty="0">
+                <a:solidFill>
+                  <a:srgbClr val="555555"/>
                 </a:solidFill>
                 <a:latin typeface="Times New Roman" pitchFamily="34" charset="0"/>
                 <a:ea typeface="Times New Roman" pitchFamily="34" charset="-122"/>
                 <a:cs typeface="Times New Roman" pitchFamily="34" charset="-120"/>
               </a:rPr>
-              <a:t>3. Ozone Layer Depletion</a:t>
-            </a:r>
-            <a:endParaRPr lang="en-US" sz="3600" dirty="0"/>
-          </a:p>
-        </p:txBody>
-      </p:sp>
-      <p:sp>
-        <p:nvSpPr>
-          <p:cNvPr id="5" name="Text 2"/>
-          <p:cNvSpPr/>
-          <p:nvPr/>
-        </p:nvSpPr>
-        <p:spPr>
-          <a:xfrm>
-            <a:off x="1691640" y="1783080"/>
-            <a:ext cx="10180015" cy="4663440"/>
-          </a:xfrm>
-          <a:prstGeom prst="rect">
-            <a:avLst/>
-          </a:prstGeom>
-          <a:noFill/>
-          <a:ln/>
-        </p:spPr>
-        <p:txBody>
-          <a:bodyPr wrap="square" lIns="0" tIns="0" rIns="0" bIns="0" rtlCol="0" anchor="t"/>
-          <a:lstStyle/>
-          <a:p>
-            <a:pPr algn="l" indent="0" marL="0">
-              <a:spcAft>
-                <a:spcPts val="800"/>
-              </a:spcAft>
-              <a:buNone/>
-            </a:pPr>
-            <a:r>
-              <a:rPr lang="en-US" sz="4000" i="1" dirty="0">
-                <a:solidFill>
-                  <a:srgbClr val="111111"/>
-                </a:solidFill>
-                <a:latin typeface="Times New Roman" pitchFamily="34" charset="0"/>
-                <a:ea typeface="Times New Roman" pitchFamily="34" charset="-122"/>
-                <a:cs typeface="Times New Roman" pitchFamily="34" charset="-120"/>
-              </a:rPr>
-              <a:t>The depletion of the ozone layer is explained as follows:</a:t>
-            </a:r>
-            <a:endParaRPr lang="en-US" sz="4000" dirty="0"/>
-          </a:p>
-          <a:p>
-            <a:pPr algn="l" indent="0" marL="0">
-              <a:spcAft>
-                <a:spcPts val="800"/>
-              </a:spcAft>
-              <a:buNone/>
-            </a:pPr>
-            <a:r>
-              <a:rPr lang="en-US" sz="4000" b="1" dirty="0">
-                <a:solidFill>
-                  <a:srgbClr val="111111"/>
-                </a:solidFill>
-                <a:latin typeface="Times New Roman" pitchFamily="34" charset="0"/>
-                <a:ea typeface="Times New Roman" pitchFamily="34" charset="-122"/>
-                <a:cs typeface="Times New Roman" pitchFamily="34" charset="-120"/>
-              </a:rPr>
-              <a:t>Ozone layer: </a:t>
-            </a:r>
-            <a:pPr algn="l" indent="0" marL="0">
-              <a:spcAft>
-                <a:spcPts val="800"/>
-              </a:spcAft>
-              <a:buNone/>
-            </a:pPr>
-            <a:r>
-              <a:rPr lang="en-US" sz="4000" dirty="0">
-                <a:solidFill>
-                  <a:srgbClr val="111111"/>
-                </a:solidFill>
-                <a:latin typeface="Times New Roman" pitchFamily="34" charset="0"/>
-                <a:ea typeface="Times New Roman" pitchFamily="34" charset="-122"/>
-                <a:cs typeface="Times New Roman" pitchFamily="34" charset="-120"/>
-              </a:rPr>
-              <a:t>It is a layer of gas in the stratosphere that stops harmful rays of the Sun.</a:t>
-            </a:r>
-            <a:endParaRPr lang="en-US" sz="4000" dirty="0"/>
-          </a:p>
-          <a:p>
-            <a:pPr algn="l" indent="0" marL="0">
-              <a:spcAft>
-                <a:spcPts val="800"/>
-              </a:spcAft>
-              <a:buNone/>
-            </a:pPr>
-            <a:r>
-              <a:rPr lang="en-US" sz="4000" b="1" dirty="0">
-                <a:solidFill>
-                  <a:srgbClr val="111111"/>
-                </a:solidFill>
-                <a:latin typeface="Times New Roman" pitchFamily="34" charset="0"/>
-                <a:ea typeface="Times New Roman" pitchFamily="34" charset="-122"/>
-                <a:cs typeface="Times New Roman" pitchFamily="34" charset="-120"/>
-              </a:rPr>
-              <a:t>Cause: </a:t>
-            </a:r>
-            <a:pPr algn="l" indent="0" marL="0">
-              <a:spcAft>
-                <a:spcPts val="800"/>
-              </a:spcAft>
-              <a:buNone/>
-            </a:pPr>
-            <a:r>
-              <a:rPr lang="en-US" sz="4000" dirty="0">
-                <a:solidFill>
-                  <a:srgbClr val="111111"/>
-                </a:solidFill>
-                <a:latin typeface="Times New Roman" pitchFamily="34" charset="0"/>
-                <a:ea typeface="Times New Roman" pitchFamily="34" charset="-122"/>
-                <a:cs typeface="Times New Roman" pitchFamily="34" charset="-120"/>
-              </a:rPr>
-              <a:t>CFC gases from old fridges, air conditioners and sprays destroy the ozone.</a:t>
-            </a:r>
-            <a:endParaRPr lang="en-US" sz="4000" dirty="0"/>
+              <a:t>Illustration: temperature and height</a:t>
+            </a:r>
+            <a:endParaRPr lang="en-US" sz="1600" dirty="0"/>
           </a:p>
         </p:txBody>
       </p:sp>
@@ -13043,7 +13373,7 @@
         <p:spPr>
           <a:xfrm>
             <a:off x="0" y="658368"/>
-            <a:ext cx="5120640" cy="5833872"/>
+            <a:ext cx="3840480" cy="5833872"/>
           </a:xfrm>
           <a:prstGeom prst="rect">
             <a:avLst/>
@@ -13058,8 +13388,8 @@
         </p:nvSpPr>
         <p:spPr>
           <a:xfrm>
-            <a:off x="5349240" y="1005840"/>
-            <a:ext cx="6522415" cy="731520"/>
+            <a:off x="4069080" y="1005840"/>
+            <a:ext cx="7802575" cy="731520"/>
           </a:xfrm>
           <a:prstGeom prst="rect">
             <a:avLst/>
@@ -13085,7 +13415,7 @@
                 <a:ea typeface="Times New Roman" pitchFamily="34" charset="-122"/>
                 <a:cs typeface="Times New Roman" pitchFamily="34" charset="-120"/>
               </a:rPr>
-              <a:t>3. Ozone Layer Depletion (continued)</a:t>
+              <a:t>2. Thermal Structure in the Troposphere and the Stratosphere</a:t>
             </a:r>
             <a:endParaRPr lang="en-US" sz="3600" dirty="0"/>
           </a:p>
@@ -13099,8 +13429,8 @@
         </p:nvSpPr>
         <p:spPr>
           <a:xfrm>
-            <a:off x="5349240" y="1783080"/>
-            <a:ext cx="6522415" cy="4663440"/>
+            <a:off x="4069080" y="1783080"/>
+            <a:ext cx="7802575" cy="4663440"/>
           </a:xfrm>
           <a:prstGeom prst="rect">
             <a:avLst/>
@@ -13127,7 +13457,7 @@
                 <a:ea typeface="Times New Roman" pitchFamily="34" charset="-122"/>
                 <a:cs typeface="Times New Roman" pitchFamily="34" charset="-120"/>
               </a:rPr>
-              <a:t>Effects: </a:t>
+              <a:t>Tropopause: </a:t>
             </a:r>
             <a:pPr algn="l" indent="0" marL="0">
               <a:spcAft>
@@ -13144,7 +13474,7 @@
                 <a:ea typeface="Times New Roman" pitchFamily="34" charset="-122"/>
                 <a:cs typeface="Times New Roman" pitchFamily="34" charset="-120"/>
               </a:rPr>
-              <a:t>More harmful rays cause skin cancer and eye diseases.</a:t>
+              <a:t>At the top of the troposphere, temperature stops falling, at about −55 °C.</a:t>
             </a:r>
             <a:endParaRPr lang="en-US" sz="4000" dirty="0"/>
           </a:p>
@@ -13164,7 +13494,7 @@
                 <a:ea typeface="Times New Roman" pitchFamily="34" charset="-122"/>
                 <a:cs typeface="Times New Roman" pitchFamily="34" charset="-120"/>
               </a:rPr>
-              <a:t>Solution: </a:t>
+              <a:t>Stratosphere: </a:t>
             </a:r>
             <a:pPr algn="l" indent="0" marL="0">
               <a:spcAft>
@@ -13181,7 +13511,7 @@
                 <a:ea typeface="Times New Roman" pitchFamily="34" charset="-122"/>
                 <a:cs typeface="Times New Roman" pitchFamily="34" charset="-120"/>
               </a:rPr>
-              <a:t>CFCs were banned by the Montreal Protocol of 1987.</a:t>
+              <a:t>Temperature rises with height, because the ozone absorbs the rays of the Sun.</a:t>
             </a:r>
             <a:endParaRPr lang="en-US" sz="4000" dirty="0"/>
           </a:p>
@@ -13293,15 +13623,135 @@
                 <a:ea typeface="Calibri" pitchFamily="34" charset="-122"/>
                 <a:cs typeface="Calibri" pitchFamily="34" charset="-120"/>
               </a:rPr>
-              <a:t>FORMATIVE EVALUATION</a:t>
+              <a:t>BOARD SUMMARY</a:t>
             </a:r>
             <a:endParaRPr lang="en-US" sz="1400" dirty="0"/>
+          </a:p>
+        </p:txBody>
+      </p:sp>
+      <p:sp>
+        <p:nvSpPr>
+          <p:cNvPr id="3" name="Text 1"/>
+          <p:cNvSpPr/>
+          <p:nvPr/>
+        </p:nvSpPr>
+        <p:spPr>
+          <a:xfrm>
+            <a:off x="365760" y="1005840"/>
+            <a:ext cx="11460175" cy="731520"/>
+          </a:xfrm>
+          <a:prstGeom prst="rect">
+            <a:avLst/>
+          </a:prstGeom>
+          <a:noFill/>
+          <a:ln/>
+        </p:spPr>
+        <p:txBody>
+          <a:bodyPr wrap="square" lIns="0" tIns="0" rIns="0" bIns="0" rtlCol="0" anchor="ctr">
+            <a:normAutofit/>
+          </a:bodyPr>
+          <a:lstStyle/>
+          <a:p>
+            <a:pPr algn="ctr" indent="0" marL="0">
+              <a:buNone/>
+            </a:pPr>
+            <a:r>
+              <a:rPr lang="en-US" sz="3600" b="1" dirty="0">
+                <a:solidFill>
+                  <a:srgbClr val="990011"/>
+                </a:solidFill>
+                <a:latin typeface="Times New Roman" pitchFamily="34" charset="0"/>
+                <a:ea typeface="Times New Roman" pitchFamily="34" charset="-122"/>
+                <a:cs typeface="Times New Roman" pitchFamily="34" charset="-120"/>
+              </a:rPr>
+              <a:t>3. Ozone Layer Depletion</a:t>
+            </a:r>
+            <a:endParaRPr lang="en-US" sz="3600" dirty="0"/>
+          </a:p>
+        </p:txBody>
+      </p:sp>
+      <p:sp>
+        <p:nvSpPr>
+          <p:cNvPr id="4" name="Text 2"/>
+          <p:cNvSpPr/>
+          <p:nvPr/>
+        </p:nvSpPr>
+        <p:spPr>
+          <a:xfrm>
+            <a:off x="365760" y="1783080"/>
+            <a:ext cx="4846320" cy="4617720"/>
+          </a:xfrm>
+          <a:prstGeom prst="rect">
+            <a:avLst/>
+          </a:prstGeom>
+          <a:noFill/>
+          <a:ln/>
+        </p:spPr>
+        <p:txBody>
+          <a:bodyPr wrap="square" lIns="0" tIns="0" rIns="0" bIns="0" rtlCol="0" anchor="t"/>
+          <a:lstStyle/>
+          <a:p>
+            <a:pPr algn="l" indent="0" marL="0">
+              <a:spcAft>
+                <a:spcPts val="800"/>
+              </a:spcAft>
+              <a:buNone/>
+            </a:pPr>
+            <a:r>
+              <a:rPr lang="en-US" sz="3600" i="1" dirty="0">
+                <a:solidFill>
+                  <a:srgbClr val="111111"/>
+                </a:solidFill>
+                <a:latin typeface="Times New Roman" pitchFamily="34" charset="0"/>
+                <a:ea typeface="Times New Roman" pitchFamily="34" charset="-122"/>
+                <a:cs typeface="Times New Roman" pitchFamily="34" charset="-120"/>
+              </a:rPr>
+              <a:t>Ozone layer depletion is explained as follows:</a:t>
+            </a:r>
+            <a:endParaRPr lang="en-US" sz="3600" dirty="0"/>
+          </a:p>
+          <a:p>
+            <a:pPr algn="l" indent="0" marL="0">
+              <a:spcAft>
+                <a:spcPts val="800"/>
+              </a:spcAft>
+              <a:buNone/>
+            </a:pPr>
+            <a:r>
+              <a:rPr lang="en-US" sz="3600" b="1" dirty="0">
+                <a:solidFill>
+                  <a:srgbClr val="111111"/>
+                </a:solidFill>
+                <a:latin typeface="Times New Roman" pitchFamily="34" charset="0"/>
+                <a:ea typeface="Times New Roman" pitchFamily="34" charset="-122"/>
+                <a:cs typeface="Times New Roman" pitchFamily="34" charset="-120"/>
+              </a:rPr>
+              <a:t>Causes: </a:t>
+            </a:r>
+            <a:pPr algn="l" indent="0" marL="0">
+              <a:spcAft>
+                <a:spcPts val="800"/>
+              </a:spcAft>
+              <a:buNone/>
+            </a:pPr>
+            <a:r>
+              <a:rPr lang="en-US" sz="3600" dirty="0">
+                <a:solidFill>
+                  <a:srgbClr val="111111"/>
+                </a:solidFill>
+                <a:latin typeface="Times New Roman" pitchFamily="34" charset="0"/>
+                <a:ea typeface="Times New Roman" pitchFamily="34" charset="-122"/>
+                <a:cs typeface="Times New Roman" pitchFamily="34" charset="-120"/>
+              </a:rPr>
+              <a:t>CFC gases from old fridges, air conditioners, sprays and foams rise and destroy the ozone.</a:t>
+            </a:r>
+            <a:endParaRPr lang="en-US" sz="3600" dirty="0"/>
           </a:p>
         </p:txBody>
       </p:sp>
       <p:pic>
         <p:nvPicPr>
-          <p:cNvPr id="3" name="Image 0" descr="/home/claude/f4/img/minesec_sheet.png">    </p:cNvPr>
+          <p:cNvPr id="5" name="Image 0" descr="/home/claude/f4/img/v2/f4_ozonehole.jpg">    </p:cNvPr>
           <p:cNvPicPr>
             <a:picLocks noChangeAspect="1"/>
           </p:cNvPicPr>
@@ -13315,8 +13765,8 @@
         </p:blipFill>
         <p:spPr>
           <a:xfrm>
-            <a:off x="0" y="658368"/>
-            <a:ext cx="5120640" cy="5833872"/>
+            <a:off x="5349240" y="2071212"/>
+            <a:ext cx="6659575" cy="3693983"/>
           </a:xfrm>
           <a:prstGeom prst="rect">
             <a:avLst/>
@@ -13325,14 +13775,14 @@
       </p:pic>
       <p:sp>
         <p:nvSpPr>
-          <p:cNvPr id="4" name="Text 1"/>
+          <p:cNvPr id="6" name="Text 3"/>
           <p:cNvSpPr/>
           <p:nvPr/>
         </p:nvSpPr>
         <p:spPr>
           <a:xfrm>
-            <a:off x="5349240" y="1005840"/>
-            <a:ext cx="6522415" cy="731520"/>
+            <a:off x="5349240" y="6089904"/>
+            <a:ext cx="6659575" cy="347472"/>
           </a:xfrm>
           <a:prstGeom prst="rect">
             <a:avLst/>
@@ -13341,68 +13791,24 @@
           <a:ln/>
         </p:spPr>
         <p:txBody>
-          <a:bodyPr wrap="square" lIns="0" tIns="0" rIns="0" bIns="0" rtlCol="0" anchor="ctr">
-            <a:normAutofit/>
-          </a:bodyPr>
+          <a:bodyPr wrap="square" lIns="0" tIns="0" rIns="0" bIns="0" rtlCol="0" anchor="ctr"/>
           <a:lstStyle/>
           <a:p>
             <a:pPr algn="ctr" indent="0" marL="0">
               <a:buNone/>
             </a:pPr>
             <a:r>
-              <a:rPr lang="en-US" sz="3600" b="1" dirty="0">
-                <a:solidFill>
-                  <a:srgbClr val="990011"/>
+              <a:rPr lang="en-US" sz="1600" i="1" dirty="0">
+                <a:solidFill>
+                  <a:srgbClr val="555555"/>
                 </a:solidFill>
                 <a:latin typeface="Times New Roman" pitchFamily="34" charset="0"/>
                 <a:ea typeface="Times New Roman" pitchFamily="34" charset="-122"/>
                 <a:cs typeface="Times New Roman" pitchFamily="34" charset="-120"/>
               </a:rPr>
-              <a:t>Evaluation 1</a:t>
-            </a:r>
-            <a:endParaRPr lang="en-US" sz="3600" dirty="0"/>
-          </a:p>
-        </p:txBody>
-      </p:sp>
-      <p:sp>
-        <p:nvSpPr>
-          <p:cNvPr id="5" name="Text 2"/>
-          <p:cNvSpPr/>
-          <p:nvPr/>
-        </p:nvSpPr>
-        <p:spPr>
-          <a:xfrm>
-            <a:off x="5349240" y="1783080"/>
-            <a:ext cx="6522415" cy="4663440"/>
-          </a:xfrm>
-          <a:prstGeom prst="rect">
-            <a:avLst/>
-          </a:prstGeom>
-          <a:noFill/>
-          <a:ln/>
-        </p:spPr>
-        <p:txBody>
-          <a:bodyPr wrap="square" lIns="0" tIns="0" rIns="0" bIns="0" rtlCol="0" anchor="t"/>
-          <a:lstStyle/>
-          <a:p>
-            <a:pPr algn="l" indent="0" marL="0">
-              <a:spcAft>
-                <a:spcPts val="800"/>
-              </a:spcAft>
-              <a:buNone/>
-            </a:pPr>
-            <a:r>
-              <a:rPr lang="en-US" sz="4000" dirty="0">
-                <a:solidFill>
-                  <a:srgbClr val="111111"/>
-                </a:solidFill>
-                <a:latin typeface="Times New Roman" pitchFamily="34" charset="0"/>
-                <a:ea typeface="Times New Roman" pitchFamily="34" charset="-122"/>
-                <a:cs typeface="Times New Roman" pitchFamily="34" charset="-120"/>
-              </a:rPr>
-              <a:t>In which layer does the weather happen?</a:t>
-            </a:r>
-            <a:endParaRPr lang="en-US" sz="4000" dirty="0"/>
+              <a:t>Illustration: the ozone hole</a:t>
+            </a:r>
+            <a:endParaRPr lang="en-US" sz="1600" dirty="0"/>
           </a:p>
         </p:txBody>
       </p:sp>
@@ -13512,7 +13918,7 @@
                 <a:ea typeface="Calibri" pitchFamily="34" charset="-122"/>
                 <a:cs typeface="Calibri" pitchFamily="34" charset="-120"/>
               </a:rPr>
-              <a:t>FORMATIVE EVALUATION</a:t>
+              <a:t>BOARD SUMMARY</a:t>
             </a:r>
             <a:endParaRPr lang="en-US" sz="1400" dirty="0"/>
           </a:p>
@@ -13535,7 +13941,7 @@
         <p:spPr>
           <a:xfrm>
             <a:off x="0" y="658368"/>
-            <a:ext cx="5120640" cy="5833872"/>
+            <a:ext cx="3840480" cy="5833872"/>
           </a:xfrm>
           <a:prstGeom prst="rect">
             <a:avLst/>
@@ -13550,8 +13956,8 @@
         </p:nvSpPr>
         <p:spPr>
           <a:xfrm>
-            <a:off x="5349240" y="1005840"/>
-            <a:ext cx="6522415" cy="731520"/>
+            <a:off x="4069080" y="1005840"/>
+            <a:ext cx="7802575" cy="731520"/>
           </a:xfrm>
           <a:prstGeom prst="rect">
             <a:avLst/>
@@ -13577,7 +13983,7 @@
                 <a:ea typeface="Times New Roman" pitchFamily="34" charset="-122"/>
                 <a:cs typeface="Times New Roman" pitchFamily="34" charset="-120"/>
               </a:rPr>
-              <a:t>Expected Answer</a:t>
+              <a:t>3. Ozone Layer Depletion</a:t>
             </a:r>
             <a:endParaRPr lang="en-US" sz="3600" dirty="0"/>
           </a:p>
@@ -13591,8 +13997,8 @@
         </p:nvSpPr>
         <p:spPr>
           <a:xfrm>
-            <a:off x="5349240" y="1783080"/>
-            <a:ext cx="6522415" cy="4663440"/>
+            <a:off x="4069080" y="1783080"/>
+            <a:ext cx="7802575" cy="4663440"/>
           </a:xfrm>
           <a:prstGeom prst="rect">
             <a:avLst/>
@@ -13611,7 +14017,7 @@
               <a:buNone/>
             </a:pPr>
             <a:r>
-              <a:rPr lang="en-US" sz="4000" dirty="0">
+              <a:rPr lang="en-US" sz="4000" b="1" dirty="0">
                 <a:solidFill>
                   <a:srgbClr val="111111"/>
                 </a:solidFill>
@@ -13619,7 +14025,61 @@
                 <a:ea typeface="Times New Roman" pitchFamily="34" charset="-122"/>
                 <a:cs typeface="Times New Roman" pitchFamily="34" charset="-120"/>
               </a:rPr>
-              <a:t>In the troposphere.</a:t>
+              <a:t>Effects on people: </a:t>
+            </a:r>
+            <a:pPr algn="l" indent="0" marL="0">
+              <a:spcAft>
+                <a:spcPts val="800"/>
+              </a:spcAft>
+              <a:buNone/>
+            </a:pPr>
+            <a:r>
+              <a:rPr lang="en-US" sz="4000" dirty="0">
+                <a:solidFill>
+                  <a:srgbClr val="111111"/>
+                </a:solidFill>
+                <a:latin typeface="Times New Roman" pitchFamily="34" charset="0"/>
+                <a:ea typeface="Times New Roman" pitchFamily="34" charset="-122"/>
+                <a:cs typeface="Times New Roman" pitchFamily="34" charset="-120"/>
+              </a:rPr>
+              <a:t>More ultraviolet rays reach the ground and cause skin cancer, eye diseases and weak immunity.</a:t>
+            </a:r>
+            <a:endParaRPr lang="en-US" sz="4000" dirty="0"/>
+          </a:p>
+          <a:p>
+            <a:pPr algn="l" indent="0" marL="0">
+              <a:spcAft>
+                <a:spcPts val="800"/>
+              </a:spcAft>
+              <a:buNone/>
+            </a:pPr>
+            <a:r>
+              <a:rPr lang="en-US" sz="4000" b="1" dirty="0">
+                <a:solidFill>
+                  <a:srgbClr val="111111"/>
+                </a:solidFill>
+                <a:latin typeface="Times New Roman" pitchFamily="34" charset="0"/>
+                <a:ea typeface="Times New Roman" pitchFamily="34" charset="-122"/>
+                <a:cs typeface="Times New Roman" pitchFamily="34" charset="-120"/>
+              </a:rPr>
+              <a:t>Effects on nature: </a:t>
+            </a:r>
+            <a:pPr algn="l" indent="0" marL="0">
+              <a:spcAft>
+                <a:spcPts val="800"/>
+              </a:spcAft>
+              <a:buNone/>
+            </a:pPr>
+            <a:r>
+              <a:rPr lang="en-US" sz="4000" dirty="0">
+                <a:solidFill>
+                  <a:srgbClr val="111111"/>
+                </a:solidFill>
+                <a:latin typeface="Times New Roman" pitchFamily="34" charset="0"/>
+                <a:ea typeface="Times New Roman" pitchFamily="34" charset="-122"/>
+                <a:cs typeface="Times New Roman" pitchFamily="34" charset="-120"/>
+              </a:rPr>
+              <a:t>Ultraviolet rays damage crops, plankton and other living things.</a:t>
             </a:r>
             <a:endParaRPr lang="en-US" sz="4000" dirty="0"/>
           </a:p>
@@ -13731,7 +14191,7 @@
                 <a:ea typeface="Calibri" pitchFamily="34" charset="-122"/>
                 <a:cs typeface="Calibri" pitchFamily="34" charset="-120"/>
               </a:rPr>
-              <a:t>FORMATIVE EVALUATION</a:t>
+              <a:t>BOARD SUMMARY</a:t>
             </a:r>
             <a:endParaRPr lang="en-US" sz="1400" dirty="0"/>
           </a:p>
@@ -13796,7 +14256,7 @@
                 <a:ea typeface="Times New Roman" pitchFamily="34" charset="-122"/>
                 <a:cs typeface="Times New Roman" pitchFamily="34" charset="-120"/>
               </a:rPr>
-              <a:t>Evaluation 2</a:t>
+              <a:t>3. Ozone Layer Depletion (continued)</a:t>
             </a:r>
             <a:endParaRPr lang="en-US" sz="3600" dirty="0"/>
           </a:p>
@@ -13830,7 +14290,7 @@
               <a:buNone/>
             </a:pPr>
             <a:r>
-              <a:rPr lang="en-US" sz="4000" dirty="0">
+              <a:rPr lang="en-US" sz="4000" b="1" dirty="0">
                 <a:solidFill>
                   <a:srgbClr val="111111"/>
                 </a:solidFill>
@@ -13838,7 +14298,24 @@
                 <a:ea typeface="Times New Roman" pitchFamily="34" charset="-122"/>
                 <a:cs typeface="Times New Roman" pitchFamily="34" charset="-120"/>
               </a:rPr>
-              <a:t>What is the role of the ozone layer?</a:t>
+              <a:t>Solutions: </a:t>
+            </a:r>
+            <a:pPr algn="l" indent="0" marL="0">
+              <a:spcAft>
+                <a:spcPts val="800"/>
+              </a:spcAft>
+              <a:buNone/>
+            </a:pPr>
+            <a:r>
+              <a:rPr lang="en-US" sz="4000" dirty="0">
+                <a:solidFill>
+                  <a:srgbClr val="111111"/>
+                </a:solidFill>
+                <a:latin typeface="Times New Roman" pitchFamily="34" charset="0"/>
+                <a:ea typeface="Times New Roman" pitchFamily="34" charset="-122"/>
+                <a:cs typeface="Times New Roman" pitchFamily="34" charset="-120"/>
+              </a:rPr>
+              <a:t>CFCs were banned by the Montreal Protocol of 1987, and old fridges must be recycled safely.</a:t>
             </a:r>
             <a:endParaRPr lang="en-US" sz="4000" dirty="0"/>
           </a:p>
@@ -14015,7 +14492,7 @@
                 <a:ea typeface="Times New Roman" pitchFamily="34" charset="-122"/>
                 <a:cs typeface="Times New Roman" pitchFamily="34" charset="-120"/>
               </a:rPr>
-              <a:t>Expected Answer</a:t>
+              <a:t>Evaluation 1</a:t>
             </a:r>
             <a:endParaRPr lang="en-US" sz="3600" dirty="0"/>
           </a:p>
@@ -14057,7 +14534,7 @@
                 <a:ea typeface="Times New Roman" pitchFamily="34" charset="-122"/>
                 <a:cs typeface="Times New Roman" pitchFamily="34" charset="-120"/>
               </a:rPr>
-              <a:t>It stops harmful rays from the Sun.</a:t>
+              <a:t>In which layer does the weather happen?</a:t>
             </a:r>
             <a:endParaRPr lang="en-US" sz="4000" dirty="0"/>
           </a:p>
@@ -14169,7 +14646,7 @@
                 <a:ea typeface="Calibri" pitchFamily="34" charset="-122"/>
                 <a:cs typeface="Calibri" pitchFamily="34" charset="-120"/>
               </a:rPr>
-              <a:t>REMEDIATION</a:t>
+              <a:t>FORMATIVE EVALUATION</a:t>
             </a:r>
             <a:endParaRPr lang="en-US" sz="1400" dirty="0"/>
           </a:p>
@@ -14192,7 +14669,7 @@
         <p:spPr>
           <a:xfrm>
             <a:off x="0" y="658368"/>
-            <a:ext cx="2468880" cy="5833872"/>
+            <a:ext cx="5120640" cy="5833872"/>
           </a:xfrm>
           <a:prstGeom prst="rect">
             <a:avLst/>
@@ -14207,8 +14684,8 @@
         </p:nvSpPr>
         <p:spPr>
           <a:xfrm>
-            <a:off x="2697480" y="1005840"/>
-            <a:ext cx="9174175" cy="731520"/>
+            <a:off x="5349240" y="1005840"/>
+            <a:ext cx="6522415" cy="731520"/>
           </a:xfrm>
           <a:prstGeom prst="rect">
             <a:avLst/>
@@ -14234,7 +14711,7 @@
                 <a:ea typeface="Times New Roman" pitchFamily="34" charset="-122"/>
                 <a:cs typeface="Times New Roman" pitchFamily="34" charset="-120"/>
               </a:rPr>
-              <a:t>Remediation</a:t>
+              <a:t>Expected Answer</a:t>
             </a:r>
             <a:endParaRPr lang="en-US" sz="3600" dirty="0"/>
           </a:p>
@@ -14248,8 +14725,8 @@
         </p:nvSpPr>
         <p:spPr>
           <a:xfrm>
-            <a:off x="2697480" y="1783080"/>
-            <a:ext cx="9174175" cy="4663440"/>
+            <a:off x="5349240" y="1783080"/>
+            <a:ext cx="6522415" cy="4663440"/>
           </a:xfrm>
           <a:prstGeom prst="rect">
             <a:avLst/>
@@ -14268,7 +14745,7 @@
               <a:buNone/>
             </a:pPr>
             <a:r>
-              <a:rPr lang="en-US" sz="4000" b="1" dirty="0">
+              <a:rPr lang="en-US" sz="4000" dirty="0">
                 <a:solidFill>
                   <a:srgbClr val="111111"/>
                 </a:solidFill>
@@ -14276,73 +14753,7 @@
                 <a:ea typeface="Times New Roman" pitchFamily="34" charset="-122"/>
                 <a:cs typeface="Times New Roman" pitchFamily="34" charset="-120"/>
               </a:rPr>
-              <a:t>Fill in the blanks:</a:t>
-            </a:r>
-            <a:endParaRPr lang="en-US" sz="4000" dirty="0"/>
-          </a:p>
-          <a:p>
-            <a:pPr algn="l" marL="342900" indent="-342900">
-              <a:spcAft>
-                <a:spcPts val="800"/>
-              </a:spcAft>
-              <a:buSzPct val="100000"/>
-              <a:buFont typeface="+mj-lt"/>
-              <a:buAutoNum type="arabicPeriod" startAt="1"/>
-            </a:pPr>
-            <a:r>
-              <a:rPr lang="en-US" sz="4000" dirty="0">
-                <a:solidFill>
-                  <a:srgbClr val="111111"/>
-                </a:solidFill>
-                <a:latin typeface="Times New Roman" pitchFamily="34" charset="0"/>
-                <a:ea typeface="Times New Roman" pitchFamily="34" charset="-122"/>
-                <a:cs typeface="Times New Roman" pitchFamily="34" charset="-120"/>
-              </a:rPr>
-              <a:t>The layer of air around the Earth is the ______.</a:t>
-            </a:r>
-            <a:endParaRPr lang="en-US" sz="4000" dirty="0"/>
-          </a:p>
-          <a:p>
-            <a:pPr algn="l" marL="342900" indent="-342900">
-              <a:spcAft>
-                <a:spcPts val="800"/>
-              </a:spcAft>
-              <a:buSzPct val="100000"/>
-              <a:buFont typeface="+mj-lt"/>
-              <a:buAutoNum type="arabicPeriod" startAt="1"/>
-            </a:pPr>
-            <a:r>
-              <a:rPr lang="en-US" sz="4000" dirty="0">
-                <a:solidFill>
-                  <a:srgbClr val="111111"/>
-                </a:solidFill>
-                <a:latin typeface="Times New Roman" pitchFamily="34" charset="0"/>
-                <a:ea typeface="Times New Roman" pitchFamily="34" charset="-122"/>
-                <a:cs typeface="Times New Roman" pitchFamily="34" charset="-120"/>
-              </a:rPr>
-              <a:t>Clouds and rain form in the ______.</a:t>
-            </a:r>
-            <a:endParaRPr lang="en-US" sz="4000" dirty="0"/>
-          </a:p>
-          <a:p>
-            <a:pPr algn="l" marL="342900" indent="-342900">
-              <a:spcAft>
-                <a:spcPts val="800"/>
-              </a:spcAft>
-              <a:buSzPct val="100000"/>
-              <a:buFont typeface="+mj-lt"/>
-              <a:buAutoNum type="arabicPeriod" startAt="1"/>
-            </a:pPr>
-            <a:r>
-              <a:rPr lang="en-US" sz="4000" dirty="0">
-                <a:solidFill>
-                  <a:srgbClr val="111111"/>
-                </a:solidFill>
-                <a:latin typeface="Times New Roman" pitchFamily="34" charset="0"/>
-                <a:ea typeface="Times New Roman" pitchFamily="34" charset="-122"/>
-                <a:cs typeface="Times New Roman" pitchFamily="34" charset="-120"/>
-              </a:rPr>
-              <a:t>The ozone layer is in the ______.</a:t>
+              <a:t>In the troposphere.</a:t>
             </a:r>
             <a:endParaRPr lang="en-US" sz="4000" dirty="0"/>
           </a:p>
@@ -14693,7 +15104,7 @@
                 <a:ea typeface="Calibri" pitchFamily="34" charset="-122"/>
                 <a:cs typeface="Calibri" pitchFamily="34" charset="-120"/>
               </a:rPr>
-              <a:t>HOMEWORK</a:t>
+              <a:t>FORMATIVE EVALUATION</a:t>
             </a:r>
             <a:endParaRPr lang="en-US" sz="1400" dirty="0"/>
           </a:p>
@@ -14758,7 +15169,7 @@
                 <a:ea typeface="Times New Roman" pitchFamily="34" charset="-122"/>
                 <a:cs typeface="Times New Roman" pitchFamily="34" charset="-120"/>
               </a:rPr>
-              <a:t>Homework</a:t>
+              <a:t>Evaluation 2</a:t>
             </a:r>
             <a:endParaRPr lang="en-US" sz="3600" dirty="0"/>
           </a:p>
@@ -14800,7 +15211,7 @@
                 <a:ea typeface="Times New Roman" pitchFamily="34" charset="-122"/>
                 <a:cs typeface="Times New Roman" pitchFamily="34" charset="-120"/>
               </a:rPr>
-              <a:t>Watch or listen to a weather forecast on television or radio. Write down two pieces of information it gives (for example temperature, rain or wind).</a:t>
+              <a:t>What is the role of the ozone layer?</a:t>
             </a:r>
             <a:endParaRPr lang="en-US" sz="4000" dirty="0"/>
           </a:p>
@@ -14912,7 +15323,7 @@
                 <a:ea typeface="Calibri" pitchFamily="34" charset="-122"/>
                 <a:cs typeface="Calibri" pitchFamily="34" charset="-120"/>
               </a:rPr>
-              <a:t>NEXT LESSON</a:t>
+              <a:t>FORMATIVE EVALUATION</a:t>
             </a:r>
             <a:endParaRPr lang="en-US" sz="1400" dirty="0"/>
           </a:p>
@@ -14977,7 +15388,7 @@
                 <a:ea typeface="Times New Roman" pitchFamily="34" charset="-122"/>
                 <a:cs typeface="Times New Roman" pitchFamily="34" charset="-120"/>
               </a:rPr>
-              <a:t>Next Lesson</a:t>
+              <a:t>Expected Answer</a:t>
             </a:r>
             <a:endParaRPr lang="en-US" sz="3600" dirty="0"/>
           </a:p>
@@ -15001,17 +15412,17 @@
           <a:ln/>
         </p:spPr>
         <p:txBody>
-          <a:bodyPr wrap="square" lIns="0" tIns="0" rIns="0" bIns="0" rtlCol="0" anchor="ctr"/>
-          <a:lstStyle/>
-          <a:p>
-            <a:pPr algn="ctr" indent="0" marL="0">
+          <a:bodyPr wrap="square" lIns="0" tIns="0" rIns="0" bIns="0" rtlCol="0" anchor="t"/>
+          <a:lstStyle/>
+          <a:p>
+            <a:pPr algn="l" indent="0" marL="0">
               <a:spcAft>
                 <a:spcPts val="800"/>
               </a:spcAft>
               <a:buNone/>
             </a:pPr>
             <a:r>
-              <a:rPr lang="en-US" sz="4000" b="1" dirty="0">
+              <a:rPr lang="en-US" sz="4000" dirty="0">
                 <a:solidFill>
                   <a:srgbClr val="111111"/>
                 </a:solidFill>
@@ -15019,27 +15430,7 @@
                 <a:ea typeface="Times New Roman" pitchFamily="34" charset="-122"/>
                 <a:cs typeface="Times New Roman" pitchFamily="34" charset="-120"/>
               </a:rPr>
-              <a:t>Our next lesson will be on:</a:t>
-            </a:r>
-            <a:endParaRPr lang="en-US" sz="4000" dirty="0"/>
-          </a:p>
-          <a:p>
-            <a:pPr algn="ctr" indent="0" marL="0">
-              <a:spcAft>
-                <a:spcPts val="800"/>
-              </a:spcAft>
-              <a:buNone/>
-            </a:pPr>
-            <a:r>
-              <a:rPr lang="en-US" sz="4000" b="1" dirty="0">
-                <a:solidFill>
-                  <a:srgbClr val="990011"/>
-                </a:solidFill>
-                <a:latin typeface="Times New Roman" pitchFamily="34" charset="0"/>
-                <a:ea typeface="Times New Roman" pitchFamily="34" charset="-122"/>
-                <a:cs typeface="Times New Roman" pitchFamily="34" charset="-120"/>
-              </a:rPr>
-              <a:t>Lesson 31: Weather and Climate</a:t>
+              <a:t>It stops harmful rays from the Sun.</a:t>
             </a:r>
             <a:endParaRPr lang="en-US" sz="4000" dirty="0"/>
           </a:p>
@@ -15151,6 +15542,749 @@
                 <a:ea typeface="Calibri" pitchFamily="34" charset="-122"/>
                 <a:cs typeface="Calibri" pitchFamily="34" charset="-120"/>
               </a:rPr>
+              <a:t>REMEDIATION</a:t>
+            </a:r>
+            <a:endParaRPr lang="en-US" sz="1400" dirty="0"/>
+          </a:p>
+        </p:txBody>
+      </p:sp>
+      <p:pic>
+        <p:nvPicPr>
+          <p:cNvPr id="3" name="Image 0" descr="/home/claude/f4/img/minesec_sheet.png">    </p:cNvPr>
+          <p:cNvPicPr>
+            <a:picLocks noChangeAspect="1"/>
+          </p:cNvPicPr>
+          <p:nvPr/>
+        </p:nvPicPr>
+        <p:blipFill>
+          <a:blip r:embed="rId1"/>
+          <a:stretch>
+            <a:fillRect/>
+          </a:stretch>
+        </p:blipFill>
+        <p:spPr>
+          <a:xfrm>
+            <a:off x="0" y="658368"/>
+            <a:ext cx="2468880" cy="5833872"/>
+          </a:xfrm>
+          <a:prstGeom prst="rect">
+            <a:avLst/>
+          </a:prstGeom>
+        </p:spPr>
+      </p:pic>
+      <p:sp>
+        <p:nvSpPr>
+          <p:cNvPr id="4" name="Text 1"/>
+          <p:cNvSpPr/>
+          <p:nvPr/>
+        </p:nvSpPr>
+        <p:spPr>
+          <a:xfrm>
+            <a:off x="2697480" y="1005840"/>
+            <a:ext cx="9174175" cy="731520"/>
+          </a:xfrm>
+          <a:prstGeom prst="rect">
+            <a:avLst/>
+          </a:prstGeom>
+          <a:noFill/>
+          <a:ln/>
+        </p:spPr>
+        <p:txBody>
+          <a:bodyPr wrap="square" lIns="0" tIns="0" rIns="0" bIns="0" rtlCol="0" anchor="ctr">
+            <a:normAutofit/>
+          </a:bodyPr>
+          <a:lstStyle/>
+          <a:p>
+            <a:pPr algn="ctr" indent="0" marL="0">
+              <a:buNone/>
+            </a:pPr>
+            <a:r>
+              <a:rPr lang="en-US" sz="3600" b="1" dirty="0">
+                <a:solidFill>
+                  <a:srgbClr val="990011"/>
+                </a:solidFill>
+                <a:latin typeface="Times New Roman" pitchFamily="34" charset="0"/>
+                <a:ea typeface="Times New Roman" pitchFamily="34" charset="-122"/>
+                <a:cs typeface="Times New Roman" pitchFamily="34" charset="-120"/>
+              </a:rPr>
+              <a:t>Remediation</a:t>
+            </a:r>
+            <a:endParaRPr lang="en-US" sz="3600" dirty="0"/>
+          </a:p>
+        </p:txBody>
+      </p:sp>
+      <p:sp>
+        <p:nvSpPr>
+          <p:cNvPr id="5" name="Text 2"/>
+          <p:cNvSpPr/>
+          <p:nvPr/>
+        </p:nvSpPr>
+        <p:spPr>
+          <a:xfrm>
+            <a:off x="2697480" y="1783080"/>
+            <a:ext cx="9174175" cy="4663440"/>
+          </a:xfrm>
+          <a:prstGeom prst="rect">
+            <a:avLst/>
+          </a:prstGeom>
+          <a:noFill/>
+          <a:ln/>
+        </p:spPr>
+        <p:txBody>
+          <a:bodyPr wrap="square" lIns="0" tIns="0" rIns="0" bIns="0" rtlCol="0" anchor="t"/>
+          <a:lstStyle/>
+          <a:p>
+            <a:pPr algn="l" indent="0" marL="0">
+              <a:spcAft>
+                <a:spcPts val="800"/>
+              </a:spcAft>
+              <a:buNone/>
+            </a:pPr>
+            <a:r>
+              <a:rPr lang="en-US" sz="4000" b="1" dirty="0">
+                <a:solidFill>
+                  <a:srgbClr val="111111"/>
+                </a:solidFill>
+                <a:latin typeface="Times New Roman" pitchFamily="34" charset="0"/>
+                <a:ea typeface="Times New Roman" pitchFamily="34" charset="-122"/>
+                <a:cs typeface="Times New Roman" pitchFamily="34" charset="-120"/>
+              </a:rPr>
+              <a:t>Fill in the blanks:</a:t>
+            </a:r>
+            <a:endParaRPr lang="en-US" sz="4000" dirty="0"/>
+          </a:p>
+          <a:p>
+            <a:pPr algn="l" marL="342900" indent="-342900">
+              <a:spcAft>
+                <a:spcPts val="800"/>
+              </a:spcAft>
+              <a:buSzPct val="100000"/>
+              <a:buFont typeface="+mj-lt"/>
+              <a:buAutoNum type="arabicPeriod" startAt="1"/>
+            </a:pPr>
+            <a:r>
+              <a:rPr lang="en-US" sz="4000" dirty="0">
+                <a:solidFill>
+                  <a:srgbClr val="111111"/>
+                </a:solidFill>
+                <a:latin typeface="Times New Roman" pitchFamily="34" charset="0"/>
+                <a:ea typeface="Times New Roman" pitchFamily="34" charset="-122"/>
+                <a:cs typeface="Times New Roman" pitchFamily="34" charset="-120"/>
+              </a:rPr>
+              <a:t>The layer of air around the Earth is the ______.</a:t>
+            </a:r>
+            <a:endParaRPr lang="en-US" sz="4000" dirty="0"/>
+          </a:p>
+          <a:p>
+            <a:pPr algn="l" marL="342900" indent="-342900">
+              <a:spcAft>
+                <a:spcPts val="800"/>
+              </a:spcAft>
+              <a:buSzPct val="100000"/>
+              <a:buFont typeface="+mj-lt"/>
+              <a:buAutoNum type="arabicPeriod" startAt="1"/>
+            </a:pPr>
+            <a:r>
+              <a:rPr lang="en-US" sz="4000" dirty="0">
+                <a:solidFill>
+                  <a:srgbClr val="111111"/>
+                </a:solidFill>
+                <a:latin typeface="Times New Roman" pitchFamily="34" charset="0"/>
+                <a:ea typeface="Times New Roman" pitchFamily="34" charset="-122"/>
+                <a:cs typeface="Times New Roman" pitchFamily="34" charset="-120"/>
+              </a:rPr>
+              <a:t>Clouds and rain form in the ______.</a:t>
+            </a:r>
+            <a:endParaRPr lang="en-US" sz="4000" dirty="0"/>
+          </a:p>
+          <a:p>
+            <a:pPr algn="l" marL="342900" indent="-342900">
+              <a:spcAft>
+                <a:spcPts val="800"/>
+              </a:spcAft>
+              <a:buSzPct val="100000"/>
+              <a:buFont typeface="+mj-lt"/>
+              <a:buAutoNum type="arabicPeriod" startAt="1"/>
+            </a:pPr>
+            <a:r>
+              <a:rPr lang="en-US" sz="4000" dirty="0">
+                <a:solidFill>
+                  <a:srgbClr val="111111"/>
+                </a:solidFill>
+                <a:latin typeface="Times New Roman" pitchFamily="34" charset="0"/>
+                <a:ea typeface="Times New Roman" pitchFamily="34" charset="-122"/>
+                <a:cs typeface="Times New Roman" pitchFamily="34" charset="-120"/>
+              </a:rPr>
+              <a:t>The ozone layer is in the ______.</a:t>
+            </a:r>
+            <a:endParaRPr lang="en-US" sz="4000" dirty="0"/>
+          </a:p>
+        </p:txBody>
+      </p:sp>
+      <p:sp>
+        <p:nvSpPr>
+          <p:cNvPr id="25" name="Slide Number Placeholder 0"/>
+          <p:cNvSpPr>
+            <a:spLocks noGrp="1"/>
+          </p:cNvSpPr>
+          <p:nvPr>
+            <p:ph type="sldNum" sz="quarter" idx="4294967295"/>
+          </p:nvPr>
+        </p:nvSpPr>
+        <p:spPr>
+          <a:xfrm>
+            <a:off x="27432" y="91440"/>
+            <a:ext cx="585216" cy="475488"/>
+          </a:xfrm>
+          <a:prstGeom prst="rect">
+            <a:avLst/>
+          </a:prstGeom>
+          <a:extLst>
+            <a:ext uri="{C572A759-6A51-4108-AA02-DFA0A04FC94B}">
+              <ma14:wrappingTextBoxFlag xmlns:ma14="http://schemas.microsoft.com/office/mac/drawingml/2011/main" val="0"/>
+            </a:ext>
+          </a:extLst>
+        </p:spPr>
+        <p:txBody>
+          <a:bodyPr/>
+          <a:lstStyle>
+            <a:lvl1pPr>
+              <a:defRPr sz="2000">
+                <a:solidFill>
+                  <a:srgbClr val="FFFFFF"/>
+                </a:solidFill>
+                <a:latin typeface="Calibri"/>
+                <a:ea typeface="Calibri"/>
+                <a:cs typeface="Calibri"/>
+              </a:defRPr>
+            </a:lvl1pPr>
+          </a:lstStyle>
+          <a:p>
+            <a:pPr algn="ctr"/>
+            <a:fld id="{F7021451-1387-4CA6-816F-3879F97B5CBC}" type="slidenum">
+              <a:rPr b="1" lang="en-US"/>
+              <a:t>42</a:t>
+            </a:fld>
+            <a:endParaRPr lang="en-US"/>
+          </a:p>
+        </p:txBody>
+      </p:sp>
+    </p:spTree>
+  </p:cSld>
+  <p:clrMapOvr>
+    <a:masterClrMapping/>
+  </p:clrMapOvr>
+</p:sld>
+</file>
+
+<file path=ppt/slides/slide43.xml><?xml version="1.0" encoding="utf-8"?>
+<p:sld xmlns:a="http://schemas.openxmlformats.org/drawingml/2006/main" xmlns:r="http://schemas.openxmlformats.org/officeDocument/2006/relationships" xmlns:p="http://schemas.openxmlformats.org/presentationml/2006/main">
+  <p:cSld name="Slide 43">
+    <p:spTree>
+      <p:nvGrpSpPr>
+        <p:cNvPr id="1" name=""/>
+        <p:cNvGrpSpPr/>
+        <p:nvPr/>
+      </p:nvGrpSpPr>
+      <p:grpSpPr>
+        <a:xfrm>
+          <a:off x="0" y="0"/>
+          <a:ext cx="0" cy="0"/>
+          <a:chOff x="0" y="0"/>
+          <a:chExt cx="0" cy="0"/>
+        </a:xfrm>
+      </p:grpSpPr>
+      <p:sp>
+        <p:nvSpPr>
+          <p:cNvPr id="2" name="Text 0"/>
+          <p:cNvSpPr/>
+          <p:nvPr/>
+        </p:nvSpPr>
+        <p:spPr>
+          <a:xfrm>
+            <a:off x="457200" y="713232"/>
+            <a:ext cx="11368735" cy="274320"/>
+          </a:xfrm>
+          <a:prstGeom prst="rect">
+            <a:avLst/>
+          </a:prstGeom>
+          <a:noFill/>
+          <a:ln/>
+        </p:spPr>
+        <p:txBody>
+          <a:bodyPr wrap="square" lIns="0" tIns="0" rIns="0" bIns="0" rtlCol="0" anchor="ctr"/>
+          <a:lstStyle/>
+          <a:p>
+            <a:pPr algn="r" indent="0" marL="0">
+              <a:buNone/>
+            </a:pPr>
+            <a:r>
+              <a:rPr lang="en-US" sz="1400" b="1" dirty="0">
+                <a:solidFill>
+                  <a:srgbClr val="1C3F6E"/>
+                </a:solidFill>
+                <a:latin typeface="Calibri" pitchFamily="34" charset="0"/>
+                <a:ea typeface="Calibri" pitchFamily="34" charset="-122"/>
+                <a:cs typeface="Calibri" pitchFamily="34" charset="-120"/>
+              </a:rPr>
+              <a:t>HOMEWORK</a:t>
+            </a:r>
+            <a:endParaRPr lang="en-US" sz="1400" dirty="0"/>
+          </a:p>
+        </p:txBody>
+      </p:sp>
+      <p:pic>
+        <p:nvPicPr>
+          <p:cNvPr id="3" name="Image 0" descr="/home/claude/f4/img/minesec_sheet.png">    </p:cNvPr>
+          <p:cNvPicPr>
+            <a:picLocks noChangeAspect="1"/>
+          </p:cNvPicPr>
+          <p:nvPr/>
+        </p:nvPicPr>
+        <p:blipFill>
+          <a:blip r:embed="rId1"/>
+          <a:stretch>
+            <a:fillRect/>
+          </a:stretch>
+        </p:blipFill>
+        <p:spPr>
+          <a:xfrm>
+            <a:off x="0" y="658368"/>
+            <a:ext cx="5120640" cy="5833872"/>
+          </a:xfrm>
+          <a:prstGeom prst="rect">
+            <a:avLst/>
+          </a:prstGeom>
+        </p:spPr>
+      </p:pic>
+      <p:sp>
+        <p:nvSpPr>
+          <p:cNvPr id="4" name="Text 1"/>
+          <p:cNvSpPr/>
+          <p:nvPr/>
+        </p:nvSpPr>
+        <p:spPr>
+          <a:xfrm>
+            <a:off x="5349240" y="1005840"/>
+            <a:ext cx="6522415" cy="731520"/>
+          </a:xfrm>
+          <a:prstGeom prst="rect">
+            <a:avLst/>
+          </a:prstGeom>
+          <a:noFill/>
+          <a:ln/>
+        </p:spPr>
+        <p:txBody>
+          <a:bodyPr wrap="square" lIns="0" tIns="0" rIns="0" bIns="0" rtlCol="0" anchor="ctr">
+            <a:normAutofit/>
+          </a:bodyPr>
+          <a:lstStyle/>
+          <a:p>
+            <a:pPr algn="ctr" indent="0" marL="0">
+              <a:buNone/>
+            </a:pPr>
+            <a:r>
+              <a:rPr lang="en-US" sz="3600" b="1" dirty="0">
+                <a:solidFill>
+                  <a:srgbClr val="990011"/>
+                </a:solidFill>
+                <a:latin typeface="Times New Roman" pitchFamily="34" charset="0"/>
+                <a:ea typeface="Times New Roman" pitchFamily="34" charset="-122"/>
+                <a:cs typeface="Times New Roman" pitchFamily="34" charset="-120"/>
+              </a:rPr>
+              <a:t>Homework</a:t>
+            </a:r>
+            <a:endParaRPr lang="en-US" sz="3600" dirty="0"/>
+          </a:p>
+        </p:txBody>
+      </p:sp>
+      <p:sp>
+        <p:nvSpPr>
+          <p:cNvPr id="5" name="Text 2"/>
+          <p:cNvSpPr/>
+          <p:nvPr/>
+        </p:nvSpPr>
+        <p:spPr>
+          <a:xfrm>
+            <a:off x="5349240" y="1783080"/>
+            <a:ext cx="6522415" cy="4663440"/>
+          </a:xfrm>
+          <a:prstGeom prst="rect">
+            <a:avLst/>
+          </a:prstGeom>
+          <a:noFill/>
+          <a:ln/>
+        </p:spPr>
+        <p:txBody>
+          <a:bodyPr wrap="square" lIns="0" tIns="0" rIns="0" bIns="0" rtlCol="0" anchor="t"/>
+          <a:lstStyle/>
+          <a:p>
+            <a:pPr algn="l" indent="0" marL="0">
+              <a:spcAft>
+                <a:spcPts val="800"/>
+              </a:spcAft>
+              <a:buNone/>
+            </a:pPr>
+            <a:r>
+              <a:rPr lang="en-US" sz="4000" dirty="0">
+                <a:solidFill>
+                  <a:srgbClr val="111111"/>
+                </a:solidFill>
+                <a:latin typeface="Times New Roman" pitchFamily="34" charset="0"/>
+                <a:ea typeface="Times New Roman" pitchFamily="34" charset="-122"/>
+                <a:cs typeface="Times New Roman" pitchFamily="34" charset="-120"/>
+              </a:rPr>
+              <a:t>Watch or listen to a weather forecast on television or radio. Write down two pieces of information it gives (for example temperature, rain or wind).</a:t>
+            </a:r>
+            <a:endParaRPr lang="en-US" sz="4000" dirty="0"/>
+          </a:p>
+        </p:txBody>
+      </p:sp>
+      <p:sp>
+        <p:nvSpPr>
+          <p:cNvPr id="25" name="Slide Number Placeholder 0"/>
+          <p:cNvSpPr>
+            <a:spLocks noGrp="1"/>
+          </p:cNvSpPr>
+          <p:nvPr>
+            <p:ph type="sldNum" sz="quarter" idx="4294967295"/>
+          </p:nvPr>
+        </p:nvSpPr>
+        <p:spPr>
+          <a:xfrm>
+            <a:off x="27432" y="91440"/>
+            <a:ext cx="585216" cy="475488"/>
+          </a:xfrm>
+          <a:prstGeom prst="rect">
+            <a:avLst/>
+          </a:prstGeom>
+          <a:extLst>
+            <a:ext uri="{C572A759-6A51-4108-AA02-DFA0A04FC94B}">
+              <ma14:wrappingTextBoxFlag xmlns:ma14="http://schemas.microsoft.com/office/mac/drawingml/2011/main" val="0"/>
+            </a:ext>
+          </a:extLst>
+        </p:spPr>
+        <p:txBody>
+          <a:bodyPr/>
+          <a:lstStyle>
+            <a:lvl1pPr>
+              <a:defRPr sz="2000">
+                <a:solidFill>
+                  <a:srgbClr val="FFFFFF"/>
+                </a:solidFill>
+                <a:latin typeface="Calibri"/>
+                <a:ea typeface="Calibri"/>
+                <a:cs typeface="Calibri"/>
+              </a:defRPr>
+            </a:lvl1pPr>
+          </a:lstStyle>
+          <a:p>
+            <a:pPr algn="ctr"/>
+            <a:fld id="{F7021451-1387-4CA6-816F-3879F97B5CBC}" type="slidenum">
+              <a:rPr b="1" lang="en-US"/>
+              <a:t>43</a:t>
+            </a:fld>
+            <a:endParaRPr lang="en-US"/>
+          </a:p>
+        </p:txBody>
+      </p:sp>
+    </p:spTree>
+  </p:cSld>
+  <p:clrMapOvr>
+    <a:masterClrMapping/>
+  </p:clrMapOvr>
+</p:sld>
+</file>
+
+<file path=ppt/slides/slide44.xml><?xml version="1.0" encoding="utf-8"?>
+<p:sld xmlns:a="http://schemas.openxmlformats.org/drawingml/2006/main" xmlns:r="http://schemas.openxmlformats.org/officeDocument/2006/relationships" xmlns:p="http://schemas.openxmlformats.org/presentationml/2006/main">
+  <p:cSld name="Slide 44">
+    <p:spTree>
+      <p:nvGrpSpPr>
+        <p:cNvPr id="1" name=""/>
+        <p:cNvGrpSpPr/>
+        <p:nvPr/>
+      </p:nvGrpSpPr>
+      <p:grpSpPr>
+        <a:xfrm>
+          <a:off x="0" y="0"/>
+          <a:ext cx="0" cy="0"/>
+          <a:chOff x="0" y="0"/>
+          <a:chExt cx="0" cy="0"/>
+        </a:xfrm>
+      </p:grpSpPr>
+      <p:sp>
+        <p:nvSpPr>
+          <p:cNvPr id="2" name="Text 0"/>
+          <p:cNvSpPr/>
+          <p:nvPr/>
+        </p:nvSpPr>
+        <p:spPr>
+          <a:xfrm>
+            <a:off x="457200" y="713232"/>
+            <a:ext cx="11368735" cy="274320"/>
+          </a:xfrm>
+          <a:prstGeom prst="rect">
+            <a:avLst/>
+          </a:prstGeom>
+          <a:noFill/>
+          <a:ln/>
+        </p:spPr>
+        <p:txBody>
+          <a:bodyPr wrap="square" lIns="0" tIns="0" rIns="0" bIns="0" rtlCol="0" anchor="ctr"/>
+          <a:lstStyle/>
+          <a:p>
+            <a:pPr algn="r" indent="0" marL="0">
+              <a:buNone/>
+            </a:pPr>
+            <a:r>
+              <a:rPr lang="en-US" sz="1400" b="1" dirty="0">
+                <a:solidFill>
+                  <a:srgbClr val="1C3F6E"/>
+                </a:solidFill>
+                <a:latin typeface="Calibri" pitchFamily="34" charset="0"/>
+                <a:ea typeface="Calibri" pitchFamily="34" charset="-122"/>
+                <a:cs typeface="Calibri" pitchFamily="34" charset="-120"/>
+              </a:rPr>
+              <a:t>NEXT LESSON</a:t>
+            </a:r>
+            <a:endParaRPr lang="en-US" sz="1400" dirty="0"/>
+          </a:p>
+        </p:txBody>
+      </p:sp>
+      <p:pic>
+        <p:nvPicPr>
+          <p:cNvPr id="3" name="Image 0" descr="/home/claude/f4/img/minesec_sheet.png">    </p:cNvPr>
+          <p:cNvPicPr>
+            <a:picLocks noChangeAspect="1"/>
+          </p:cNvPicPr>
+          <p:nvPr/>
+        </p:nvPicPr>
+        <p:blipFill>
+          <a:blip r:embed="rId1"/>
+          <a:stretch>
+            <a:fillRect/>
+          </a:stretch>
+        </p:blipFill>
+        <p:spPr>
+          <a:xfrm>
+            <a:off x="0" y="658368"/>
+            <a:ext cx="5120640" cy="5833872"/>
+          </a:xfrm>
+          <a:prstGeom prst="rect">
+            <a:avLst/>
+          </a:prstGeom>
+        </p:spPr>
+      </p:pic>
+      <p:sp>
+        <p:nvSpPr>
+          <p:cNvPr id="4" name="Text 1"/>
+          <p:cNvSpPr/>
+          <p:nvPr/>
+        </p:nvSpPr>
+        <p:spPr>
+          <a:xfrm>
+            <a:off x="5349240" y="1005840"/>
+            <a:ext cx="6522415" cy="731520"/>
+          </a:xfrm>
+          <a:prstGeom prst="rect">
+            <a:avLst/>
+          </a:prstGeom>
+          <a:noFill/>
+          <a:ln/>
+        </p:spPr>
+        <p:txBody>
+          <a:bodyPr wrap="square" lIns="0" tIns="0" rIns="0" bIns="0" rtlCol="0" anchor="ctr">
+            <a:normAutofit/>
+          </a:bodyPr>
+          <a:lstStyle/>
+          <a:p>
+            <a:pPr algn="ctr" indent="0" marL="0">
+              <a:buNone/>
+            </a:pPr>
+            <a:r>
+              <a:rPr lang="en-US" sz="3600" b="1" dirty="0">
+                <a:solidFill>
+                  <a:srgbClr val="990011"/>
+                </a:solidFill>
+                <a:latin typeface="Times New Roman" pitchFamily="34" charset="0"/>
+                <a:ea typeface="Times New Roman" pitchFamily="34" charset="-122"/>
+                <a:cs typeface="Times New Roman" pitchFamily="34" charset="-120"/>
+              </a:rPr>
+              <a:t>Next Lesson</a:t>
+            </a:r>
+            <a:endParaRPr lang="en-US" sz="3600" dirty="0"/>
+          </a:p>
+        </p:txBody>
+      </p:sp>
+      <p:sp>
+        <p:nvSpPr>
+          <p:cNvPr id="5" name="Text 2"/>
+          <p:cNvSpPr/>
+          <p:nvPr/>
+        </p:nvSpPr>
+        <p:spPr>
+          <a:xfrm>
+            <a:off x="5349240" y="1783080"/>
+            <a:ext cx="6522415" cy="4663440"/>
+          </a:xfrm>
+          <a:prstGeom prst="rect">
+            <a:avLst/>
+          </a:prstGeom>
+          <a:noFill/>
+          <a:ln/>
+        </p:spPr>
+        <p:txBody>
+          <a:bodyPr wrap="square" lIns="0" tIns="0" rIns="0" bIns="0" rtlCol="0" anchor="ctr"/>
+          <a:lstStyle/>
+          <a:p>
+            <a:pPr algn="ctr" indent="0" marL="0">
+              <a:spcAft>
+                <a:spcPts val="800"/>
+              </a:spcAft>
+              <a:buNone/>
+            </a:pPr>
+            <a:r>
+              <a:rPr lang="en-US" sz="4000" b="1" dirty="0">
+                <a:solidFill>
+                  <a:srgbClr val="111111"/>
+                </a:solidFill>
+                <a:latin typeface="Times New Roman" pitchFamily="34" charset="0"/>
+                <a:ea typeface="Times New Roman" pitchFamily="34" charset="-122"/>
+                <a:cs typeface="Times New Roman" pitchFamily="34" charset="-120"/>
+              </a:rPr>
+              <a:t>Our next lesson will be on:</a:t>
+            </a:r>
+            <a:endParaRPr lang="en-US" sz="4000" dirty="0"/>
+          </a:p>
+          <a:p>
+            <a:pPr algn="ctr" indent="0" marL="0">
+              <a:spcAft>
+                <a:spcPts val="800"/>
+              </a:spcAft>
+              <a:buNone/>
+            </a:pPr>
+            <a:r>
+              <a:rPr lang="en-US" sz="4000" b="1" dirty="0">
+                <a:solidFill>
+                  <a:srgbClr val="990011"/>
+                </a:solidFill>
+                <a:latin typeface="Times New Roman" pitchFamily="34" charset="0"/>
+                <a:ea typeface="Times New Roman" pitchFamily="34" charset="-122"/>
+                <a:cs typeface="Times New Roman" pitchFamily="34" charset="-120"/>
+              </a:rPr>
+              <a:t>Lesson 31: Weather and Climate</a:t>
+            </a:r>
+            <a:endParaRPr lang="en-US" sz="4000" dirty="0"/>
+          </a:p>
+        </p:txBody>
+      </p:sp>
+      <p:sp>
+        <p:nvSpPr>
+          <p:cNvPr id="25" name="Slide Number Placeholder 0"/>
+          <p:cNvSpPr>
+            <a:spLocks noGrp="1"/>
+          </p:cNvSpPr>
+          <p:nvPr>
+            <p:ph type="sldNum" sz="quarter" idx="4294967295"/>
+          </p:nvPr>
+        </p:nvSpPr>
+        <p:spPr>
+          <a:xfrm>
+            <a:off x="27432" y="91440"/>
+            <a:ext cx="585216" cy="475488"/>
+          </a:xfrm>
+          <a:prstGeom prst="rect">
+            <a:avLst/>
+          </a:prstGeom>
+          <a:extLst>
+            <a:ext uri="{C572A759-6A51-4108-AA02-DFA0A04FC94B}">
+              <ma14:wrappingTextBoxFlag xmlns:ma14="http://schemas.microsoft.com/office/mac/drawingml/2011/main" val="0"/>
+            </a:ext>
+          </a:extLst>
+        </p:spPr>
+        <p:txBody>
+          <a:bodyPr/>
+          <a:lstStyle>
+            <a:lvl1pPr>
+              <a:defRPr sz="2000">
+                <a:solidFill>
+                  <a:srgbClr val="FFFFFF"/>
+                </a:solidFill>
+                <a:latin typeface="Calibri"/>
+                <a:ea typeface="Calibri"/>
+                <a:cs typeface="Calibri"/>
+              </a:defRPr>
+            </a:lvl1pPr>
+          </a:lstStyle>
+          <a:p>
+            <a:pPr algn="ctr"/>
+            <a:fld id="{F7021451-1387-4CA6-816F-3879F97B5CBC}" type="slidenum">
+              <a:rPr b="1" lang="en-US"/>
+              <a:t>44</a:t>
+            </a:fld>
+            <a:endParaRPr lang="en-US"/>
+          </a:p>
+        </p:txBody>
+      </p:sp>
+    </p:spTree>
+  </p:cSld>
+  <p:clrMapOvr>
+    <a:masterClrMapping/>
+  </p:clrMapOvr>
+</p:sld>
+</file>
+
+<file path=ppt/slides/slide45.xml><?xml version="1.0" encoding="utf-8"?>
+<p:sld xmlns:a="http://schemas.openxmlformats.org/drawingml/2006/main" xmlns:r="http://schemas.openxmlformats.org/officeDocument/2006/relationships" xmlns:p="http://schemas.openxmlformats.org/presentationml/2006/main">
+  <p:cSld name="Slide 45">
+    <p:spTree>
+      <p:nvGrpSpPr>
+        <p:cNvPr id="1" name=""/>
+        <p:cNvGrpSpPr/>
+        <p:nvPr/>
+      </p:nvGrpSpPr>
+      <p:grpSpPr>
+        <a:xfrm>
+          <a:off x="0" y="0"/>
+          <a:ext cx="0" cy="0"/>
+          <a:chOff x="0" y="0"/>
+          <a:chExt cx="0" cy="0"/>
+        </a:xfrm>
+      </p:grpSpPr>
+      <p:sp>
+        <p:nvSpPr>
+          <p:cNvPr id="2" name="Text 0"/>
+          <p:cNvSpPr/>
+          <p:nvPr/>
+        </p:nvSpPr>
+        <p:spPr>
+          <a:xfrm>
+            <a:off x="457200" y="713232"/>
+            <a:ext cx="11368735" cy="274320"/>
+          </a:xfrm>
+          <a:prstGeom prst="rect">
+            <a:avLst/>
+          </a:prstGeom>
+          <a:noFill/>
+          <a:ln/>
+        </p:spPr>
+        <p:txBody>
+          <a:bodyPr wrap="square" lIns="0" tIns="0" rIns="0" bIns="0" rtlCol="0" anchor="ctr"/>
+          <a:lstStyle/>
+          <a:p>
+            <a:pPr algn="r" indent="0" marL="0">
+              <a:buNone/>
+            </a:pPr>
+            <a:r>
+              <a:rPr lang="en-US" sz="1400" b="1" dirty="0">
+                <a:solidFill>
+                  <a:srgbClr val="1C3F6E"/>
+                </a:solidFill>
+                <a:latin typeface="Calibri" pitchFamily="34" charset="0"/>
+                <a:ea typeface="Calibri" pitchFamily="34" charset="-122"/>
+                <a:cs typeface="Calibri" pitchFamily="34" charset="-120"/>
+              </a:rPr>
               <a:t>BILINGUAL GAME</a:t>
             </a:r>
             <a:endParaRPr lang="en-US" sz="1400" dirty="0"/>
@@ -15198,7 +16332,7 @@
       </p:sp>
       <p:graphicFrame>
         <p:nvGraphicFramePr>
-          <p:cNvPr id="43" name="Table 0"/>
+          <p:cNvPr id="46" name="Table 0"/>
           <p:cNvGraphicFramePr>
             <a:graphicFrameLocks noGrp="1"/>
           </p:cNvGraphicFramePr>
@@ -16510,7 +17644,7 @@
             <a:pPr algn="ctr"/>
             <a:fld id="{F7021451-1387-4CA6-816F-3879F97B5CBC}" type="slidenum">
               <a:rPr b="1" lang="en-US"/>
-              <a:t>42</a:t>
+              <a:t>45</a:t>
             </a:fld>
             <a:endParaRPr lang="en-US"/>
           </a:p>
@@ -16524,9 +17658,9 @@
 </p:sld>
 </file>
 
-<file path=ppt/slides/slide43.xml><?xml version="1.0" encoding="utf-8"?>
+<file path=ppt/slides/slide46.xml><?xml version="1.0" encoding="utf-8"?>
 <p:sld xmlns:a="http://schemas.openxmlformats.org/drawingml/2006/main" xmlns:r="http://schemas.openxmlformats.org/officeDocument/2006/relationships" xmlns:p="http://schemas.openxmlformats.org/presentationml/2006/main">
-  <p:cSld name="Slide 43">
+  <p:cSld name="Slide 46">
     <p:spTree>
       <p:nvGrpSpPr>
         <p:cNvPr id="1" name=""/>
@@ -16621,7 +17755,7 @@
       </p:sp>
       <p:graphicFrame>
         <p:nvGraphicFramePr>
-          <p:cNvPr id="44" name="Table 0"/>
+          <p:cNvPr id="47" name="Table 0"/>
           <p:cNvGraphicFramePr>
             <a:graphicFrameLocks noGrp="1"/>
           </p:cNvGraphicFramePr>
@@ -17243,7 +18377,7 @@
             <a:pPr algn="ctr"/>
             <a:fld id="{F7021451-1387-4CA6-816F-3879F97B5CBC}" type="slidenum">
               <a:rPr b="1" lang="en-US"/>
-              <a:t>43</a:t>
+              <a:t>46</a:t>
             </a:fld>
             <a:endParaRPr lang="en-US"/>
           </a:p>
@@ -17257,9 +18391,9 @@
 </p:sld>
 </file>
 
-<file path=ppt/slides/slide44.xml><?xml version="1.0" encoding="utf-8"?>
+<file path=ppt/slides/slide47.xml><?xml version="1.0" encoding="utf-8"?>
 <p:sld xmlns:a="http://schemas.openxmlformats.org/drawingml/2006/main" xmlns:r="http://schemas.openxmlformats.org/officeDocument/2006/relationships" xmlns:p="http://schemas.openxmlformats.org/presentationml/2006/main">
-  <p:cSld name="Slide 44">
+  <p:cSld name="Slide 47">
     <p:spTree>
       <p:nvGrpSpPr>
         <p:cNvPr id="1" name=""/>
@@ -17354,7 +18488,7 @@
       </p:sp>
       <p:graphicFrame>
         <p:nvGraphicFramePr>
-          <p:cNvPr id="45" name="Table 0"/>
+          <p:cNvPr id="48" name="Table 0"/>
           <p:cNvGraphicFramePr>
             <a:graphicFrameLocks noGrp="1"/>
           </p:cNvGraphicFramePr>
@@ -17464,7 +18598,7 @@
                           <a:ea typeface="Calibri" pitchFamily="34" charset="-122"/>
                           <a:cs typeface="Calibri" pitchFamily="34" charset="-120"/>
                         </a:rPr>
-                        <a:t>Meaning of the Atmosphere; Structure of the Atmosphere; Ozone Layer Depletion.</a:t>
+                        <a:t>DEFINITIONS; Structure of the Atmosphere; Thermal Structure in the Troposphere and the Stratosphere; Ozone Layer Depletion.</a:t>
                       </a:r>
                       <a:endParaRPr lang="en-US" sz="1600" dirty="0">
                         <a:latin typeface="Calibri" charset="0"/>
@@ -18114,7 +19248,7 @@
             <a:pPr algn="ctr"/>
             <a:fld id="{F7021451-1387-4CA6-816F-3879F97B5CBC}" type="slidenum">
               <a:rPr b="1" lang="en-US"/>
-              <a:t>44</a:t>
+              <a:t>47</a:t>
             </a:fld>
             <a:endParaRPr lang="en-US"/>
           </a:p>
@@ -18128,9 +19262,9 @@
 </p:sld>
 </file>
 
-<file path=ppt/slides/slide45.xml><?xml version="1.0" encoding="utf-8"?>
+<file path=ppt/slides/slide48.xml><?xml version="1.0" encoding="utf-8"?>
 <p:sld xmlns:a="http://schemas.openxmlformats.org/drawingml/2006/main" xmlns:r="http://schemas.openxmlformats.org/officeDocument/2006/relationships" xmlns:p="http://schemas.openxmlformats.org/presentationml/2006/main">
-  <p:cSld name="Slide 45">
+  <p:cSld name="Slide 48">
     <p:spTree>
       <p:nvGrpSpPr>
         <p:cNvPr id="1" name=""/>
@@ -18307,7 +19441,7 @@
                 <a:ea typeface="Calibri" pitchFamily="34" charset="-122"/>
                 <a:cs typeface="Calibri" pitchFamily="34" charset="-120"/>
               </a:rPr>
-              <a:t>Without the projector (Activity 1): ask learners who has travelled by plane.</a:t>
+              <a:t>Without the projector (Activity 1): ask who has travelled by plane.</a:t>
             </a:r>
             <a:endParaRPr lang="en-US" sz="2000" dirty="0"/>
           </a:p>
@@ -18328,7 +19462,7 @@
                 <a:ea typeface="Calibri" pitchFamily="34" charset="-122"/>
                 <a:cs typeface="Calibri" pitchFamily="34" charset="-120"/>
               </a:rPr>
-              <a:t>Without the projector (Activity 2): draw four layers on the board.</a:t>
+              <a:t>Without the projector (Activity 2): draw four bands on the board.</a:t>
             </a:r>
             <a:endParaRPr lang="en-US" sz="2000" dirty="0"/>
           </a:p>
@@ -18349,7 +19483,7 @@
                 <a:ea typeface="Calibri" pitchFamily="34" charset="-122"/>
                 <a:cs typeface="Calibri" pitchFamily="34" charset="-120"/>
               </a:rPr>
-              <a:t>Without the projector (Activity 3): explain: ozone is like a sun hat for the Earth.</a:t>
+              <a:t>Without the projector (Activity 3): describe an old fridge with its gas.</a:t>
             </a:r>
             <a:endParaRPr lang="en-US" sz="2000" dirty="0"/>
           </a:p>
@@ -18397,7 +19531,7 @@
             <a:pPr algn="ctr"/>
             <a:fld id="{F7021451-1387-4CA6-816F-3879F97B5CBC}" type="slidenum">
               <a:rPr b="1" lang="en-US"/>
-              <a:t>45</a:t>
+              <a:t>48</a:t>
             </a:fld>
             <a:endParaRPr lang="en-US"/>
           </a:p>
@@ -18411,9 +19545,9 @@
 </p:sld>
 </file>
 
-<file path=ppt/slides/slide46.xml><?xml version="1.0" encoding="utf-8"?>
+<file path=ppt/slides/slide49.xml><?xml version="1.0" encoding="utf-8"?>
 <p:sld xmlns:a="http://schemas.openxmlformats.org/drawingml/2006/main" xmlns:r="http://schemas.openxmlformats.org/officeDocument/2006/relationships" xmlns:p="http://schemas.openxmlformats.org/presentationml/2006/main">
-  <p:cSld name="Slide 46">
+  <p:cSld name="Slide 49">
     <p:spTree>
       <p:nvGrpSpPr>
         <p:cNvPr id="1" name=""/>
@@ -18722,7 +19856,7 @@
             <a:pPr algn="ctr"/>
             <a:fld id="{F7021451-1387-4CA6-816F-3879F97B5CBC}" type="slidenum">
               <a:rPr b="1" lang="en-US"/>
-              <a:t>46</a:t>
+              <a:t>49</a:t>
             </a:fld>
             <a:endParaRPr lang="en-US"/>
           </a:p>

--- a/lecons/F3/34_FORM4_LESSON30_The_Atmosphere.pptx
+++ b/lecons/F3/34_FORM4_LESSON30_The_Atmosphere.pptx
@@ -3454,7 +3454,7 @@
           <a:p>
             <a:r>
               <a:rPr lang="en-US" dirty="0"/>
-              <a:t>Before we start the new lesson, let us correct the homework I gave you at the end of Lesson 29: Man in the Hot Desert Environments. The question was: Make a table with three columns: resources, hazards and adaptations. Fill it with examples from the hot deserts and from the dry season in Garoua. Take out your exercise books.</a:t>
+              <a:t>Before we start the new lesson, let us correct the homework I gave you at the end of Lesson 29: Man in the Hot Desert Environments. The question was: Name the four main layers of the atmosphere. Take out your exercise books.</a:t>
             </a:r>
             <a:endParaRPr lang="en-US" dirty="0"/>
           </a:p>
@@ -3806,7 +3806,7 @@
           <a:p>
             <a:r>
               <a:rPr lang="en-US" dirty="0"/>
-              <a:t>For your homework: Watch or listen to a weather forecast on television or radio. Write down two pieces of information it gives (for example temperature, rain or wind). We shall correct it at the beginning of our next lesson.</a:t>
+              <a:t>For your homework: Distinguish weather from climate. We shall correct it at the beginning of our next lesson.</a:t>
             </a:r>
             <a:endParaRPr lang="en-US" dirty="0"/>
           </a:p>
@@ -4422,7 +4422,7 @@
           <a:p>
             <a:r>
               <a:rPr lang="en-US" dirty="0"/>
-              <a:t>Here is a good answer. Resources: oil, sunshine, oases / Garoua: sunshine, Benue water. Hazards: heat, sandstorms, lack of water / Garoua: heat, Harmattan dust, dry wells. Adaptations: nomadism, thick walls, irrigation / Garoua: water storage, shade trees, irrigated onions. Compare it with your own answer and correct your work in red.</a:t>
+              <a:t>Here is a good answer. The troposphere, the stratosphere, the mesosphere and the thermosphere. Compare it with your own answer and correct your work in red.</a:t>
             </a:r>
             <a:endParaRPr lang="en-US" dirty="0"/>
           </a:p>
@@ -14888,7 +14888,7 @@
         <p:spPr>
           <a:xfrm>
             <a:off x="0" y="658368"/>
-            <a:ext cx="3840480" cy="5833872"/>
+            <a:ext cx="5120640" cy="5833872"/>
           </a:xfrm>
           <a:prstGeom prst="rect">
             <a:avLst/>
@@ -14903,8 +14903,8 @@
         </p:nvSpPr>
         <p:spPr>
           <a:xfrm>
-            <a:off x="4069080" y="1005840"/>
-            <a:ext cx="7802575" cy="731520"/>
+            <a:off x="5349240" y="1005840"/>
+            <a:ext cx="6522415" cy="731520"/>
           </a:xfrm>
           <a:prstGeom prst="rect">
             <a:avLst/>
@@ -14944,8 +14944,8 @@
         </p:nvSpPr>
         <p:spPr>
           <a:xfrm>
-            <a:off x="4069080" y="1783080"/>
-            <a:ext cx="7802575" cy="4663440"/>
+            <a:off x="5349240" y="1783080"/>
+            <a:ext cx="6522415" cy="4663440"/>
           </a:xfrm>
           <a:prstGeom prst="rect">
             <a:avLst/>
@@ -14992,7 +14992,7 @@
                 <a:ea typeface="Times New Roman" pitchFamily="34" charset="-122"/>
                 <a:cs typeface="Times New Roman" pitchFamily="34" charset="-120"/>
               </a:rPr>
-              <a:t>Make a table with three columns: resources, hazards and adaptations. Fill it with examples from the hot deserts and from the dry season in Garoua.</a:t>
+              <a:t>Name the four main layers of the atmosphere.</a:t>
             </a:r>
             <a:endParaRPr lang="en-US" sz="4000" dirty="0"/>
           </a:p>
@@ -15934,7 +15934,7 @@
                 <a:ea typeface="Times New Roman" pitchFamily="34" charset="-122"/>
                 <a:cs typeface="Times New Roman" pitchFamily="34" charset="-120"/>
               </a:rPr>
-              <a:t>Watch or listen to a weather forecast on television or radio. Write down two pieces of information it gives (for example temperature, rain or wind).</a:t>
+              <a:t>Distinguish weather from climate.</a:t>
             </a:r>
             <a:endParaRPr lang="en-US" sz="4000" dirty="0"/>
           </a:p>
@@ -18874,7 +18874,7 @@
                           <a:ea typeface="Calibri" pitchFamily="34" charset="-122"/>
                           <a:cs typeface="Calibri" pitchFamily="34" charset="-120"/>
                         </a:rPr>
-                        <a:t>Watch or listen to a weather forecast on television or radio. Write down two pieces of information it gives (for example temperature, rain or wind).</a:t>
+                        <a:t>Distinguish weather from climate.</a:t>
                       </a:r>
                       <a:endParaRPr lang="en-US" sz="1600" dirty="0">
                         <a:latin typeface="Calibri" charset="0"/>
@@ -19943,7 +19943,7 @@
         <p:spPr>
           <a:xfrm>
             <a:off x="0" y="658368"/>
-            <a:ext cx="2468880" cy="5833872"/>
+            <a:ext cx="5120640" cy="5833872"/>
           </a:xfrm>
           <a:prstGeom prst="rect">
             <a:avLst/>
@@ -19958,8 +19958,8 @@
         </p:nvSpPr>
         <p:spPr>
           <a:xfrm>
-            <a:off x="2697480" y="1005840"/>
-            <a:ext cx="9174175" cy="731520"/>
+            <a:off x="5349240" y="1005840"/>
+            <a:ext cx="6522415" cy="731520"/>
           </a:xfrm>
           <a:prstGeom prst="rect">
             <a:avLst/>
@@ -19999,8 +19999,8 @@
         </p:nvSpPr>
         <p:spPr>
           <a:xfrm>
-            <a:off x="2697480" y="1783080"/>
-            <a:ext cx="9174175" cy="4663440"/>
+            <a:off x="5349240" y="1783080"/>
+            <a:ext cx="6522415" cy="4663440"/>
           </a:xfrm>
           <a:prstGeom prst="rect">
             <a:avLst/>
@@ -20027,7 +20027,7 @@
                 <a:ea typeface="Times New Roman" pitchFamily="34" charset="-122"/>
                 <a:cs typeface="Times New Roman" pitchFamily="34" charset="-120"/>
               </a:rPr>
-              <a:t>Resources: oil, sunshine, oases / Garoua: sunshine, Benue water. Hazards: heat, sandstorms, lack of water / Garoua: heat, Harmattan dust, dry wells. Adaptations: nomadism, thick walls, irrigation / Garoua: water storage, shade trees, irrigated onions.</a:t>
+              <a:t>The troposphere, the stratosphere, the mesosphere and the thermosphere.</a:t>
             </a:r>
             <a:endParaRPr lang="en-US" sz="4000" dirty="0"/>
           </a:p>

--- a/lecons/F3/34_FORM4_LESSON30_The_Atmosphere.pptx
+++ b/lecons/F3/34_FORM4_LESSON30_The_Atmosphere.pptx
@@ -54,9 +54,14 @@
     <p:sldId id="302" r:id="rId48"/>
     <p:sldId id="303" r:id="rId49"/>
     <p:sldId id="304" r:id="rId50"/>
+    <p:sldId id="305" r:id="rId51"/>
+    <p:sldId id="306" r:id="rId52"/>
+    <p:sldId id="307" r:id="rId53"/>
+    <p:sldId id="308" r:id="rId54"/>
+    <p:sldId id="309" r:id="rId55"/>
   </p:sldIdLst>
   <p:notesMasterIdLst>
-    <p:notesMasterId r:id="rId51"/>
+    <p:notesMasterId r:id="rId56"/>
   </p:notesMasterIdLst>
   <p:sldSz cx="12192000" cy="6858000"/>
   <p:notesSz cx="6858000" cy="12192000"/>
@@ -3014,7 +3019,7 @@
           <a:p>
             <a:r>
               <a:rPr lang="en-US" dirty="0"/>
-              <a:t>Let us copy Ozone Layer Depletion. Ozone layer depletion is explained as follows. Copy the point on Causes on the left, then draw the diagram on the right: the ozone hole. Give it a title and label it clearly.</a:t>
+              <a:t>Let us copy Causes. The ozone layer is destroyed by the following gases. Copy the point on CFCs on the left, then draw the diagram on the right: the ozone hole. Give it a title and label it clearly.</a:t>
             </a:r>
             <a:endParaRPr lang="en-US" dirty="0"/>
           </a:p>
@@ -3102,7 +3107,7 @@
           <a:p>
             <a:r>
               <a:rPr lang="en-US" dirty="0"/>
-              <a:t>We continue with Ozone Layer Depletion. On this slide we have Effects on people and Effects on nature. Write each point on a new line, with the key term first, and explain it in your own words when we revise. When you finish, we go to the next slide.</a:t>
+              <a:t>We continue with Causes. On this slide we have Halons and Other chemicals. Write each point on a new line, with the key term first, and explain it in your own words when we revise.</a:t>
             </a:r>
             <a:endParaRPr lang="en-US" dirty="0"/>
           </a:p>
@@ -3190,7 +3195,7 @@
           <a:p>
             <a:r>
               <a:rPr lang="en-US" dirty="0"/>
-              <a:t>We continue with Ozone Layer Depletion. On this slide we have Solutions. Write each point on a new line, with the key term first, and explain it in your own words when we revise.</a:t>
+              <a:t>Let us copy Effects on People. More ultraviolet rays reach the ground and cause the following effects on people. On this slide we have Skin cancer and Eye diseases. Write each point on a new line, with the key term first, and explain it in your own words when we revise. When you finish, we go to the next slide.</a:t>
             </a:r>
             <a:endParaRPr lang="en-US" dirty="0"/>
           </a:p>
@@ -3278,7 +3283,7 @@
           <a:p>
             <a:r>
               <a:rPr lang="en-US" dirty="0"/>
-              <a:t>Now let us check what you have understood. Question 1: In which layer does the weather happen? Answer in your exercise book.</a:t>
+              <a:t>We continue with Effects on People. On this slide we have Weak immunity. Write each point on a new line, with the key term first, and explain it in your own words when we revise.</a:t>
             </a:r>
             <a:endParaRPr lang="en-US" dirty="0"/>
           </a:p>
@@ -3366,7 +3371,7 @@
           <a:p>
             <a:r>
               <a:rPr lang="en-US" dirty="0"/>
-              <a:t>The expected answer is: in the troposphere. If you got it right, well done.</a:t>
+              <a:t>Let us copy Effects on Nature. More ultraviolet rays cause the following effects on nature. On this slide we have Damage to crops and Damage to plankton. Write each point on a new line, with the key term first, and explain it in your own words when we revise. When you finish, we go to the next slide.</a:t>
             </a:r>
             <a:endParaRPr lang="en-US" dirty="0"/>
           </a:p>
@@ -3542,7 +3547,7 @@
           <a:p>
             <a:r>
               <a:rPr lang="en-US" dirty="0"/>
-              <a:t>Now let us check what you have understood. Question 2: What is the role of the ozone layer? Answer in your exercise book.</a:t>
+              <a:t>We continue with Effects on Nature. On this slide we have Harm to animals. Write each point on a new line, with the key term first, and explain it in your own words when we revise.</a:t>
             </a:r>
             <a:endParaRPr lang="en-US" dirty="0"/>
           </a:p>
@@ -3630,7 +3635,7 @@
           <a:p>
             <a:r>
               <a:rPr lang="en-US" dirty="0"/>
-              <a:t>The expected answer is: it stops harmful rays from the Sun. If you got it right, well done.</a:t>
+              <a:t>Let us copy Solutions. The ozone layer is protected by the following solutions. On this slide we have The Montreal Protocol (1987) and Safe recycling. Write each point on a new line, with the key term first, and explain it in your own words when we revise. When you finish, we go to the next slide.</a:t>
             </a:r>
             <a:endParaRPr lang="en-US" dirty="0"/>
           </a:p>
@@ -3718,7 +3723,7 @@
           <a:p>
             <a:r>
               <a:rPr lang="en-US" dirty="0"/>
-              <a:t>For those who need more practice, fill in the blanks in your exercise book. The answers are: number 1, atmosphere; number 2, troposphere; number 3, stratosphere.</a:t>
+              <a:t>We continue with Solutions. On this slide we have Ozone-friendly products. Write each point on a new line, with the key term first, and explain it in your own words when we revise.</a:t>
             </a:r>
             <a:endParaRPr lang="en-US" dirty="0"/>
           </a:p>
@@ -3806,7 +3811,7 @@
           <a:p>
             <a:r>
               <a:rPr lang="en-US" dirty="0"/>
-              <a:t>For your homework: Distinguish weather from climate. We shall correct it at the beginning of our next lesson.</a:t>
+              <a:t>Now let us check what you have understood. Question 1: In which layer does the weather happen? Answer in your exercise book.</a:t>
             </a:r>
             <a:endParaRPr lang="en-US" dirty="0"/>
           </a:p>
@@ -3894,7 +3899,7 @@
           <a:p>
             <a:r>
               <a:rPr lang="en-US" dirty="0"/>
-              <a:t>Our next lesson will be on Lesson 31: Weather and Climate. Thank you for your attention, and see you next time.</a:t>
+              <a:t>The expected answer is: in the troposphere. If you got it right, well done.</a:t>
             </a:r>
             <a:endParaRPr lang="en-US" dirty="0"/>
           </a:p>
@@ -3982,7 +3987,7 @@
           <a:p>
             <a:r>
               <a:rPr lang="en-US" dirty="0"/>
-              <a:t>Let us play the bilingual game. I say a word in English, and you give me the French word. Then we do the reverse.</a:t>
+              <a:t>Now let us check what you have understood. Question 2: What is the role of the ozone layer? Answer in your exercise book.</a:t>
             </a:r>
             <a:endParaRPr lang="en-US" dirty="0"/>
           </a:p>
@@ -4070,7 +4075,7 @@
           <a:p>
             <a:r>
               <a:rPr lang="en-US" dirty="0"/>
-              <a:t>I record this information in the official logbook of the class after the lesson.</a:t>
+              <a:t>The expected answer is: it stops harmful rays from the Sun. If you got it right, well done.</a:t>
             </a:r>
             <a:endParaRPr lang="en-US" dirty="0"/>
           </a:p>
@@ -4158,7 +4163,7 @@
           <a:p>
             <a:r>
               <a:rPr lang="en-US" dirty="0"/>
-              <a:t>I complete the second page of the logbook: the matter taught, the evaluation, the homework and the attendance.</a:t>
+              <a:t>For those who need more practice, fill in the blanks in your exercise book. The answers are: number 1, atmosphere; number 2, troposphere; number 3, stratosphere.</a:t>
             </a:r>
             <a:endParaRPr lang="en-US" dirty="0"/>
           </a:p>
@@ -4246,7 +4251,7 @@
           <a:p>
             <a:r>
               <a:rPr lang="en-US" dirty="0"/>
-              <a:t>This slide is for me, the teacher: it gives the timing of the lesson and what to do if the projector is not available.</a:t>
+              <a:t>For your homework: Distinguish weather from climate. We shall correct it at the beginning of our next lesson.</a:t>
             </a:r>
             <a:endParaRPr lang="en-US" dirty="0"/>
           </a:p>
@@ -4334,7 +4339,7 @@
           <a:p>
             <a:r>
               <a:rPr lang="en-US" dirty="0"/>
-              <a:t>These are the references and picture credits used to prepare this lesson.</a:t>
+              <a:t>Our next lesson will be on Lesson 31: Weather and Climate. Thank you for your attention, and see you next time.</a:t>
             </a:r>
             <a:endParaRPr lang="en-US" dirty="0"/>
           </a:p>
@@ -4446,6 +4451,446 @@
             <a:fld id="{F7021451-1387-4CA6-816F-3879F97B5CBC}" type="slidenum">
               <a:rPr lang="en-US"/>
               <a:t>5</a:t>
+            </a:fld>
+            <a:endParaRPr lang="en-US"/>
+          </a:p>
+        </p:txBody>
+      </p:sp>
+    </p:spTree>
+    <p:extLst>
+      <p:ext uri="{BB962C8B-B14F-4D97-AF65-F5344CB8AC3E}">
+        <p14:creationId xmlns:p14="http://schemas.microsoft.com/office/powerpoint/2010/main" val="1024086991"/>
+      </p:ext>
+    </p:extLst>
+  </p:cSld>
+  <p:clrMapOvr>
+    <a:masterClrMapping/>
+  </p:clrMapOvr>
+</p:notes>
+</file>
+
+<file path=ppt/notesSlides/notesSlide50.xml><?xml version="1.0" encoding="utf-8"?>
+<p:notes xmlns:a="http://schemas.openxmlformats.org/drawingml/2006/main" xmlns:r="http://schemas.openxmlformats.org/officeDocument/2006/relationships" xmlns:p="http://schemas.openxmlformats.org/presentationml/2006/main">
+  <p:cSld>
+    <p:spTree>
+      <p:nvGrpSpPr>
+        <p:cNvPr id="1" name=""/>
+        <p:cNvGrpSpPr/>
+        <p:nvPr/>
+      </p:nvGrpSpPr>
+      <p:grpSpPr>
+        <a:xfrm>
+          <a:off x="0" y="0"/>
+          <a:ext cx="0" cy="0"/>
+          <a:chOff x="0" y="0"/>
+          <a:chExt cx="0" cy="0"/>
+        </a:xfrm>
+      </p:grpSpPr>
+      <p:sp>
+        <p:nvSpPr>
+          <p:cNvPr id="2" name="Slide Image Placeholder 1"/>
+          <p:cNvSpPr>
+            <a:spLocks noGrp="1" noRot="1" noChangeAspect="1"/>
+          </p:cNvSpPr>
+          <p:nvPr>
+            <p:ph type="sldImg"/>
+          </p:nvPr>
+        </p:nvSpPr>
+        <p:spPr/>
+      </p:sp>
+      <p:sp>
+        <p:nvSpPr>
+          <p:cNvPr id="3" name="Notes Placeholder 2"/>
+          <p:cNvSpPr>
+            <a:spLocks noGrp="1"/>
+          </p:cNvSpPr>
+          <p:nvPr>
+            <p:ph type="body" idx="1"/>
+          </p:nvPr>
+        </p:nvSpPr>
+        <p:spPr/>
+        <p:txBody>
+          <a:bodyPr/>
+          <a:lstStyle/>
+          <a:p>
+            <a:r>
+              <a:rPr lang="en-US" dirty="0"/>
+              <a:t>Let us play the bilingual game. I say a word in English, and you give me the French word. Then we do the reverse.</a:t>
+            </a:r>
+            <a:endParaRPr lang="en-US" dirty="0"/>
+          </a:p>
+        </p:txBody>
+      </p:sp>
+      <p:sp>
+        <p:nvSpPr>
+          <p:cNvPr id="4" name="Slide Number Placeholder 3"/>
+          <p:cNvSpPr>
+            <a:spLocks noGrp="1"/>
+          </p:cNvSpPr>
+          <p:nvPr>
+            <p:ph type="sldNum" sz="quarter" idx="10"/>
+          </p:nvPr>
+        </p:nvSpPr>
+        <p:spPr/>
+        <p:txBody>
+          <a:bodyPr/>
+          <a:lstStyle/>
+          <a:p>
+            <a:fld id="{F7021451-1387-4CA6-816F-3879F97B5CBC}" type="slidenum">
+              <a:rPr lang="en-US"/>
+              <a:t>50</a:t>
+            </a:fld>
+            <a:endParaRPr lang="en-US"/>
+          </a:p>
+        </p:txBody>
+      </p:sp>
+    </p:spTree>
+    <p:extLst>
+      <p:ext uri="{BB962C8B-B14F-4D97-AF65-F5344CB8AC3E}">
+        <p14:creationId xmlns:p14="http://schemas.microsoft.com/office/powerpoint/2010/main" val="1024086991"/>
+      </p:ext>
+    </p:extLst>
+  </p:cSld>
+  <p:clrMapOvr>
+    <a:masterClrMapping/>
+  </p:clrMapOvr>
+</p:notes>
+</file>
+
+<file path=ppt/notesSlides/notesSlide51.xml><?xml version="1.0" encoding="utf-8"?>
+<p:notes xmlns:a="http://schemas.openxmlformats.org/drawingml/2006/main" xmlns:r="http://schemas.openxmlformats.org/officeDocument/2006/relationships" xmlns:p="http://schemas.openxmlformats.org/presentationml/2006/main">
+  <p:cSld>
+    <p:spTree>
+      <p:nvGrpSpPr>
+        <p:cNvPr id="1" name=""/>
+        <p:cNvGrpSpPr/>
+        <p:nvPr/>
+      </p:nvGrpSpPr>
+      <p:grpSpPr>
+        <a:xfrm>
+          <a:off x="0" y="0"/>
+          <a:ext cx="0" cy="0"/>
+          <a:chOff x="0" y="0"/>
+          <a:chExt cx="0" cy="0"/>
+        </a:xfrm>
+      </p:grpSpPr>
+      <p:sp>
+        <p:nvSpPr>
+          <p:cNvPr id="2" name="Slide Image Placeholder 1"/>
+          <p:cNvSpPr>
+            <a:spLocks noGrp="1" noRot="1" noChangeAspect="1"/>
+          </p:cNvSpPr>
+          <p:nvPr>
+            <p:ph type="sldImg"/>
+          </p:nvPr>
+        </p:nvSpPr>
+        <p:spPr/>
+      </p:sp>
+      <p:sp>
+        <p:nvSpPr>
+          <p:cNvPr id="3" name="Notes Placeholder 2"/>
+          <p:cNvSpPr>
+            <a:spLocks noGrp="1"/>
+          </p:cNvSpPr>
+          <p:nvPr>
+            <p:ph type="body" idx="1"/>
+          </p:nvPr>
+        </p:nvSpPr>
+        <p:spPr/>
+        <p:txBody>
+          <a:bodyPr/>
+          <a:lstStyle/>
+          <a:p>
+            <a:r>
+              <a:rPr lang="en-US" dirty="0"/>
+              <a:t>I record this information in the official logbook of the class after the lesson.</a:t>
+            </a:r>
+            <a:endParaRPr lang="en-US" dirty="0"/>
+          </a:p>
+        </p:txBody>
+      </p:sp>
+      <p:sp>
+        <p:nvSpPr>
+          <p:cNvPr id="4" name="Slide Number Placeholder 3"/>
+          <p:cNvSpPr>
+            <a:spLocks noGrp="1"/>
+          </p:cNvSpPr>
+          <p:nvPr>
+            <p:ph type="sldNum" sz="quarter" idx="10"/>
+          </p:nvPr>
+        </p:nvSpPr>
+        <p:spPr/>
+        <p:txBody>
+          <a:bodyPr/>
+          <a:lstStyle/>
+          <a:p>
+            <a:fld id="{F7021451-1387-4CA6-816F-3879F97B5CBC}" type="slidenum">
+              <a:rPr lang="en-US"/>
+              <a:t>51</a:t>
+            </a:fld>
+            <a:endParaRPr lang="en-US"/>
+          </a:p>
+        </p:txBody>
+      </p:sp>
+    </p:spTree>
+    <p:extLst>
+      <p:ext uri="{BB962C8B-B14F-4D97-AF65-F5344CB8AC3E}">
+        <p14:creationId xmlns:p14="http://schemas.microsoft.com/office/powerpoint/2010/main" val="1024086991"/>
+      </p:ext>
+    </p:extLst>
+  </p:cSld>
+  <p:clrMapOvr>
+    <a:masterClrMapping/>
+  </p:clrMapOvr>
+</p:notes>
+</file>
+
+<file path=ppt/notesSlides/notesSlide52.xml><?xml version="1.0" encoding="utf-8"?>
+<p:notes xmlns:a="http://schemas.openxmlformats.org/drawingml/2006/main" xmlns:r="http://schemas.openxmlformats.org/officeDocument/2006/relationships" xmlns:p="http://schemas.openxmlformats.org/presentationml/2006/main">
+  <p:cSld>
+    <p:spTree>
+      <p:nvGrpSpPr>
+        <p:cNvPr id="1" name=""/>
+        <p:cNvGrpSpPr/>
+        <p:nvPr/>
+      </p:nvGrpSpPr>
+      <p:grpSpPr>
+        <a:xfrm>
+          <a:off x="0" y="0"/>
+          <a:ext cx="0" cy="0"/>
+          <a:chOff x="0" y="0"/>
+          <a:chExt cx="0" cy="0"/>
+        </a:xfrm>
+      </p:grpSpPr>
+      <p:sp>
+        <p:nvSpPr>
+          <p:cNvPr id="2" name="Slide Image Placeholder 1"/>
+          <p:cNvSpPr>
+            <a:spLocks noGrp="1" noRot="1" noChangeAspect="1"/>
+          </p:cNvSpPr>
+          <p:nvPr>
+            <p:ph type="sldImg"/>
+          </p:nvPr>
+        </p:nvSpPr>
+        <p:spPr/>
+      </p:sp>
+      <p:sp>
+        <p:nvSpPr>
+          <p:cNvPr id="3" name="Notes Placeholder 2"/>
+          <p:cNvSpPr>
+            <a:spLocks noGrp="1"/>
+          </p:cNvSpPr>
+          <p:nvPr>
+            <p:ph type="body" idx="1"/>
+          </p:nvPr>
+        </p:nvSpPr>
+        <p:spPr/>
+        <p:txBody>
+          <a:bodyPr/>
+          <a:lstStyle/>
+          <a:p>
+            <a:r>
+              <a:rPr lang="en-US" dirty="0"/>
+              <a:t>I complete the second page of the logbook: the matter taught, the evaluation, the homework and the attendance.</a:t>
+            </a:r>
+            <a:endParaRPr lang="en-US" dirty="0"/>
+          </a:p>
+        </p:txBody>
+      </p:sp>
+      <p:sp>
+        <p:nvSpPr>
+          <p:cNvPr id="4" name="Slide Number Placeholder 3"/>
+          <p:cNvSpPr>
+            <a:spLocks noGrp="1"/>
+          </p:cNvSpPr>
+          <p:nvPr>
+            <p:ph type="sldNum" sz="quarter" idx="10"/>
+          </p:nvPr>
+        </p:nvSpPr>
+        <p:spPr/>
+        <p:txBody>
+          <a:bodyPr/>
+          <a:lstStyle/>
+          <a:p>
+            <a:fld id="{F7021451-1387-4CA6-816F-3879F97B5CBC}" type="slidenum">
+              <a:rPr lang="en-US"/>
+              <a:t>52</a:t>
+            </a:fld>
+            <a:endParaRPr lang="en-US"/>
+          </a:p>
+        </p:txBody>
+      </p:sp>
+    </p:spTree>
+    <p:extLst>
+      <p:ext uri="{BB962C8B-B14F-4D97-AF65-F5344CB8AC3E}">
+        <p14:creationId xmlns:p14="http://schemas.microsoft.com/office/powerpoint/2010/main" val="1024086991"/>
+      </p:ext>
+    </p:extLst>
+  </p:cSld>
+  <p:clrMapOvr>
+    <a:masterClrMapping/>
+  </p:clrMapOvr>
+</p:notes>
+</file>
+
+<file path=ppt/notesSlides/notesSlide53.xml><?xml version="1.0" encoding="utf-8"?>
+<p:notes xmlns:a="http://schemas.openxmlformats.org/drawingml/2006/main" xmlns:r="http://schemas.openxmlformats.org/officeDocument/2006/relationships" xmlns:p="http://schemas.openxmlformats.org/presentationml/2006/main">
+  <p:cSld>
+    <p:spTree>
+      <p:nvGrpSpPr>
+        <p:cNvPr id="1" name=""/>
+        <p:cNvGrpSpPr/>
+        <p:nvPr/>
+      </p:nvGrpSpPr>
+      <p:grpSpPr>
+        <a:xfrm>
+          <a:off x="0" y="0"/>
+          <a:ext cx="0" cy="0"/>
+          <a:chOff x="0" y="0"/>
+          <a:chExt cx="0" cy="0"/>
+        </a:xfrm>
+      </p:grpSpPr>
+      <p:sp>
+        <p:nvSpPr>
+          <p:cNvPr id="2" name="Slide Image Placeholder 1"/>
+          <p:cNvSpPr>
+            <a:spLocks noGrp="1" noRot="1" noChangeAspect="1"/>
+          </p:cNvSpPr>
+          <p:nvPr>
+            <p:ph type="sldImg"/>
+          </p:nvPr>
+        </p:nvSpPr>
+        <p:spPr/>
+      </p:sp>
+      <p:sp>
+        <p:nvSpPr>
+          <p:cNvPr id="3" name="Notes Placeholder 2"/>
+          <p:cNvSpPr>
+            <a:spLocks noGrp="1"/>
+          </p:cNvSpPr>
+          <p:nvPr>
+            <p:ph type="body" idx="1"/>
+          </p:nvPr>
+        </p:nvSpPr>
+        <p:spPr/>
+        <p:txBody>
+          <a:bodyPr/>
+          <a:lstStyle/>
+          <a:p>
+            <a:r>
+              <a:rPr lang="en-US" dirty="0"/>
+              <a:t>This slide is for me, the teacher: it gives the timing of the lesson and what to do if the projector is not available.</a:t>
+            </a:r>
+            <a:endParaRPr lang="en-US" dirty="0"/>
+          </a:p>
+        </p:txBody>
+      </p:sp>
+      <p:sp>
+        <p:nvSpPr>
+          <p:cNvPr id="4" name="Slide Number Placeholder 3"/>
+          <p:cNvSpPr>
+            <a:spLocks noGrp="1"/>
+          </p:cNvSpPr>
+          <p:nvPr>
+            <p:ph type="sldNum" sz="quarter" idx="10"/>
+          </p:nvPr>
+        </p:nvSpPr>
+        <p:spPr/>
+        <p:txBody>
+          <a:bodyPr/>
+          <a:lstStyle/>
+          <a:p>
+            <a:fld id="{F7021451-1387-4CA6-816F-3879F97B5CBC}" type="slidenum">
+              <a:rPr lang="en-US"/>
+              <a:t>53</a:t>
+            </a:fld>
+            <a:endParaRPr lang="en-US"/>
+          </a:p>
+        </p:txBody>
+      </p:sp>
+    </p:spTree>
+    <p:extLst>
+      <p:ext uri="{BB962C8B-B14F-4D97-AF65-F5344CB8AC3E}">
+        <p14:creationId xmlns:p14="http://schemas.microsoft.com/office/powerpoint/2010/main" val="1024086991"/>
+      </p:ext>
+    </p:extLst>
+  </p:cSld>
+  <p:clrMapOvr>
+    <a:masterClrMapping/>
+  </p:clrMapOvr>
+</p:notes>
+</file>
+
+<file path=ppt/notesSlides/notesSlide54.xml><?xml version="1.0" encoding="utf-8"?>
+<p:notes xmlns:a="http://schemas.openxmlformats.org/drawingml/2006/main" xmlns:r="http://schemas.openxmlformats.org/officeDocument/2006/relationships" xmlns:p="http://schemas.openxmlformats.org/presentationml/2006/main">
+  <p:cSld>
+    <p:spTree>
+      <p:nvGrpSpPr>
+        <p:cNvPr id="1" name=""/>
+        <p:cNvGrpSpPr/>
+        <p:nvPr/>
+      </p:nvGrpSpPr>
+      <p:grpSpPr>
+        <a:xfrm>
+          <a:off x="0" y="0"/>
+          <a:ext cx="0" cy="0"/>
+          <a:chOff x="0" y="0"/>
+          <a:chExt cx="0" cy="0"/>
+        </a:xfrm>
+      </p:grpSpPr>
+      <p:sp>
+        <p:nvSpPr>
+          <p:cNvPr id="2" name="Slide Image Placeholder 1"/>
+          <p:cNvSpPr>
+            <a:spLocks noGrp="1" noRot="1" noChangeAspect="1"/>
+          </p:cNvSpPr>
+          <p:nvPr>
+            <p:ph type="sldImg"/>
+          </p:nvPr>
+        </p:nvSpPr>
+        <p:spPr/>
+      </p:sp>
+      <p:sp>
+        <p:nvSpPr>
+          <p:cNvPr id="3" name="Notes Placeholder 2"/>
+          <p:cNvSpPr>
+            <a:spLocks noGrp="1"/>
+          </p:cNvSpPr>
+          <p:nvPr>
+            <p:ph type="body" idx="1"/>
+          </p:nvPr>
+        </p:nvSpPr>
+        <p:spPr/>
+        <p:txBody>
+          <a:bodyPr/>
+          <a:lstStyle/>
+          <a:p>
+            <a:r>
+              <a:rPr lang="en-US" dirty="0"/>
+              <a:t>These are the references and picture credits used to prepare this lesson.</a:t>
+            </a:r>
+            <a:endParaRPr lang="en-US" dirty="0"/>
+          </a:p>
+        </p:txBody>
+      </p:sp>
+      <p:sp>
+        <p:nvSpPr>
+          <p:cNvPr id="4" name="Slide Number Placeholder 3"/>
+          <p:cNvSpPr>
+            <a:spLocks noGrp="1"/>
+          </p:cNvSpPr>
+          <p:nvPr>
+            <p:ph type="sldNum" sz="quarter" idx="10"/>
+          </p:nvPr>
+        </p:nvSpPr>
+        <p:spPr/>
+        <p:txBody>
+          <a:bodyPr/>
+          <a:lstStyle/>
+          <a:p>
+            <a:fld id="{F7021451-1387-4CA6-816F-3879F97B5CBC}" type="slidenum">
+              <a:rPr lang="en-US"/>
+              <a:t>54</a:t>
             </a:fld>
             <a:endParaRPr lang="en-US"/>
           </a:p>
@@ -13678,8 +14123,49 @@
         </p:nvSpPr>
         <p:spPr>
           <a:xfrm>
-            <a:off x="365760" y="1783080"/>
-            <a:ext cx="4846320" cy="4617720"/>
+            <a:off x="365760" y="1737360"/>
+            <a:ext cx="5120640" cy="457200"/>
+          </a:xfrm>
+          <a:prstGeom prst="rect">
+            <a:avLst/>
+          </a:prstGeom>
+          <a:noFill/>
+          <a:ln/>
+        </p:spPr>
+        <p:txBody>
+          <a:bodyPr wrap="square" lIns="0" tIns="0" rIns="0" bIns="0" rtlCol="0" anchor="ctr">
+            <a:normAutofit/>
+          </a:bodyPr>
+          <a:lstStyle/>
+          <a:p>
+            <a:pPr algn="l" indent="0" marL="0">
+              <a:buNone/>
+            </a:pPr>
+            <a:r>
+              <a:rPr lang="en-US" sz="3000" b="1" dirty="0">
+                <a:solidFill>
+                  <a:srgbClr val="990011"/>
+                </a:solidFill>
+                <a:latin typeface="Times New Roman" pitchFamily="34" charset="0"/>
+                <a:ea typeface="Times New Roman" pitchFamily="34" charset="-122"/>
+                <a:cs typeface="Times New Roman" pitchFamily="34" charset="-120"/>
+              </a:rPr>
+              <a:t>A) Causes</a:t>
+            </a:r>
+            <a:endParaRPr lang="en-US" sz="3000" dirty="0"/>
+          </a:p>
+        </p:txBody>
+      </p:sp>
+      <p:sp>
+        <p:nvSpPr>
+          <p:cNvPr id="5" name="Text 3"/>
+          <p:cNvSpPr/>
+          <p:nvPr/>
+        </p:nvSpPr>
+        <p:spPr>
+          <a:xfrm>
+            <a:off x="365760" y="2240280"/>
+            <a:ext cx="4846320" cy="4160520"/>
           </a:xfrm>
           <a:prstGeom prst="rect">
             <a:avLst/>
@@ -13706,7 +14192,7 @@
                 <a:ea typeface="Times New Roman" pitchFamily="34" charset="-122"/>
                 <a:cs typeface="Times New Roman" pitchFamily="34" charset="-120"/>
               </a:rPr>
-              <a:t>Ozone layer depletion is explained as follows:</a:t>
+              <a:t>The ozone layer is destroyed by the following gases:</a:t>
             </a:r>
             <a:endParaRPr lang="en-US" sz="3600" dirty="0"/>
           </a:p>
@@ -13726,7 +14212,7 @@
                 <a:ea typeface="Times New Roman" pitchFamily="34" charset="-122"/>
                 <a:cs typeface="Times New Roman" pitchFamily="34" charset="-120"/>
               </a:rPr>
-              <a:t>Causes: </a:t>
+              <a:t>CFCs: </a:t>
             </a:r>
             <a:pPr algn="l" indent="0" marL="0">
               <a:spcAft>
@@ -13743,7 +14229,7 @@
                 <a:ea typeface="Times New Roman" pitchFamily="34" charset="-122"/>
                 <a:cs typeface="Times New Roman" pitchFamily="34" charset="-120"/>
               </a:rPr>
-              <a:t>CFC gases from old fridges, air conditioners, sprays and foams rise and destroy the ozone.</a:t>
+              <a:t>They come from old fridges, air conditioners, sprays and foams.</a:t>
             </a:r>
             <a:endParaRPr lang="en-US" sz="3600" dirty="0"/>
           </a:p>
@@ -13751,7 +14237,7 @@
       </p:sp>
       <p:pic>
         <p:nvPicPr>
-          <p:cNvPr id="5" name="Image 0" descr="/home/claude/f4/img/v2/f4_ozonehole.jpg">    </p:cNvPr>
+          <p:cNvPr id="6" name="Image 0" descr="/home/claude/f4/img/v2/f4_ozonehole.jpg">    </p:cNvPr>
           <p:cNvPicPr>
             <a:picLocks noChangeAspect="1"/>
           </p:cNvPicPr>
@@ -13775,7 +14261,7 @@
       </p:pic>
       <p:sp>
         <p:nvSpPr>
-          <p:cNvPr id="6" name="Text 3"/>
+          <p:cNvPr id="7" name="Text 4"/>
           <p:cNvSpPr/>
           <p:nvPr/>
         </p:nvSpPr>
@@ -13941,7 +14427,7 @@
         <p:spPr>
           <a:xfrm>
             <a:off x="0" y="658368"/>
-            <a:ext cx="3840480" cy="5833872"/>
+            <a:ext cx="5120640" cy="5833872"/>
           </a:xfrm>
           <a:prstGeom prst="rect">
             <a:avLst/>
@@ -13956,8 +14442,8 @@
         </p:nvSpPr>
         <p:spPr>
           <a:xfrm>
-            <a:off x="4069080" y="1005840"/>
-            <a:ext cx="7802575" cy="731520"/>
+            <a:off x="5349240" y="1005840"/>
+            <a:ext cx="6522415" cy="731520"/>
           </a:xfrm>
           <a:prstGeom prst="rect">
             <a:avLst/>
@@ -13997,8 +14483,47 @@
         </p:nvSpPr>
         <p:spPr>
           <a:xfrm>
-            <a:off x="4069080" y="1783080"/>
-            <a:ext cx="7802575" cy="4663440"/>
+            <a:off x="5349240" y="1737360"/>
+            <a:ext cx="6522415" cy="457200"/>
+          </a:xfrm>
+          <a:prstGeom prst="rect">
+            <a:avLst/>
+          </a:prstGeom>
+          <a:noFill/>
+          <a:ln/>
+        </p:spPr>
+        <p:txBody>
+          <a:bodyPr wrap="square" lIns="0" tIns="0" rIns="0" bIns="0" rtlCol="0" anchor="ctr"/>
+          <a:lstStyle/>
+          <a:p>
+            <a:pPr algn="l" indent="0" marL="0">
+              <a:buNone/>
+            </a:pPr>
+            <a:r>
+              <a:rPr lang="en-US" sz="3200" b="1" dirty="0">
+                <a:solidFill>
+                  <a:srgbClr val="990011"/>
+                </a:solidFill>
+                <a:latin typeface="Times New Roman" pitchFamily="34" charset="0"/>
+                <a:ea typeface="Times New Roman" pitchFamily="34" charset="-122"/>
+                <a:cs typeface="Times New Roman" pitchFamily="34" charset="-120"/>
+              </a:rPr>
+              <a:t>A) Causes</a:t>
+            </a:r>
+            <a:endParaRPr lang="en-US" sz="3200" dirty="0"/>
+          </a:p>
+        </p:txBody>
+      </p:sp>
+      <p:sp>
+        <p:nvSpPr>
+          <p:cNvPr id="6" name="Text 3"/>
+          <p:cNvSpPr/>
+          <p:nvPr/>
+        </p:nvSpPr>
+        <p:spPr>
+          <a:xfrm>
+            <a:off x="5349240" y="2240280"/>
+            <a:ext cx="6522415" cy="4206240"/>
           </a:xfrm>
           <a:prstGeom prst="rect">
             <a:avLst/>
@@ -14025,7 +14550,7 @@
                 <a:ea typeface="Times New Roman" pitchFamily="34" charset="-122"/>
                 <a:cs typeface="Times New Roman" pitchFamily="34" charset="-120"/>
               </a:rPr>
-              <a:t>Effects on people: </a:t>
+              <a:t>Halons: </a:t>
             </a:r>
             <a:pPr algn="l" indent="0" marL="0">
               <a:spcAft>
@@ -14042,7 +14567,7 @@
                 <a:ea typeface="Times New Roman" pitchFamily="34" charset="-122"/>
                 <a:cs typeface="Times New Roman" pitchFamily="34" charset="-120"/>
               </a:rPr>
-              <a:t>More ultraviolet rays reach the ground and cause skin cancer, eye diseases and weak immunity.</a:t>
+              <a:t>They come from some fire extinguishers.</a:t>
             </a:r>
             <a:endParaRPr lang="en-US" sz="4000" dirty="0"/>
           </a:p>
@@ -14062,7 +14587,7 @@
                 <a:ea typeface="Times New Roman" pitchFamily="34" charset="-122"/>
                 <a:cs typeface="Times New Roman" pitchFamily="34" charset="-120"/>
               </a:rPr>
-              <a:t>Effects on nature: </a:t>
+              <a:t>Other chemicals: </a:t>
             </a:r>
             <a:pPr algn="l" indent="0" marL="0">
               <a:spcAft>
@@ -14079,7 +14604,7 @@
                 <a:ea typeface="Times New Roman" pitchFamily="34" charset="-122"/>
                 <a:cs typeface="Times New Roman" pitchFamily="34" charset="-120"/>
               </a:rPr>
-              <a:t>Ultraviolet rays damage crops, plankton and other living things.</a:t>
+              <a:t>Some pesticides and solvents also destroy ozone.</a:t>
             </a:r>
             <a:endParaRPr lang="en-US" sz="4000" dirty="0"/>
           </a:p>
@@ -14214,7 +14739,7 @@
         <p:spPr>
           <a:xfrm>
             <a:off x="0" y="658368"/>
-            <a:ext cx="5120640" cy="5833872"/>
+            <a:ext cx="1463040" cy="5833872"/>
           </a:xfrm>
           <a:prstGeom prst="rect">
             <a:avLst/>
@@ -14229,8 +14754,8 @@
         </p:nvSpPr>
         <p:spPr>
           <a:xfrm>
-            <a:off x="5349240" y="1005840"/>
-            <a:ext cx="6522415" cy="731520"/>
+            <a:off x="1691640" y="1005840"/>
+            <a:ext cx="10180015" cy="731520"/>
           </a:xfrm>
           <a:prstGeom prst="rect">
             <a:avLst/>
@@ -14256,7 +14781,7 @@
                 <a:ea typeface="Times New Roman" pitchFamily="34" charset="-122"/>
                 <a:cs typeface="Times New Roman" pitchFamily="34" charset="-120"/>
               </a:rPr>
-              <a:t>3. Ozone Layer Depletion (continued)</a:t>
+              <a:t>3. Ozone Layer Depletion</a:t>
             </a:r>
             <a:endParaRPr lang="en-US" sz="3600" dirty="0"/>
           </a:p>
@@ -14270,8 +14795,47 @@
         </p:nvSpPr>
         <p:spPr>
           <a:xfrm>
-            <a:off x="5349240" y="1783080"/>
-            <a:ext cx="6522415" cy="4663440"/>
+            <a:off x="1691640" y="1737360"/>
+            <a:ext cx="10180015" cy="457200"/>
+          </a:xfrm>
+          <a:prstGeom prst="rect">
+            <a:avLst/>
+          </a:prstGeom>
+          <a:noFill/>
+          <a:ln/>
+        </p:spPr>
+        <p:txBody>
+          <a:bodyPr wrap="square" lIns="0" tIns="0" rIns="0" bIns="0" rtlCol="0" anchor="ctr"/>
+          <a:lstStyle/>
+          <a:p>
+            <a:pPr algn="l" indent="0" marL="0">
+              <a:buNone/>
+            </a:pPr>
+            <a:r>
+              <a:rPr lang="en-US" sz="3200" b="1" dirty="0">
+                <a:solidFill>
+                  <a:srgbClr val="990011"/>
+                </a:solidFill>
+                <a:latin typeface="Times New Roman" pitchFamily="34" charset="0"/>
+                <a:ea typeface="Times New Roman" pitchFamily="34" charset="-122"/>
+                <a:cs typeface="Times New Roman" pitchFamily="34" charset="-120"/>
+              </a:rPr>
+              <a:t>B) Effects on People</a:t>
+            </a:r>
+            <a:endParaRPr lang="en-US" sz="3200" dirty="0"/>
+          </a:p>
+        </p:txBody>
+      </p:sp>
+      <p:sp>
+        <p:nvSpPr>
+          <p:cNvPr id="6" name="Text 3"/>
+          <p:cNvSpPr/>
+          <p:nvPr/>
+        </p:nvSpPr>
+        <p:spPr>
+          <a:xfrm>
+            <a:off x="1691640" y="2240280"/>
+            <a:ext cx="10180015" cy="4206240"/>
           </a:xfrm>
           <a:prstGeom prst="rect">
             <a:avLst/>
@@ -14290,7 +14854,7 @@
               <a:buNone/>
             </a:pPr>
             <a:r>
-              <a:rPr lang="en-US" sz="4000" b="1" dirty="0">
+              <a:rPr lang="en-US" sz="4000" i="1" dirty="0">
                 <a:solidFill>
                   <a:srgbClr val="111111"/>
                 </a:solidFill>
@@ -14298,8 +14862,11 @@
                 <a:ea typeface="Times New Roman" pitchFamily="34" charset="-122"/>
                 <a:cs typeface="Times New Roman" pitchFamily="34" charset="-120"/>
               </a:rPr>
-              <a:t>Solutions: </a:t>
-            </a:r>
+              <a:t>More ultraviolet rays reach the ground and cause the following effects on people:</a:t>
+            </a:r>
+            <a:endParaRPr lang="en-US" sz="4000" dirty="0"/>
+          </a:p>
+          <a:p>
             <a:pPr algn="l" indent="0" marL="0">
               <a:spcAft>
                 <a:spcPts val="800"/>
@@ -14307,7 +14874,7 @@
               <a:buNone/>
             </a:pPr>
             <a:r>
-              <a:rPr lang="en-US" sz="4000" dirty="0">
+              <a:rPr lang="en-US" sz="4000" b="1" dirty="0">
                 <a:solidFill>
                   <a:srgbClr val="111111"/>
                 </a:solidFill>
@@ -14315,7 +14882,61 @@
                 <a:ea typeface="Times New Roman" pitchFamily="34" charset="-122"/>
                 <a:cs typeface="Times New Roman" pitchFamily="34" charset="-120"/>
               </a:rPr>
-              <a:t>CFCs were banned by the Montreal Protocol of 1987, and old fridges must be recycled safely.</a:t>
+              <a:t>Skin cancer: </a:t>
+            </a:r>
+            <a:pPr algn="l" indent="0" marL="0">
+              <a:spcAft>
+                <a:spcPts val="800"/>
+              </a:spcAft>
+              <a:buNone/>
+            </a:pPr>
+            <a:r>
+              <a:rPr lang="en-US" sz="4000" dirty="0">
+                <a:solidFill>
+                  <a:srgbClr val="111111"/>
+                </a:solidFill>
+                <a:latin typeface="Times New Roman" pitchFamily="34" charset="0"/>
+                <a:ea typeface="Times New Roman" pitchFamily="34" charset="-122"/>
+                <a:cs typeface="Times New Roman" pitchFamily="34" charset="-120"/>
+              </a:rPr>
+              <a:t>The rays burn and damage the skin.</a:t>
+            </a:r>
+            <a:endParaRPr lang="en-US" sz="4000" dirty="0"/>
+          </a:p>
+          <a:p>
+            <a:pPr algn="l" indent="0" marL="0">
+              <a:spcAft>
+                <a:spcPts val="800"/>
+              </a:spcAft>
+              <a:buNone/>
+            </a:pPr>
+            <a:r>
+              <a:rPr lang="en-US" sz="4000" b="1" dirty="0">
+                <a:solidFill>
+                  <a:srgbClr val="111111"/>
+                </a:solidFill>
+                <a:latin typeface="Times New Roman" pitchFamily="34" charset="0"/>
+                <a:ea typeface="Times New Roman" pitchFamily="34" charset="-122"/>
+                <a:cs typeface="Times New Roman" pitchFamily="34" charset="-120"/>
+              </a:rPr>
+              <a:t>Eye diseases: </a:t>
+            </a:r>
+            <a:pPr algn="l" indent="0" marL="0">
+              <a:spcAft>
+                <a:spcPts val="800"/>
+              </a:spcAft>
+              <a:buNone/>
+            </a:pPr>
+            <a:r>
+              <a:rPr lang="en-US" sz="4000" dirty="0">
+                <a:solidFill>
+                  <a:srgbClr val="111111"/>
+                </a:solidFill>
+                <a:latin typeface="Times New Roman" pitchFamily="34" charset="0"/>
+                <a:ea typeface="Times New Roman" pitchFamily="34" charset="-122"/>
+                <a:cs typeface="Times New Roman" pitchFamily="34" charset="-120"/>
+              </a:rPr>
+              <a:t>They cause cataracts, which can lead to blindness.</a:t>
             </a:r>
             <a:endParaRPr lang="en-US" sz="4000" dirty="0"/>
           </a:p>
@@ -14427,7 +15048,7 @@
                 <a:ea typeface="Calibri" pitchFamily="34" charset="-122"/>
                 <a:cs typeface="Calibri" pitchFamily="34" charset="-120"/>
               </a:rPr>
-              <a:t>FORMATIVE EVALUATION</a:t>
+              <a:t>BOARD SUMMARY</a:t>
             </a:r>
             <a:endParaRPr lang="en-US" sz="1400" dirty="0"/>
           </a:p>
@@ -14492,7 +15113,7 @@
                 <a:ea typeface="Times New Roman" pitchFamily="34" charset="-122"/>
                 <a:cs typeface="Times New Roman" pitchFamily="34" charset="-120"/>
               </a:rPr>
-              <a:t>Evaluation 1</a:t>
+              <a:t>3. Ozone Layer Depletion</a:t>
             </a:r>
             <a:endParaRPr lang="en-US" sz="3600" dirty="0"/>
           </a:p>
@@ -14506,8 +15127,47 @@
         </p:nvSpPr>
         <p:spPr>
           <a:xfrm>
-            <a:off x="5349240" y="1783080"/>
-            <a:ext cx="6522415" cy="4663440"/>
+            <a:off x="5349240" y="1737360"/>
+            <a:ext cx="6522415" cy="457200"/>
+          </a:xfrm>
+          <a:prstGeom prst="rect">
+            <a:avLst/>
+          </a:prstGeom>
+          <a:noFill/>
+          <a:ln/>
+        </p:spPr>
+        <p:txBody>
+          <a:bodyPr wrap="square" lIns="0" tIns="0" rIns="0" bIns="0" rtlCol="0" anchor="ctr"/>
+          <a:lstStyle/>
+          <a:p>
+            <a:pPr algn="l" indent="0" marL="0">
+              <a:buNone/>
+            </a:pPr>
+            <a:r>
+              <a:rPr lang="en-US" sz="3200" b="1" dirty="0">
+                <a:solidFill>
+                  <a:srgbClr val="990011"/>
+                </a:solidFill>
+                <a:latin typeface="Times New Roman" pitchFamily="34" charset="0"/>
+                <a:ea typeface="Times New Roman" pitchFamily="34" charset="-122"/>
+                <a:cs typeface="Times New Roman" pitchFamily="34" charset="-120"/>
+              </a:rPr>
+              <a:t>B) Effects on People (continued)</a:t>
+            </a:r>
+            <a:endParaRPr lang="en-US" sz="3200" dirty="0"/>
+          </a:p>
+        </p:txBody>
+      </p:sp>
+      <p:sp>
+        <p:nvSpPr>
+          <p:cNvPr id="6" name="Text 3"/>
+          <p:cNvSpPr/>
+          <p:nvPr/>
+        </p:nvSpPr>
+        <p:spPr>
+          <a:xfrm>
+            <a:off x="5349240" y="2240280"/>
+            <a:ext cx="6522415" cy="4206240"/>
           </a:xfrm>
           <a:prstGeom prst="rect">
             <a:avLst/>
@@ -14526,7 +15186,7 @@
               <a:buNone/>
             </a:pPr>
             <a:r>
-              <a:rPr lang="en-US" sz="4000" dirty="0">
+              <a:rPr lang="en-US" sz="4000" b="1" dirty="0">
                 <a:solidFill>
                   <a:srgbClr val="111111"/>
                 </a:solidFill>
@@ -14534,7 +15194,24 @@
                 <a:ea typeface="Times New Roman" pitchFamily="34" charset="-122"/>
                 <a:cs typeface="Times New Roman" pitchFamily="34" charset="-120"/>
               </a:rPr>
-              <a:t>In which layer does the weather happen?</a:t>
+              <a:t>Weak immunity: </a:t>
+            </a:r>
+            <a:pPr algn="l" indent="0" marL="0">
+              <a:spcAft>
+                <a:spcPts val="800"/>
+              </a:spcAft>
+              <a:buNone/>
+            </a:pPr>
+            <a:r>
+              <a:rPr lang="en-US" sz="4000" dirty="0">
+                <a:solidFill>
+                  <a:srgbClr val="111111"/>
+                </a:solidFill>
+                <a:latin typeface="Times New Roman" pitchFamily="34" charset="0"/>
+                <a:ea typeface="Times New Roman" pitchFamily="34" charset="-122"/>
+                <a:cs typeface="Times New Roman" pitchFamily="34" charset="-120"/>
+              </a:rPr>
+              <a:t>The body defends itself less well against diseases.</a:t>
             </a:r>
             <a:endParaRPr lang="en-US" sz="4000" dirty="0"/>
           </a:p>
@@ -14646,7 +15323,7 @@
                 <a:ea typeface="Calibri" pitchFamily="34" charset="-122"/>
                 <a:cs typeface="Calibri" pitchFamily="34" charset="-120"/>
               </a:rPr>
-              <a:t>FORMATIVE EVALUATION</a:t>
+              <a:t>BOARD SUMMARY</a:t>
             </a:r>
             <a:endParaRPr lang="en-US" sz="1400" dirty="0"/>
           </a:p>
@@ -14669,7 +15346,7 @@
         <p:spPr>
           <a:xfrm>
             <a:off x="0" y="658368"/>
-            <a:ext cx="5120640" cy="5833872"/>
+            <a:ext cx="3840480" cy="5833872"/>
           </a:xfrm>
           <a:prstGeom prst="rect">
             <a:avLst/>
@@ -14684,8 +15361,8 @@
         </p:nvSpPr>
         <p:spPr>
           <a:xfrm>
-            <a:off x="5349240" y="1005840"/>
-            <a:ext cx="6522415" cy="731520"/>
+            <a:off x="4069080" y="1005840"/>
+            <a:ext cx="7802575" cy="731520"/>
           </a:xfrm>
           <a:prstGeom prst="rect">
             <a:avLst/>
@@ -14711,7 +15388,7 @@
                 <a:ea typeface="Times New Roman" pitchFamily="34" charset="-122"/>
                 <a:cs typeface="Times New Roman" pitchFamily="34" charset="-120"/>
               </a:rPr>
-              <a:t>Expected Answer</a:t>
+              <a:t>3. Ozone Layer Depletion</a:t>
             </a:r>
             <a:endParaRPr lang="en-US" sz="3600" dirty="0"/>
           </a:p>
@@ -14725,8 +15402,47 @@
         </p:nvSpPr>
         <p:spPr>
           <a:xfrm>
-            <a:off x="5349240" y="1783080"/>
-            <a:ext cx="6522415" cy="4663440"/>
+            <a:off x="4069080" y="1737360"/>
+            <a:ext cx="7802575" cy="457200"/>
+          </a:xfrm>
+          <a:prstGeom prst="rect">
+            <a:avLst/>
+          </a:prstGeom>
+          <a:noFill/>
+          <a:ln/>
+        </p:spPr>
+        <p:txBody>
+          <a:bodyPr wrap="square" lIns="0" tIns="0" rIns="0" bIns="0" rtlCol="0" anchor="ctr"/>
+          <a:lstStyle/>
+          <a:p>
+            <a:pPr algn="l" indent="0" marL="0">
+              <a:buNone/>
+            </a:pPr>
+            <a:r>
+              <a:rPr lang="en-US" sz="3200" b="1" dirty="0">
+                <a:solidFill>
+                  <a:srgbClr val="990011"/>
+                </a:solidFill>
+                <a:latin typeface="Times New Roman" pitchFamily="34" charset="0"/>
+                <a:ea typeface="Times New Roman" pitchFamily="34" charset="-122"/>
+                <a:cs typeface="Times New Roman" pitchFamily="34" charset="-120"/>
+              </a:rPr>
+              <a:t>C) Effects on Nature</a:t>
+            </a:r>
+            <a:endParaRPr lang="en-US" sz="3200" dirty="0"/>
+          </a:p>
+        </p:txBody>
+      </p:sp>
+      <p:sp>
+        <p:nvSpPr>
+          <p:cNvPr id="6" name="Text 3"/>
+          <p:cNvSpPr/>
+          <p:nvPr/>
+        </p:nvSpPr>
+        <p:spPr>
+          <a:xfrm>
+            <a:off x="4069080" y="2240280"/>
+            <a:ext cx="7802575" cy="4206240"/>
           </a:xfrm>
           <a:prstGeom prst="rect">
             <a:avLst/>
@@ -14745,7 +15461,7 @@
               <a:buNone/>
             </a:pPr>
             <a:r>
-              <a:rPr lang="en-US" sz="4000" dirty="0">
+              <a:rPr lang="en-US" sz="4000" i="1" dirty="0">
                 <a:solidFill>
                   <a:srgbClr val="111111"/>
                 </a:solidFill>
@@ -14753,7 +15469,81 @@
                 <a:ea typeface="Times New Roman" pitchFamily="34" charset="-122"/>
                 <a:cs typeface="Times New Roman" pitchFamily="34" charset="-120"/>
               </a:rPr>
-              <a:t>In the troposphere.</a:t>
+              <a:t>More ultraviolet rays cause the following effects on nature:</a:t>
+            </a:r>
+            <a:endParaRPr lang="en-US" sz="4000" dirty="0"/>
+          </a:p>
+          <a:p>
+            <a:pPr algn="l" indent="0" marL="0">
+              <a:spcAft>
+                <a:spcPts val="800"/>
+              </a:spcAft>
+              <a:buNone/>
+            </a:pPr>
+            <a:r>
+              <a:rPr lang="en-US" sz="4000" b="1" dirty="0">
+                <a:solidFill>
+                  <a:srgbClr val="111111"/>
+                </a:solidFill>
+                <a:latin typeface="Times New Roman" pitchFamily="34" charset="0"/>
+                <a:ea typeface="Times New Roman" pitchFamily="34" charset="-122"/>
+                <a:cs typeface="Times New Roman" pitchFamily="34" charset="-120"/>
+              </a:rPr>
+              <a:t>Damage to crops: </a:t>
+            </a:r>
+            <a:pPr algn="l" indent="0" marL="0">
+              <a:spcAft>
+                <a:spcPts val="800"/>
+              </a:spcAft>
+              <a:buNone/>
+            </a:pPr>
+            <a:r>
+              <a:rPr lang="en-US" sz="4000" dirty="0">
+                <a:solidFill>
+                  <a:srgbClr val="111111"/>
+                </a:solidFill>
+                <a:latin typeface="Times New Roman" pitchFamily="34" charset="0"/>
+                <a:ea typeface="Times New Roman" pitchFamily="34" charset="-122"/>
+                <a:cs typeface="Times New Roman" pitchFamily="34" charset="-120"/>
+              </a:rPr>
+              <a:t>Plants grow less well and yields fall.</a:t>
+            </a:r>
+            <a:endParaRPr lang="en-US" sz="4000" dirty="0"/>
+          </a:p>
+          <a:p>
+            <a:pPr algn="l" indent="0" marL="0">
+              <a:spcAft>
+                <a:spcPts val="800"/>
+              </a:spcAft>
+              <a:buNone/>
+            </a:pPr>
+            <a:r>
+              <a:rPr lang="en-US" sz="4000" b="1" dirty="0">
+                <a:solidFill>
+                  <a:srgbClr val="111111"/>
+                </a:solidFill>
+                <a:latin typeface="Times New Roman" pitchFamily="34" charset="0"/>
+                <a:ea typeface="Times New Roman" pitchFamily="34" charset="-122"/>
+                <a:cs typeface="Times New Roman" pitchFamily="34" charset="-120"/>
+              </a:rPr>
+              <a:t>Damage to plankton: </a:t>
+            </a:r>
+            <a:pPr algn="l" indent="0" marL="0">
+              <a:spcAft>
+                <a:spcPts val="800"/>
+              </a:spcAft>
+              <a:buNone/>
+            </a:pPr>
+            <a:r>
+              <a:rPr lang="en-US" sz="4000" dirty="0">
+                <a:solidFill>
+                  <a:srgbClr val="111111"/>
+                </a:solidFill>
+                <a:latin typeface="Times New Roman" pitchFamily="34" charset="0"/>
+                <a:ea typeface="Times New Roman" pitchFamily="34" charset="-122"/>
+                <a:cs typeface="Times New Roman" pitchFamily="34" charset="-120"/>
+              </a:rPr>
+              <a:t>Plankton dies, so fish have less food.</a:t>
             </a:r>
             <a:endParaRPr lang="en-US" sz="4000" dirty="0"/>
           </a:p>
@@ -15104,7 +15894,7 @@
                 <a:ea typeface="Calibri" pitchFamily="34" charset="-122"/>
                 <a:cs typeface="Calibri" pitchFamily="34" charset="-120"/>
               </a:rPr>
-              <a:t>FORMATIVE EVALUATION</a:t>
+              <a:t>BOARD SUMMARY</a:t>
             </a:r>
             <a:endParaRPr lang="en-US" sz="1400" dirty="0"/>
           </a:p>
@@ -15169,7 +15959,7 @@
                 <a:ea typeface="Times New Roman" pitchFamily="34" charset="-122"/>
                 <a:cs typeface="Times New Roman" pitchFamily="34" charset="-120"/>
               </a:rPr>
-              <a:t>Evaluation 2</a:t>
+              <a:t>3. Ozone Layer Depletion</a:t>
             </a:r>
             <a:endParaRPr lang="en-US" sz="3600" dirty="0"/>
           </a:p>
@@ -15183,8 +15973,47 @@
         </p:nvSpPr>
         <p:spPr>
           <a:xfrm>
-            <a:off x="5349240" y="1783080"/>
-            <a:ext cx="6522415" cy="4663440"/>
+            <a:off x="5349240" y="1737360"/>
+            <a:ext cx="6522415" cy="457200"/>
+          </a:xfrm>
+          <a:prstGeom prst="rect">
+            <a:avLst/>
+          </a:prstGeom>
+          <a:noFill/>
+          <a:ln/>
+        </p:spPr>
+        <p:txBody>
+          <a:bodyPr wrap="square" lIns="0" tIns="0" rIns="0" bIns="0" rtlCol="0" anchor="ctr"/>
+          <a:lstStyle/>
+          <a:p>
+            <a:pPr algn="l" indent="0" marL="0">
+              <a:buNone/>
+            </a:pPr>
+            <a:r>
+              <a:rPr lang="en-US" sz="3200" b="1" dirty="0">
+                <a:solidFill>
+                  <a:srgbClr val="990011"/>
+                </a:solidFill>
+                <a:latin typeface="Times New Roman" pitchFamily="34" charset="0"/>
+                <a:ea typeface="Times New Roman" pitchFamily="34" charset="-122"/>
+                <a:cs typeface="Times New Roman" pitchFamily="34" charset="-120"/>
+              </a:rPr>
+              <a:t>C) Effects on Nature (continued)</a:t>
+            </a:r>
+            <a:endParaRPr lang="en-US" sz="3200" dirty="0"/>
+          </a:p>
+        </p:txBody>
+      </p:sp>
+      <p:sp>
+        <p:nvSpPr>
+          <p:cNvPr id="6" name="Text 3"/>
+          <p:cNvSpPr/>
+          <p:nvPr/>
+        </p:nvSpPr>
+        <p:spPr>
+          <a:xfrm>
+            <a:off x="5349240" y="2240280"/>
+            <a:ext cx="6522415" cy="4206240"/>
           </a:xfrm>
           <a:prstGeom prst="rect">
             <a:avLst/>
@@ -15203,7 +16032,7 @@
               <a:buNone/>
             </a:pPr>
             <a:r>
-              <a:rPr lang="en-US" sz="4000" dirty="0">
+              <a:rPr lang="en-US" sz="4000" b="1" dirty="0">
                 <a:solidFill>
                   <a:srgbClr val="111111"/>
                 </a:solidFill>
@@ -15211,7 +16040,24 @@
                 <a:ea typeface="Times New Roman" pitchFamily="34" charset="-122"/>
                 <a:cs typeface="Times New Roman" pitchFamily="34" charset="-120"/>
               </a:rPr>
-              <a:t>What is the role of the ozone layer?</a:t>
+              <a:t>Harm to animals: </a:t>
+            </a:r>
+            <a:pPr algn="l" indent="0" marL="0">
+              <a:spcAft>
+                <a:spcPts val="800"/>
+              </a:spcAft>
+              <a:buNone/>
+            </a:pPr>
+            <a:r>
+              <a:rPr lang="en-US" sz="4000" dirty="0">
+                <a:solidFill>
+                  <a:srgbClr val="111111"/>
+                </a:solidFill>
+                <a:latin typeface="Times New Roman" pitchFamily="34" charset="0"/>
+                <a:ea typeface="Times New Roman" pitchFamily="34" charset="-122"/>
+                <a:cs typeface="Times New Roman" pitchFamily="34" charset="-120"/>
+              </a:rPr>
+              <a:t>Animals also suffer from eye and skin diseases.</a:t>
             </a:r>
             <a:endParaRPr lang="en-US" sz="4000" dirty="0"/>
           </a:p>
@@ -15323,7 +16169,7 @@
                 <a:ea typeface="Calibri" pitchFamily="34" charset="-122"/>
                 <a:cs typeface="Calibri" pitchFamily="34" charset="-120"/>
               </a:rPr>
-              <a:t>FORMATIVE EVALUATION</a:t>
+              <a:t>BOARD SUMMARY</a:t>
             </a:r>
             <a:endParaRPr lang="en-US" sz="1400" dirty="0"/>
           </a:p>
@@ -15346,7 +16192,7 @@
         <p:spPr>
           <a:xfrm>
             <a:off x="0" y="658368"/>
-            <a:ext cx="5120640" cy="5833872"/>
+            <a:ext cx="2468880" cy="5833872"/>
           </a:xfrm>
           <a:prstGeom prst="rect">
             <a:avLst/>
@@ -15361,8 +16207,8 @@
         </p:nvSpPr>
         <p:spPr>
           <a:xfrm>
-            <a:off x="5349240" y="1005840"/>
-            <a:ext cx="6522415" cy="731520"/>
+            <a:off x="2697480" y="1005840"/>
+            <a:ext cx="9174175" cy="731520"/>
           </a:xfrm>
           <a:prstGeom prst="rect">
             <a:avLst/>
@@ -15388,7 +16234,7 @@
                 <a:ea typeface="Times New Roman" pitchFamily="34" charset="-122"/>
                 <a:cs typeface="Times New Roman" pitchFamily="34" charset="-120"/>
               </a:rPr>
-              <a:t>Expected Answer</a:t>
+              <a:t>3. Ozone Layer Depletion</a:t>
             </a:r>
             <a:endParaRPr lang="en-US" sz="3600" dirty="0"/>
           </a:p>
@@ -15402,8 +16248,47 @@
         </p:nvSpPr>
         <p:spPr>
           <a:xfrm>
-            <a:off x="5349240" y="1783080"/>
-            <a:ext cx="6522415" cy="4663440"/>
+            <a:off x="2697480" y="1737360"/>
+            <a:ext cx="9174175" cy="457200"/>
+          </a:xfrm>
+          <a:prstGeom prst="rect">
+            <a:avLst/>
+          </a:prstGeom>
+          <a:noFill/>
+          <a:ln/>
+        </p:spPr>
+        <p:txBody>
+          <a:bodyPr wrap="square" lIns="0" tIns="0" rIns="0" bIns="0" rtlCol="0" anchor="ctr"/>
+          <a:lstStyle/>
+          <a:p>
+            <a:pPr algn="l" indent="0" marL="0">
+              <a:buNone/>
+            </a:pPr>
+            <a:r>
+              <a:rPr lang="en-US" sz="3200" b="1" dirty="0">
+                <a:solidFill>
+                  <a:srgbClr val="990011"/>
+                </a:solidFill>
+                <a:latin typeface="Times New Roman" pitchFamily="34" charset="0"/>
+                <a:ea typeface="Times New Roman" pitchFamily="34" charset="-122"/>
+                <a:cs typeface="Times New Roman" pitchFamily="34" charset="-120"/>
+              </a:rPr>
+              <a:t>D) Solutions</a:t>
+            </a:r>
+            <a:endParaRPr lang="en-US" sz="3200" dirty="0"/>
+          </a:p>
+        </p:txBody>
+      </p:sp>
+      <p:sp>
+        <p:nvSpPr>
+          <p:cNvPr id="6" name="Text 3"/>
+          <p:cNvSpPr/>
+          <p:nvPr/>
+        </p:nvSpPr>
+        <p:spPr>
+          <a:xfrm>
+            <a:off x="2697480" y="2240280"/>
+            <a:ext cx="9174175" cy="4206240"/>
           </a:xfrm>
           <a:prstGeom prst="rect">
             <a:avLst/>
@@ -15422,7 +16307,7 @@
               <a:buNone/>
             </a:pPr>
             <a:r>
-              <a:rPr lang="en-US" sz="4000" dirty="0">
+              <a:rPr lang="en-US" sz="4000" i="1" dirty="0">
                 <a:solidFill>
                   <a:srgbClr val="111111"/>
                 </a:solidFill>
@@ -15430,7 +16315,81 @@
                 <a:ea typeface="Times New Roman" pitchFamily="34" charset="-122"/>
                 <a:cs typeface="Times New Roman" pitchFamily="34" charset="-120"/>
               </a:rPr>
-              <a:t>It stops harmful rays from the Sun.</a:t>
+              <a:t>The ozone layer is protected by the following solutions:</a:t>
+            </a:r>
+            <a:endParaRPr lang="en-US" sz="4000" dirty="0"/>
+          </a:p>
+          <a:p>
+            <a:pPr algn="l" indent="0" marL="0">
+              <a:spcAft>
+                <a:spcPts val="800"/>
+              </a:spcAft>
+              <a:buNone/>
+            </a:pPr>
+            <a:r>
+              <a:rPr lang="en-US" sz="4000" b="1" dirty="0">
+                <a:solidFill>
+                  <a:srgbClr val="111111"/>
+                </a:solidFill>
+                <a:latin typeface="Times New Roman" pitchFamily="34" charset="0"/>
+                <a:ea typeface="Times New Roman" pitchFamily="34" charset="-122"/>
+                <a:cs typeface="Times New Roman" pitchFamily="34" charset="-120"/>
+              </a:rPr>
+              <a:t>The Montreal Protocol (1987): </a:t>
+            </a:r>
+            <a:pPr algn="l" indent="0" marL="0">
+              <a:spcAft>
+                <a:spcPts val="800"/>
+              </a:spcAft>
+              <a:buNone/>
+            </a:pPr>
+            <a:r>
+              <a:rPr lang="en-US" sz="4000" dirty="0">
+                <a:solidFill>
+                  <a:srgbClr val="111111"/>
+                </a:solidFill>
+                <a:latin typeface="Times New Roman" pitchFamily="34" charset="0"/>
+                <a:ea typeface="Times New Roman" pitchFamily="34" charset="-122"/>
+                <a:cs typeface="Times New Roman" pitchFamily="34" charset="-120"/>
+              </a:rPr>
+              <a:t>It banned CFCs in almost all countries.</a:t>
+            </a:r>
+            <a:endParaRPr lang="en-US" sz="4000" dirty="0"/>
+          </a:p>
+          <a:p>
+            <a:pPr algn="l" indent="0" marL="0">
+              <a:spcAft>
+                <a:spcPts val="800"/>
+              </a:spcAft>
+              <a:buNone/>
+            </a:pPr>
+            <a:r>
+              <a:rPr lang="en-US" sz="4000" b="1" dirty="0">
+                <a:solidFill>
+                  <a:srgbClr val="111111"/>
+                </a:solidFill>
+                <a:latin typeface="Times New Roman" pitchFamily="34" charset="0"/>
+                <a:ea typeface="Times New Roman" pitchFamily="34" charset="-122"/>
+                <a:cs typeface="Times New Roman" pitchFamily="34" charset="-120"/>
+              </a:rPr>
+              <a:t>Safe recycling: </a:t>
+            </a:r>
+            <a:pPr algn="l" indent="0" marL="0">
+              <a:spcAft>
+                <a:spcPts val="800"/>
+              </a:spcAft>
+              <a:buNone/>
+            </a:pPr>
+            <a:r>
+              <a:rPr lang="en-US" sz="4000" dirty="0">
+                <a:solidFill>
+                  <a:srgbClr val="111111"/>
+                </a:solidFill>
+                <a:latin typeface="Times New Roman" pitchFamily="34" charset="0"/>
+                <a:ea typeface="Times New Roman" pitchFamily="34" charset="-122"/>
+                <a:cs typeface="Times New Roman" pitchFamily="34" charset="-120"/>
+              </a:rPr>
+              <a:t>Old fridges and air conditioners must be recycled safely.</a:t>
             </a:r>
             <a:endParaRPr lang="en-US" sz="4000" dirty="0"/>
           </a:p>
@@ -15542,7 +16501,7 @@
                 <a:ea typeface="Calibri" pitchFamily="34" charset="-122"/>
                 <a:cs typeface="Calibri" pitchFamily="34" charset="-120"/>
               </a:rPr>
-              <a:t>REMEDIATION</a:t>
+              <a:t>BOARD SUMMARY</a:t>
             </a:r>
             <a:endParaRPr lang="en-US" sz="1400" dirty="0"/>
           </a:p>
@@ -15565,7 +16524,7 @@
         <p:spPr>
           <a:xfrm>
             <a:off x="0" y="658368"/>
-            <a:ext cx="2468880" cy="5833872"/>
+            <a:ext cx="5120640" cy="5833872"/>
           </a:xfrm>
           <a:prstGeom prst="rect">
             <a:avLst/>
@@ -15580,8 +16539,8 @@
         </p:nvSpPr>
         <p:spPr>
           <a:xfrm>
-            <a:off x="2697480" y="1005840"/>
-            <a:ext cx="9174175" cy="731520"/>
+            <a:off x="5349240" y="1005840"/>
+            <a:ext cx="6522415" cy="731520"/>
           </a:xfrm>
           <a:prstGeom prst="rect">
             <a:avLst/>
@@ -15607,7 +16566,7 @@
                 <a:ea typeface="Times New Roman" pitchFamily="34" charset="-122"/>
                 <a:cs typeface="Times New Roman" pitchFamily="34" charset="-120"/>
               </a:rPr>
-              <a:t>Remediation</a:t>
+              <a:t>3. Ozone Layer Depletion</a:t>
             </a:r>
             <a:endParaRPr lang="en-US" sz="3600" dirty="0"/>
           </a:p>
@@ -15621,8 +16580,47 @@
         </p:nvSpPr>
         <p:spPr>
           <a:xfrm>
-            <a:off x="2697480" y="1783080"/>
-            <a:ext cx="9174175" cy="4663440"/>
+            <a:off x="5349240" y="1737360"/>
+            <a:ext cx="6522415" cy="457200"/>
+          </a:xfrm>
+          <a:prstGeom prst="rect">
+            <a:avLst/>
+          </a:prstGeom>
+          <a:noFill/>
+          <a:ln/>
+        </p:spPr>
+        <p:txBody>
+          <a:bodyPr wrap="square" lIns="0" tIns="0" rIns="0" bIns="0" rtlCol="0" anchor="ctr"/>
+          <a:lstStyle/>
+          <a:p>
+            <a:pPr algn="l" indent="0" marL="0">
+              <a:buNone/>
+            </a:pPr>
+            <a:r>
+              <a:rPr lang="en-US" sz="3200" b="1" dirty="0">
+                <a:solidFill>
+                  <a:srgbClr val="990011"/>
+                </a:solidFill>
+                <a:latin typeface="Times New Roman" pitchFamily="34" charset="0"/>
+                <a:ea typeface="Times New Roman" pitchFamily="34" charset="-122"/>
+                <a:cs typeface="Times New Roman" pitchFamily="34" charset="-120"/>
+              </a:rPr>
+              <a:t>D) Solutions (continued)</a:t>
+            </a:r>
+            <a:endParaRPr lang="en-US" sz="3200" dirty="0"/>
+          </a:p>
+        </p:txBody>
+      </p:sp>
+      <p:sp>
+        <p:nvSpPr>
+          <p:cNvPr id="6" name="Text 3"/>
+          <p:cNvSpPr/>
+          <p:nvPr/>
+        </p:nvSpPr>
+        <p:spPr>
+          <a:xfrm>
+            <a:off x="5349240" y="2240280"/>
+            <a:ext cx="6522415" cy="4206240"/>
           </a:xfrm>
           <a:prstGeom prst="rect">
             <a:avLst/>
@@ -15649,18 +16647,13 @@
                 <a:ea typeface="Times New Roman" pitchFamily="34" charset="-122"/>
                 <a:cs typeface="Times New Roman" pitchFamily="34" charset="-120"/>
               </a:rPr>
-              <a:t>Fill in the blanks:</a:t>
-            </a:r>
-            <a:endParaRPr lang="en-US" sz="4000" dirty="0"/>
-          </a:p>
-          <a:p>
-            <a:pPr algn="l" marL="342900" indent="-342900">
+              <a:t>Ozone-friendly products: </a:t>
+            </a:r>
+            <a:pPr algn="l" indent="0" marL="0">
               <a:spcAft>
                 <a:spcPts val="800"/>
               </a:spcAft>
-              <a:buSzPct val="100000"/>
-              <a:buFont typeface="+mj-lt"/>
-              <a:buAutoNum type="arabicPeriod" startAt="1"/>
+              <a:buNone/>
             </a:pPr>
             <a:r>
               <a:rPr lang="en-US" sz="4000" dirty="0">
@@ -15671,51 +16664,7 @@
                 <a:ea typeface="Times New Roman" pitchFamily="34" charset="-122"/>
                 <a:cs typeface="Times New Roman" pitchFamily="34" charset="-120"/>
               </a:rPr>
-              <a:t>The layer of air around the Earth is the ______.</a:t>
-            </a:r>
-            <a:endParaRPr lang="en-US" sz="4000" dirty="0"/>
-          </a:p>
-          <a:p>
-            <a:pPr algn="l" marL="342900" indent="-342900">
-              <a:spcAft>
-                <a:spcPts val="800"/>
-              </a:spcAft>
-              <a:buSzPct val="100000"/>
-              <a:buFont typeface="+mj-lt"/>
-              <a:buAutoNum type="arabicPeriod" startAt="1"/>
-            </a:pPr>
-            <a:r>
-              <a:rPr lang="en-US" sz="4000" dirty="0">
-                <a:solidFill>
-                  <a:srgbClr val="111111"/>
-                </a:solidFill>
-                <a:latin typeface="Times New Roman" pitchFamily="34" charset="0"/>
-                <a:ea typeface="Times New Roman" pitchFamily="34" charset="-122"/>
-                <a:cs typeface="Times New Roman" pitchFamily="34" charset="-120"/>
-              </a:rPr>
-              <a:t>Clouds and rain form in the ______.</a:t>
-            </a:r>
-            <a:endParaRPr lang="en-US" sz="4000" dirty="0"/>
-          </a:p>
-          <a:p>
-            <a:pPr algn="l" marL="342900" indent="-342900">
-              <a:spcAft>
-                <a:spcPts val="800"/>
-              </a:spcAft>
-              <a:buSzPct val="100000"/>
-              <a:buFont typeface="+mj-lt"/>
-              <a:buAutoNum type="arabicPeriod" startAt="1"/>
-            </a:pPr>
-            <a:r>
-              <a:rPr lang="en-US" sz="4000" dirty="0">
-                <a:solidFill>
-                  <a:srgbClr val="111111"/>
-                </a:solidFill>
-                <a:latin typeface="Times New Roman" pitchFamily="34" charset="0"/>
-                <a:ea typeface="Times New Roman" pitchFamily="34" charset="-122"/>
-                <a:cs typeface="Times New Roman" pitchFamily="34" charset="-120"/>
-              </a:rPr>
-              <a:t>The ozone layer is in the ______.</a:t>
+              <a:t>People should buy products labelled "CFC-free".</a:t>
             </a:r>
             <a:endParaRPr lang="en-US" sz="4000" dirty="0"/>
           </a:p>
@@ -15827,7 +16776,7 @@
                 <a:ea typeface="Calibri" pitchFamily="34" charset="-122"/>
                 <a:cs typeface="Calibri" pitchFamily="34" charset="-120"/>
               </a:rPr>
-              <a:t>HOMEWORK</a:t>
+              <a:t>FORMATIVE EVALUATION</a:t>
             </a:r>
             <a:endParaRPr lang="en-US" sz="1400" dirty="0"/>
           </a:p>
@@ -15892,7 +16841,7 @@
                 <a:ea typeface="Times New Roman" pitchFamily="34" charset="-122"/>
                 <a:cs typeface="Times New Roman" pitchFamily="34" charset="-120"/>
               </a:rPr>
-              <a:t>Homework</a:t>
+              <a:t>Evaluation 1</a:t>
             </a:r>
             <a:endParaRPr lang="en-US" sz="3600" dirty="0"/>
           </a:p>
@@ -15934,7 +16883,7 @@
                 <a:ea typeface="Times New Roman" pitchFamily="34" charset="-122"/>
                 <a:cs typeface="Times New Roman" pitchFamily="34" charset="-120"/>
               </a:rPr>
-              <a:t>Distinguish weather from climate.</a:t>
+              <a:t>In which layer does the weather happen?</a:t>
             </a:r>
             <a:endParaRPr lang="en-US" sz="4000" dirty="0"/>
           </a:p>
@@ -16046,7 +16995,7 @@
                 <a:ea typeface="Calibri" pitchFamily="34" charset="-122"/>
                 <a:cs typeface="Calibri" pitchFamily="34" charset="-120"/>
               </a:rPr>
-              <a:t>NEXT LESSON</a:t>
+              <a:t>FORMATIVE EVALUATION</a:t>
             </a:r>
             <a:endParaRPr lang="en-US" sz="1400" dirty="0"/>
           </a:p>
@@ -16111,7 +17060,7 @@
                 <a:ea typeface="Times New Roman" pitchFamily="34" charset="-122"/>
                 <a:cs typeface="Times New Roman" pitchFamily="34" charset="-120"/>
               </a:rPr>
-              <a:t>Next Lesson</a:t>
+              <a:t>Expected Answer</a:t>
             </a:r>
             <a:endParaRPr lang="en-US" sz="3600" dirty="0"/>
           </a:p>
@@ -16135,17 +17084,17 @@
           <a:ln/>
         </p:spPr>
         <p:txBody>
-          <a:bodyPr wrap="square" lIns="0" tIns="0" rIns="0" bIns="0" rtlCol="0" anchor="ctr"/>
-          <a:lstStyle/>
-          <a:p>
-            <a:pPr algn="ctr" indent="0" marL="0">
+          <a:bodyPr wrap="square" lIns="0" tIns="0" rIns="0" bIns="0" rtlCol="0" anchor="t"/>
+          <a:lstStyle/>
+          <a:p>
+            <a:pPr algn="l" indent="0" marL="0">
               <a:spcAft>
                 <a:spcPts val="800"/>
               </a:spcAft>
               <a:buNone/>
             </a:pPr>
             <a:r>
-              <a:rPr lang="en-US" sz="4000" b="1" dirty="0">
+              <a:rPr lang="en-US" sz="4000" dirty="0">
                 <a:solidFill>
                   <a:srgbClr val="111111"/>
                 </a:solidFill>
@@ -16153,27 +17102,7 @@
                 <a:ea typeface="Times New Roman" pitchFamily="34" charset="-122"/>
                 <a:cs typeface="Times New Roman" pitchFamily="34" charset="-120"/>
               </a:rPr>
-              <a:t>Our next lesson will be on:</a:t>
-            </a:r>
-            <a:endParaRPr lang="en-US" sz="4000" dirty="0"/>
-          </a:p>
-          <a:p>
-            <a:pPr algn="ctr" indent="0" marL="0">
-              <a:spcAft>
-                <a:spcPts val="800"/>
-              </a:spcAft>
-              <a:buNone/>
-            </a:pPr>
-            <a:r>
-              <a:rPr lang="en-US" sz="4000" b="1" dirty="0">
-                <a:solidFill>
-                  <a:srgbClr val="990011"/>
-                </a:solidFill>
-                <a:latin typeface="Times New Roman" pitchFamily="34" charset="0"/>
-                <a:ea typeface="Times New Roman" pitchFamily="34" charset="-122"/>
-                <a:cs typeface="Times New Roman" pitchFamily="34" charset="-120"/>
-              </a:rPr>
-              <a:t>Lesson 31: Weather and Climate</a:t>
+              <a:t>In the troposphere.</a:t>
             </a:r>
             <a:endParaRPr lang="en-US" sz="4000" dirty="0"/>
           </a:p>
@@ -16285,6 +17214,1406 @@
                 <a:ea typeface="Calibri" pitchFamily="34" charset="-122"/>
                 <a:cs typeface="Calibri" pitchFamily="34" charset="-120"/>
               </a:rPr>
+              <a:t>FORMATIVE EVALUATION</a:t>
+            </a:r>
+            <a:endParaRPr lang="en-US" sz="1400" dirty="0"/>
+          </a:p>
+        </p:txBody>
+      </p:sp>
+      <p:pic>
+        <p:nvPicPr>
+          <p:cNvPr id="3" name="Image 0" descr="/home/claude/f4/img/minesec_sheet.png">    </p:cNvPr>
+          <p:cNvPicPr>
+            <a:picLocks noChangeAspect="1"/>
+          </p:cNvPicPr>
+          <p:nvPr/>
+        </p:nvPicPr>
+        <p:blipFill>
+          <a:blip r:embed="rId1"/>
+          <a:stretch>
+            <a:fillRect/>
+          </a:stretch>
+        </p:blipFill>
+        <p:spPr>
+          <a:xfrm>
+            <a:off x="0" y="658368"/>
+            <a:ext cx="5120640" cy="5833872"/>
+          </a:xfrm>
+          <a:prstGeom prst="rect">
+            <a:avLst/>
+          </a:prstGeom>
+        </p:spPr>
+      </p:pic>
+      <p:sp>
+        <p:nvSpPr>
+          <p:cNvPr id="4" name="Text 1"/>
+          <p:cNvSpPr/>
+          <p:nvPr/>
+        </p:nvSpPr>
+        <p:spPr>
+          <a:xfrm>
+            <a:off x="5349240" y="1005840"/>
+            <a:ext cx="6522415" cy="731520"/>
+          </a:xfrm>
+          <a:prstGeom prst="rect">
+            <a:avLst/>
+          </a:prstGeom>
+          <a:noFill/>
+          <a:ln/>
+        </p:spPr>
+        <p:txBody>
+          <a:bodyPr wrap="square" lIns="0" tIns="0" rIns="0" bIns="0" rtlCol="0" anchor="ctr">
+            <a:normAutofit/>
+          </a:bodyPr>
+          <a:lstStyle/>
+          <a:p>
+            <a:pPr algn="ctr" indent="0" marL="0">
+              <a:buNone/>
+            </a:pPr>
+            <a:r>
+              <a:rPr lang="en-US" sz="3600" b="1" dirty="0">
+                <a:solidFill>
+                  <a:srgbClr val="990011"/>
+                </a:solidFill>
+                <a:latin typeface="Times New Roman" pitchFamily="34" charset="0"/>
+                <a:ea typeface="Times New Roman" pitchFamily="34" charset="-122"/>
+                <a:cs typeface="Times New Roman" pitchFamily="34" charset="-120"/>
+              </a:rPr>
+              <a:t>Evaluation 2</a:t>
+            </a:r>
+            <a:endParaRPr lang="en-US" sz="3600" dirty="0"/>
+          </a:p>
+        </p:txBody>
+      </p:sp>
+      <p:sp>
+        <p:nvSpPr>
+          <p:cNvPr id="5" name="Text 2"/>
+          <p:cNvSpPr/>
+          <p:nvPr/>
+        </p:nvSpPr>
+        <p:spPr>
+          <a:xfrm>
+            <a:off x="5349240" y="1783080"/>
+            <a:ext cx="6522415" cy="4663440"/>
+          </a:xfrm>
+          <a:prstGeom prst="rect">
+            <a:avLst/>
+          </a:prstGeom>
+          <a:noFill/>
+          <a:ln/>
+        </p:spPr>
+        <p:txBody>
+          <a:bodyPr wrap="square" lIns="0" tIns="0" rIns="0" bIns="0" rtlCol="0" anchor="t"/>
+          <a:lstStyle/>
+          <a:p>
+            <a:pPr algn="l" indent="0" marL="0">
+              <a:spcAft>
+                <a:spcPts val="800"/>
+              </a:spcAft>
+              <a:buNone/>
+            </a:pPr>
+            <a:r>
+              <a:rPr lang="en-US" sz="4000" dirty="0">
+                <a:solidFill>
+                  <a:srgbClr val="111111"/>
+                </a:solidFill>
+                <a:latin typeface="Times New Roman" pitchFamily="34" charset="0"/>
+                <a:ea typeface="Times New Roman" pitchFamily="34" charset="-122"/>
+                <a:cs typeface="Times New Roman" pitchFamily="34" charset="-120"/>
+              </a:rPr>
+              <a:t>What is the role of the ozone layer?</a:t>
+            </a:r>
+            <a:endParaRPr lang="en-US" sz="4000" dirty="0"/>
+          </a:p>
+        </p:txBody>
+      </p:sp>
+      <p:sp>
+        <p:nvSpPr>
+          <p:cNvPr id="25" name="Slide Number Placeholder 0"/>
+          <p:cNvSpPr>
+            <a:spLocks noGrp="1"/>
+          </p:cNvSpPr>
+          <p:nvPr>
+            <p:ph type="sldNum" sz="quarter" idx="4294967295"/>
+          </p:nvPr>
+        </p:nvSpPr>
+        <p:spPr>
+          <a:xfrm>
+            <a:off x="27432" y="91440"/>
+            <a:ext cx="585216" cy="475488"/>
+          </a:xfrm>
+          <a:prstGeom prst="rect">
+            <a:avLst/>
+          </a:prstGeom>
+          <a:extLst>
+            <a:ext uri="{C572A759-6A51-4108-AA02-DFA0A04FC94B}">
+              <ma14:wrappingTextBoxFlag xmlns:ma14="http://schemas.microsoft.com/office/mac/drawingml/2011/main" val="0"/>
+            </a:ext>
+          </a:extLst>
+        </p:spPr>
+        <p:txBody>
+          <a:bodyPr/>
+          <a:lstStyle>
+            <a:lvl1pPr>
+              <a:defRPr sz="2000">
+                <a:solidFill>
+                  <a:srgbClr val="FFFFFF"/>
+                </a:solidFill>
+                <a:latin typeface="Calibri"/>
+                <a:ea typeface="Calibri"/>
+                <a:cs typeface="Calibri"/>
+              </a:defRPr>
+            </a:lvl1pPr>
+          </a:lstStyle>
+          <a:p>
+            <a:pPr algn="ctr"/>
+            <a:fld id="{F7021451-1387-4CA6-816F-3879F97B5CBC}" type="slidenum">
+              <a:rPr b="1" lang="en-US"/>
+              <a:t>45</a:t>
+            </a:fld>
+            <a:endParaRPr lang="en-US"/>
+          </a:p>
+        </p:txBody>
+      </p:sp>
+    </p:spTree>
+  </p:cSld>
+  <p:clrMapOvr>
+    <a:masterClrMapping/>
+  </p:clrMapOvr>
+</p:sld>
+</file>
+
+<file path=ppt/slides/slide46.xml><?xml version="1.0" encoding="utf-8"?>
+<p:sld xmlns:a="http://schemas.openxmlformats.org/drawingml/2006/main" xmlns:r="http://schemas.openxmlformats.org/officeDocument/2006/relationships" xmlns:p="http://schemas.openxmlformats.org/presentationml/2006/main">
+  <p:cSld name="Slide 46">
+    <p:spTree>
+      <p:nvGrpSpPr>
+        <p:cNvPr id="1" name=""/>
+        <p:cNvGrpSpPr/>
+        <p:nvPr/>
+      </p:nvGrpSpPr>
+      <p:grpSpPr>
+        <a:xfrm>
+          <a:off x="0" y="0"/>
+          <a:ext cx="0" cy="0"/>
+          <a:chOff x="0" y="0"/>
+          <a:chExt cx="0" cy="0"/>
+        </a:xfrm>
+      </p:grpSpPr>
+      <p:sp>
+        <p:nvSpPr>
+          <p:cNvPr id="2" name="Text 0"/>
+          <p:cNvSpPr/>
+          <p:nvPr/>
+        </p:nvSpPr>
+        <p:spPr>
+          <a:xfrm>
+            <a:off x="457200" y="713232"/>
+            <a:ext cx="11368735" cy="274320"/>
+          </a:xfrm>
+          <a:prstGeom prst="rect">
+            <a:avLst/>
+          </a:prstGeom>
+          <a:noFill/>
+          <a:ln/>
+        </p:spPr>
+        <p:txBody>
+          <a:bodyPr wrap="square" lIns="0" tIns="0" rIns="0" bIns="0" rtlCol="0" anchor="ctr"/>
+          <a:lstStyle/>
+          <a:p>
+            <a:pPr algn="r" indent="0" marL="0">
+              <a:buNone/>
+            </a:pPr>
+            <a:r>
+              <a:rPr lang="en-US" sz="1400" b="1" dirty="0">
+                <a:solidFill>
+                  <a:srgbClr val="1C3F6E"/>
+                </a:solidFill>
+                <a:latin typeface="Calibri" pitchFamily="34" charset="0"/>
+                <a:ea typeface="Calibri" pitchFamily="34" charset="-122"/>
+                <a:cs typeface="Calibri" pitchFamily="34" charset="-120"/>
+              </a:rPr>
+              <a:t>FORMATIVE EVALUATION</a:t>
+            </a:r>
+            <a:endParaRPr lang="en-US" sz="1400" dirty="0"/>
+          </a:p>
+        </p:txBody>
+      </p:sp>
+      <p:pic>
+        <p:nvPicPr>
+          <p:cNvPr id="3" name="Image 0" descr="/home/claude/f4/img/minesec_sheet.png">    </p:cNvPr>
+          <p:cNvPicPr>
+            <a:picLocks noChangeAspect="1"/>
+          </p:cNvPicPr>
+          <p:nvPr/>
+        </p:nvPicPr>
+        <p:blipFill>
+          <a:blip r:embed="rId1"/>
+          <a:stretch>
+            <a:fillRect/>
+          </a:stretch>
+        </p:blipFill>
+        <p:spPr>
+          <a:xfrm>
+            <a:off x="0" y="658368"/>
+            <a:ext cx="5120640" cy="5833872"/>
+          </a:xfrm>
+          <a:prstGeom prst="rect">
+            <a:avLst/>
+          </a:prstGeom>
+        </p:spPr>
+      </p:pic>
+      <p:sp>
+        <p:nvSpPr>
+          <p:cNvPr id="4" name="Text 1"/>
+          <p:cNvSpPr/>
+          <p:nvPr/>
+        </p:nvSpPr>
+        <p:spPr>
+          <a:xfrm>
+            <a:off x="5349240" y="1005840"/>
+            <a:ext cx="6522415" cy="731520"/>
+          </a:xfrm>
+          <a:prstGeom prst="rect">
+            <a:avLst/>
+          </a:prstGeom>
+          <a:noFill/>
+          <a:ln/>
+        </p:spPr>
+        <p:txBody>
+          <a:bodyPr wrap="square" lIns="0" tIns="0" rIns="0" bIns="0" rtlCol="0" anchor="ctr">
+            <a:normAutofit/>
+          </a:bodyPr>
+          <a:lstStyle/>
+          <a:p>
+            <a:pPr algn="ctr" indent="0" marL="0">
+              <a:buNone/>
+            </a:pPr>
+            <a:r>
+              <a:rPr lang="en-US" sz="3600" b="1" dirty="0">
+                <a:solidFill>
+                  <a:srgbClr val="990011"/>
+                </a:solidFill>
+                <a:latin typeface="Times New Roman" pitchFamily="34" charset="0"/>
+                <a:ea typeface="Times New Roman" pitchFamily="34" charset="-122"/>
+                <a:cs typeface="Times New Roman" pitchFamily="34" charset="-120"/>
+              </a:rPr>
+              <a:t>Expected Answer</a:t>
+            </a:r>
+            <a:endParaRPr lang="en-US" sz="3600" dirty="0"/>
+          </a:p>
+        </p:txBody>
+      </p:sp>
+      <p:sp>
+        <p:nvSpPr>
+          <p:cNvPr id="5" name="Text 2"/>
+          <p:cNvSpPr/>
+          <p:nvPr/>
+        </p:nvSpPr>
+        <p:spPr>
+          <a:xfrm>
+            <a:off x="5349240" y="1783080"/>
+            <a:ext cx="6522415" cy="4663440"/>
+          </a:xfrm>
+          <a:prstGeom prst="rect">
+            <a:avLst/>
+          </a:prstGeom>
+          <a:noFill/>
+          <a:ln/>
+        </p:spPr>
+        <p:txBody>
+          <a:bodyPr wrap="square" lIns="0" tIns="0" rIns="0" bIns="0" rtlCol="0" anchor="t"/>
+          <a:lstStyle/>
+          <a:p>
+            <a:pPr algn="l" indent="0" marL="0">
+              <a:spcAft>
+                <a:spcPts val="800"/>
+              </a:spcAft>
+              <a:buNone/>
+            </a:pPr>
+            <a:r>
+              <a:rPr lang="en-US" sz="4000" dirty="0">
+                <a:solidFill>
+                  <a:srgbClr val="111111"/>
+                </a:solidFill>
+                <a:latin typeface="Times New Roman" pitchFamily="34" charset="0"/>
+                <a:ea typeface="Times New Roman" pitchFamily="34" charset="-122"/>
+                <a:cs typeface="Times New Roman" pitchFamily="34" charset="-120"/>
+              </a:rPr>
+              <a:t>It stops harmful rays from the Sun.</a:t>
+            </a:r>
+            <a:endParaRPr lang="en-US" sz="4000" dirty="0"/>
+          </a:p>
+        </p:txBody>
+      </p:sp>
+      <p:sp>
+        <p:nvSpPr>
+          <p:cNvPr id="25" name="Slide Number Placeholder 0"/>
+          <p:cNvSpPr>
+            <a:spLocks noGrp="1"/>
+          </p:cNvSpPr>
+          <p:nvPr>
+            <p:ph type="sldNum" sz="quarter" idx="4294967295"/>
+          </p:nvPr>
+        </p:nvSpPr>
+        <p:spPr>
+          <a:xfrm>
+            <a:off x="27432" y="91440"/>
+            <a:ext cx="585216" cy="475488"/>
+          </a:xfrm>
+          <a:prstGeom prst="rect">
+            <a:avLst/>
+          </a:prstGeom>
+          <a:extLst>
+            <a:ext uri="{C572A759-6A51-4108-AA02-DFA0A04FC94B}">
+              <ma14:wrappingTextBoxFlag xmlns:ma14="http://schemas.microsoft.com/office/mac/drawingml/2011/main" val="0"/>
+            </a:ext>
+          </a:extLst>
+        </p:spPr>
+        <p:txBody>
+          <a:bodyPr/>
+          <a:lstStyle>
+            <a:lvl1pPr>
+              <a:defRPr sz="2000">
+                <a:solidFill>
+                  <a:srgbClr val="FFFFFF"/>
+                </a:solidFill>
+                <a:latin typeface="Calibri"/>
+                <a:ea typeface="Calibri"/>
+                <a:cs typeface="Calibri"/>
+              </a:defRPr>
+            </a:lvl1pPr>
+          </a:lstStyle>
+          <a:p>
+            <a:pPr algn="ctr"/>
+            <a:fld id="{F7021451-1387-4CA6-816F-3879F97B5CBC}" type="slidenum">
+              <a:rPr b="1" lang="en-US"/>
+              <a:t>46</a:t>
+            </a:fld>
+            <a:endParaRPr lang="en-US"/>
+          </a:p>
+        </p:txBody>
+      </p:sp>
+    </p:spTree>
+  </p:cSld>
+  <p:clrMapOvr>
+    <a:masterClrMapping/>
+  </p:clrMapOvr>
+</p:sld>
+</file>
+
+<file path=ppt/slides/slide47.xml><?xml version="1.0" encoding="utf-8"?>
+<p:sld xmlns:a="http://schemas.openxmlformats.org/drawingml/2006/main" xmlns:r="http://schemas.openxmlformats.org/officeDocument/2006/relationships" xmlns:p="http://schemas.openxmlformats.org/presentationml/2006/main">
+  <p:cSld name="Slide 47">
+    <p:spTree>
+      <p:nvGrpSpPr>
+        <p:cNvPr id="1" name=""/>
+        <p:cNvGrpSpPr/>
+        <p:nvPr/>
+      </p:nvGrpSpPr>
+      <p:grpSpPr>
+        <a:xfrm>
+          <a:off x="0" y="0"/>
+          <a:ext cx="0" cy="0"/>
+          <a:chOff x="0" y="0"/>
+          <a:chExt cx="0" cy="0"/>
+        </a:xfrm>
+      </p:grpSpPr>
+      <p:sp>
+        <p:nvSpPr>
+          <p:cNvPr id="2" name="Text 0"/>
+          <p:cNvSpPr/>
+          <p:nvPr/>
+        </p:nvSpPr>
+        <p:spPr>
+          <a:xfrm>
+            <a:off x="457200" y="713232"/>
+            <a:ext cx="11368735" cy="274320"/>
+          </a:xfrm>
+          <a:prstGeom prst="rect">
+            <a:avLst/>
+          </a:prstGeom>
+          <a:noFill/>
+          <a:ln/>
+        </p:spPr>
+        <p:txBody>
+          <a:bodyPr wrap="square" lIns="0" tIns="0" rIns="0" bIns="0" rtlCol="0" anchor="ctr"/>
+          <a:lstStyle/>
+          <a:p>
+            <a:pPr algn="r" indent="0" marL="0">
+              <a:buNone/>
+            </a:pPr>
+            <a:r>
+              <a:rPr lang="en-US" sz="1400" b="1" dirty="0">
+                <a:solidFill>
+                  <a:srgbClr val="1C3F6E"/>
+                </a:solidFill>
+                <a:latin typeface="Calibri" pitchFamily="34" charset="0"/>
+                <a:ea typeface="Calibri" pitchFamily="34" charset="-122"/>
+                <a:cs typeface="Calibri" pitchFamily="34" charset="-120"/>
+              </a:rPr>
+              <a:t>REMEDIATION</a:t>
+            </a:r>
+            <a:endParaRPr lang="en-US" sz="1400" dirty="0"/>
+          </a:p>
+        </p:txBody>
+      </p:sp>
+      <p:pic>
+        <p:nvPicPr>
+          <p:cNvPr id="3" name="Image 0" descr="/home/claude/f4/img/minesec_sheet.png">    </p:cNvPr>
+          <p:cNvPicPr>
+            <a:picLocks noChangeAspect="1"/>
+          </p:cNvPicPr>
+          <p:nvPr/>
+        </p:nvPicPr>
+        <p:blipFill>
+          <a:blip r:embed="rId1"/>
+          <a:stretch>
+            <a:fillRect/>
+          </a:stretch>
+        </p:blipFill>
+        <p:spPr>
+          <a:xfrm>
+            <a:off x="0" y="658368"/>
+            <a:ext cx="2468880" cy="5833872"/>
+          </a:xfrm>
+          <a:prstGeom prst="rect">
+            <a:avLst/>
+          </a:prstGeom>
+        </p:spPr>
+      </p:pic>
+      <p:sp>
+        <p:nvSpPr>
+          <p:cNvPr id="4" name="Text 1"/>
+          <p:cNvSpPr/>
+          <p:nvPr/>
+        </p:nvSpPr>
+        <p:spPr>
+          <a:xfrm>
+            <a:off x="2697480" y="1005840"/>
+            <a:ext cx="9174175" cy="731520"/>
+          </a:xfrm>
+          <a:prstGeom prst="rect">
+            <a:avLst/>
+          </a:prstGeom>
+          <a:noFill/>
+          <a:ln/>
+        </p:spPr>
+        <p:txBody>
+          <a:bodyPr wrap="square" lIns="0" tIns="0" rIns="0" bIns="0" rtlCol="0" anchor="ctr">
+            <a:normAutofit/>
+          </a:bodyPr>
+          <a:lstStyle/>
+          <a:p>
+            <a:pPr algn="ctr" indent="0" marL="0">
+              <a:buNone/>
+            </a:pPr>
+            <a:r>
+              <a:rPr lang="en-US" sz="3600" b="1" dirty="0">
+                <a:solidFill>
+                  <a:srgbClr val="990011"/>
+                </a:solidFill>
+                <a:latin typeface="Times New Roman" pitchFamily="34" charset="0"/>
+                <a:ea typeface="Times New Roman" pitchFamily="34" charset="-122"/>
+                <a:cs typeface="Times New Roman" pitchFamily="34" charset="-120"/>
+              </a:rPr>
+              <a:t>Remediation</a:t>
+            </a:r>
+            <a:endParaRPr lang="en-US" sz="3600" dirty="0"/>
+          </a:p>
+        </p:txBody>
+      </p:sp>
+      <p:sp>
+        <p:nvSpPr>
+          <p:cNvPr id="5" name="Text 2"/>
+          <p:cNvSpPr/>
+          <p:nvPr/>
+        </p:nvSpPr>
+        <p:spPr>
+          <a:xfrm>
+            <a:off x="2697480" y="1783080"/>
+            <a:ext cx="9174175" cy="4663440"/>
+          </a:xfrm>
+          <a:prstGeom prst="rect">
+            <a:avLst/>
+          </a:prstGeom>
+          <a:noFill/>
+          <a:ln/>
+        </p:spPr>
+        <p:txBody>
+          <a:bodyPr wrap="square" lIns="0" tIns="0" rIns="0" bIns="0" rtlCol="0" anchor="t"/>
+          <a:lstStyle/>
+          <a:p>
+            <a:pPr algn="l" indent="0" marL="0">
+              <a:spcAft>
+                <a:spcPts val="800"/>
+              </a:spcAft>
+              <a:buNone/>
+            </a:pPr>
+            <a:r>
+              <a:rPr lang="en-US" sz="4000" b="1" dirty="0">
+                <a:solidFill>
+                  <a:srgbClr val="111111"/>
+                </a:solidFill>
+                <a:latin typeface="Times New Roman" pitchFamily="34" charset="0"/>
+                <a:ea typeface="Times New Roman" pitchFamily="34" charset="-122"/>
+                <a:cs typeface="Times New Roman" pitchFamily="34" charset="-120"/>
+              </a:rPr>
+              <a:t>Fill in the blanks:</a:t>
+            </a:r>
+            <a:endParaRPr lang="en-US" sz="4000" dirty="0"/>
+          </a:p>
+          <a:p>
+            <a:pPr algn="l" marL="342900" indent="-342900">
+              <a:spcAft>
+                <a:spcPts val="800"/>
+              </a:spcAft>
+              <a:buSzPct val="100000"/>
+              <a:buFont typeface="+mj-lt"/>
+              <a:buAutoNum type="arabicPeriod" startAt="1"/>
+            </a:pPr>
+            <a:r>
+              <a:rPr lang="en-US" sz="4000" dirty="0">
+                <a:solidFill>
+                  <a:srgbClr val="111111"/>
+                </a:solidFill>
+                <a:latin typeface="Times New Roman" pitchFamily="34" charset="0"/>
+                <a:ea typeface="Times New Roman" pitchFamily="34" charset="-122"/>
+                <a:cs typeface="Times New Roman" pitchFamily="34" charset="-120"/>
+              </a:rPr>
+              <a:t>The layer of air around the Earth is the ______.</a:t>
+            </a:r>
+            <a:endParaRPr lang="en-US" sz="4000" dirty="0"/>
+          </a:p>
+          <a:p>
+            <a:pPr algn="l" marL="342900" indent="-342900">
+              <a:spcAft>
+                <a:spcPts val="800"/>
+              </a:spcAft>
+              <a:buSzPct val="100000"/>
+              <a:buFont typeface="+mj-lt"/>
+              <a:buAutoNum type="arabicPeriod" startAt="1"/>
+            </a:pPr>
+            <a:r>
+              <a:rPr lang="en-US" sz="4000" dirty="0">
+                <a:solidFill>
+                  <a:srgbClr val="111111"/>
+                </a:solidFill>
+                <a:latin typeface="Times New Roman" pitchFamily="34" charset="0"/>
+                <a:ea typeface="Times New Roman" pitchFamily="34" charset="-122"/>
+                <a:cs typeface="Times New Roman" pitchFamily="34" charset="-120"/>
+              </a:rPr>
+              <a:t>Clouds and rain form in the ______.</a:t>
+            </a:r>
+            <a:endParaRPr lang="en-US" sz="4000" dirty="0"/>
+          </a:p>
+          <a:p>
+            <a:pPr algn="l" marL="342900" indent="-342900">
+              <a:spcAft>
+                <a:spcPts val="800"/>
+              </a:spcAft>
+              <a:buSzPct val="100000"/>
+              <a:buFont typeface="+mj-lt"/>
+              <a:buAutoNum type="arabicPeriod" startAt="1"/>
+            </a:pPr>
+            <a:r>
+              <a:rPr lang="en-US" sz="4000" dirty="0">
+                <a:solidFill>
+                  <a:srgbClr val="111111"/>
+                </a:solidFill>
+                <a:latin typeface="Times New Roman" pitchFamily="34" charset="0"/>
+                <a:ea typeface="Times New Roman" pitchFamily="34" charset="-122"/>
+                <a:cs typeface="Times New Roman" pitchFamily="34" charset="-120"/>
+              </a:rPr>
+              <a:t>The ozone layer is in the ______.</a:t>
+            </a:r>
+            <a:endParaRPr lang="en-US" sz="4000" dirty="0"/>
+          </a:p>
+        </p:txBody>
+      </p:sp>
+      <p:sp>
+        <p:nvSpPr>
+          <p:cNvPr id="25" name="Slide Number Placeholder 0"/>
+          <p:cNvSpPr>
+            <a:spLocks noGrp="1"/>
+          </p:cNvSpPr>
+          <p:nvPr>
+            <p:ph type="sldNum" sz="quarter" idx="4294967295"/>
+          </p:nvPr>
+        </p:nvSpPr>
+        <p:spPr>
+          <a:xfrm>
+            <a:off x="27432" y="91440"/>
+            <a:ext cx="585216" cy="475488"/>
+          </a:xfrm>
+          <a:prstGeom prst="rect">
+            <a:avLst/>
+          </a:prstGeom>
+          <a:extLst>
+            <a:ext uri="{C572A759-6A51-4108-AA02-DFA0A04FC94B}">
+              <ma14:wrappingTextBoxFlag xmlns:ma14="http://schemas.microsoft.com/office/mac/drawingml/2011/main" val="0"/>
+            </a:ext>
+          </a:extLst>
+        </p:spPr>
+        <p:txBody>
+          <a:bodyPr/>
+          <a:lstStyle>
+            <a:lvl1pPr>
+              <a:defRPr sz="2000">
+                <a:solidFill>
+                  <a:srgbClr val="FFFFFF"/>
+                </a:solidFill>
+                <a:latin typeface="Calibri"/>
+                <a:ea typeface="Calibri"/>
+                <a:cs typeface="Calibri"/>
+              </a:defRPr>
+            </a:lvl1pPr>
+          </a:lstStyle>
+          <a:p>
+            <a:pPr algn="ctr"/>
+            <a:fld id="{F7021451-1387-4CA6-816F-3879F97B5CBC}" type="slidenum">
+              <a:rPr b="1" lang="en-US"/>
+              <a:t>47</a:t>
+            </a:fld>
+            <a:endParaRPr lang="en-US"/>
+          </a:p>
+        </p:txBody>
+      </p:sp>
+    </p:spTree>
+  </p:cSld>
+  <p:clrMapOvr>
+    <a:masterClrMapping/>
+  </p:clrMapOvr>
+</p:sld>
+</file>
+
+<file path=ppt/slides/slide48.xml><?xml version="1.0" encoding="utf-8"?>
+<p:sld xmlns:a="http://schemas.openxmlformats.org/drawingml/2006/main" xmlns:r="http://schemas.openxmlformats.org/officeDocument/2006/relationships" xmlns:p="http://schemas.openxmlformats.org/presentationml/2006/main">
+  <p:cSld name="Slide 48">
+    <p:spTree>
+      <p:nvGrpSpPr>
+        <p:cNvPr id="1" name=""/>
+        <p:cNvGrpSpPr/>
+        <p:nvPr/>
+      </p:nvGrpSpPr>
+      <p:grpSpPr>
+        <a:xfrm>
+          <a:off x="0" y="0"/>
+          <a:ext cx="0" cy="0"/>
+          <a:chOff x="0" y="0"/>
+          <a:chExt cx="0" cy="0"/>
+        </a:xfrm>
+      </p:grpSpPr>
+      <p:sp>
+        <p:nvSpPr>
+          <p:cNvPr id="2" name="Text 0"/>
+          <p:cNvSpPr/>
+          <p:nvPr/>
+        </p:nvSpPr>
+        <p:spPr>
+          <a:xfrm>
+            <a:off x="457200" y="713232"/>
+            <a:ext cx="11368735" cy="274320"/>
+          </a:xfrm>
+          <a:prstGeom prst="rect">
+            <a:avLst/>
+          </a:prstGeom>
+          <a:noFill/>
+          <a:ln/>
+        </p:spPr>
+        <p:txBody>
+          <a:bodyPr wrap="square" lIns="0" tIns="0" rIns="0" bIns="0" rtlCol="0" anchor="ctr"/>
+          <a:lstStyle/>
+          <a:p>
+            <a:pPr algn="r" indent="0" marL="0">
+              <a:buNone/>
+            </a:pPr>
+            <a:r>
+              <a:rPr lang="en-US" sz="1400" b="1" dirty="0">
+                <a:solidFill>
+                  <a:srgbClr val="1C3F6E"/>
+                </a:solidFill>
+                <a:latin typeface="Calibri" pitchFamily="34" charset="0"/>
+                <a:ea typeface="Calibri" pitchFamily="34" charset="-122"/>
+                <a:cs typeface="Calibri" pitchFamily="34" charset="-120"/>
+              </a:rPr>
+              <a:t>HOMEWORK</a:t>
+            </a:r>
+            <a:endParaRPr lang="en-US" sz="1400" dirty="0"/>
+          </a:p>
+        </p:txBody>
+      </p:sp>
+      <p:pic>
+        <p:nvPicPr>
+          <p:cNvPr id="3" name="Image 0" descr="/home/claude/f4/img/minesec_sheet.png">    </p:cNvPr>
+          <p:cNvPicPr>
+            <a:picLocks noChangeAspect="1"/>
+          </p:cNvPicPr>
+          <p:nvPr/>
+        </p:nvPicPr>
+        <p:blipFill>
+          <a:blip r:embed="rId1"/>
+          <a:stretch>
+            <a:fillRect/>
+          </a:stretch>
+        </p:blipFill>
+        <p:spPr>
+          <a:xfrm>
+            <a:off x="0" y="658368"/>
+            <a:ext cx="5120640" cy="5833872"/>
+          </a:xfrm>
+          <a:prstGeom prst="rect">
+            <a:avLst/>
+          </a:prstGeom>
+        </p:spPr>
+      </p:pic>
+      <p:sp>
+        <p:nvSpPr>
+          <p:cNvPr id="4" name="Text 1"/>
+          <p:cNvSpPr/>
+          <p:nvPr/>
+        </p:nvSpPr>
+        <p:spPr>
+          <a:xfrm>
+            <a:off x="5349240" y="1005840"/>
+            <a:ext cx="6522415" cy="731520"/>
+          </a:xfrm>
+          <a:prstGeom prst="rect">
+            <a:avLst/>
+          </a:prstGeom>
+          <a:noFill/>
+          <a:ln/>
+        </p:spPr>
+        <p:txBody>
+          <a:bodyPr wrap="square" lIns="0" tIns="0" rIns="0" bIns="0" rtlCol="0" anchor="ctr">
+            <a:normAutofit/>
+          </a:bodyPr>
+          <a:lstStyle/>
+          <a:p>
+            <a:pPr algn="ctr" indent="0" marL="0">
+              <a:buNone/>
+            </a:pPr>
+            <a:r>
+              <a:rPr lang="en-US" sz="3600" b="1" dirty="0">
+                <a:solidFill>
+                  <a:srgbClr val="990011"/>
+                </a:solidFill>
+                <a:latin typeface="Times New Roman" pitchFamily="34" charset="0"/>
+                <a:ea typeface="Times New Roman" pitchFamily="34" charset="-122"/>
+                <a:cs typeface="Times New Roman" pitchFamily="34" charset="-120"/>
+              </a:rPr>
+              <a:t>Homework</a:t>
+            </a:r>
+            <a:endParaRPr lang="en-US" sz="3600" dirty="0"/>
+          </a:p>
+        </p:txBody>
+      </p:sp>
+      <p:sp>
+        <p:nvSpPr>
+          <p:cNvPr id="5" name="Text 2"/>
+          <p:cNvSpPr/>
+          <p:nvPr/>
+        </p:nvSpPr>
+        <p:spPr>
+          <a:xfrm>
+            <a:off x="5349240" y="1783080"/>
+            <a:ext cx="6522415" cy="4663440"/>
+          </a:xfrm>
+          <a:prstGeom prst="rect">
+            <a:avLst/>
+          </a:prstGeom>
+          <a:noFill/>
+          <a:ln/>
+        </p:spPr>
+        <p:txBody>
+          <a:bodyPr wrap="square" lIns="0" tIns="0" rIns="0" bIns="0" rtlCol="0" anchor="t"/>
+          <a:lstStyle/>
+          <a:p>
+            <a:pPr algn="l" indent="0" marL="0">
+              <a:spcAft>
+                <a:spcPts val="800"/>
+              </a:spcAft>
+              <a:buNone/>
+            </a:pPr>
+            <a:r>
+              <a:rPr lang="en-US" sz="4000" dirty="0">
+                <a:solidFill>
+                  <a:srgbClr val="111111"/>
+                </a:solidFill>
+                <a:latin typeface="Times New Roman" pitchFamily="34" charset="0"/>
+                <a:ea typeface="Times New Roman" pitchFamily="34" charset="-122"/>
+                <a:cs typeface="Times New Roman" pitchFamily="34" charset="-120"/>
+              </a:rPr>
+              <a:t>Distinguish weather from climate.</a:t>
+            </a:r>
+            <a:endParaRPr lang="en-US" sz="4000" dirty="0"/>
+          </a:p>
+        </p:txBody>
+      </p:sp>
+      <p:sp>
+        <p:nvSpPr>
+          <p:cNvPr id="25" name="Slide Number Placeholder 0"/>
+          <p:cNvSpPr>
+            <a:spLocks noGrp="1"/>
+          </p:cNvSpPr>
+          <p:nvPr>
+            <p:ph type="sldNum" sz="quarter" idx="4294967295"/>
+          </p:nvPr>
+        </p:nvSpPr>
+        <p:spPr>
+          <a:xfrm>
+            <a:off x="27432" y="91440"/>
+            <a:ext cx="585216" cy="475488"/>
+          </a:xfrm>
+          <a:prstGeom prst="rect">
+            <a:avLst/>
+          </a:prstGeom>
+          <a:extLst>
+            <a:ext uri="{C572A759-6A51-4108-AA02-DFA0A04FC94B}">
+              <ma14:wrappingTextBoxFlag xmlns:ma14="http://schemas.microsoft.com/office/mac/drawingml/2011/main" val="0"/>
+            </a:ext>
+          </a:extLst>
+        </p:spPr>
+        <p:txBody>
+          <a:bodyPr/>
+          <a:lstStyle>
+            <a:lvl1pPr>
+              <a:defRPr sz="2000">
+                <a:solidFill>
+                  <a:srgbClr val="FFFFFF"/>
+                </a:solidFill>
+                <a:latin typeface="Calibri"/>
+                <a:ea typeface="Calibri"/>
+                <a:cs typeface="Calibri"/>
+              </a:defRPr>
+            </a:lvl1pPr>
+          </a:lstStyle>
+          <a:p>
+            <a:pPr algn="ctr"/>
+            <a:fld id="{F7021451-1387-4CA6-816F-3879F97B5CBC}" type="slidenum">
+              <a:rPr b="1" lang="en-US"/>
+              <a:t>48</a:t>
+            </a:fld>
+            <a:endParaRPr lang="en-US"/>
+          </a:p>
+        </p:txBody>
+      </p:sp>
+    </p:spTree>
+  </p:cSld>
+  <p:clrMapOvr>
+    <a:masterClrMapping/>
+  </p:clrMapOvr>
+</p:sld>
+</file>
+
+<file path=ppt/slides/slide49.xml><?xml version="1.0" encoding="utf-8"?>
+<p:sld xmlns:a="http://schemas.openxmlformats.org/drawingml/2006/main" xmlns:r="http://schemas.openxmlformats.org/officeDocument/2006/relationships" xmlns:p="http://schemas.openxmlformats.org/presentationml/2006/main">
+  <p:cSld name="Slide 49">
+    <p:spTree>
+      <p:nvGrpSpPr>
+        <p:cNvPr id="1" name=""/>
+        <p:cNvGrpSpPr/>
+        <p:nvPr/>
+      </p:nvGrpSpPr>
+      <p:grpSpPr>
+        <a:xfrm>
+          <a:off x="0" y="0"/>
+          <a:ext cx="0" cy="0"/>
+          <a:chOff x="0" y="0"/>
+          <a:chExt cx="0" cy="0"/>
+        </a:xfrm>
+      </p:grpSpPr>
+      <p:sp>
+        <p:nvSpPr>
+          <p:cNvPr id="2" name="Text 0"/>
+          <p:cNvSpPr/>
+          <p:nvPr/>
+        </p:nvSpPr>
+        <p:spPr>
+          <a:xfrm>
+            <a:off x="457200" y="713232"/>
+            <a:ext cx="11368735" cy="274320"/>
+          </a:xfrm>
+          <a:prstGeom prst="rect">
+            <a:avLst/>
+          </a:prstGeom>
+          <a:noFill/>
+          <a:ln/>
+        </p:spPr>
+        <p:txBody>
+          <a:bodyPr wrap="square" lIns="0" tIns="0" rIns="0" bIns="0" rtlCol="0" anchor="ctr"/>
+          <a:lstStyle/>
+          <a:p>
+            <a:pPr algn="r" indent="0" marL="0">
+              <a:buNone/>
+            </a:pPr>
+            <a:r>
+              <a:rPr lang="en-US" sz="1400" b="1" dirty="0">
+                <a:solidFill>
+                  <a:srgbClr val="1C3F6E"/>
+                </a:solidFill>
+                <a:latin typeface="Calibri" pitchFamily="34" charset="0"/>
+                <a:ea typeface="Calibri" pitchFamily="34" charset="-122"/>
+                <a:cs typeface="Calibri" pitchFamily="34" charset="-120"/>
+              </a:rPr>
+              <a:t>NEXT LESSON</a:t>
+            </a:r>
+            <a:endParaRPr lang="en-US" sz="1400" dirty="0"/>
+          </a:p>
+        </p:txBody>
+      </p:sp>
+      <p:pic>
+        <p:nvPicPr>
+          <p:cNvPr id="3" name="Image 0" descr="/home/claude/f4/img/minesec_sheet.png">    </p:cNvPr>
+          <p:cNvPicPr>
+            <a:picLocks noChangeAspect="1"/>
+          </p:cNvPicPr>
+          <p:nvPr/>
+        </p:nvPicPr>
+        <p:blipFill>
+          <a:blip r:embed="rId1"/>
+          <a:stretch>
+            <a:fillRect/>
+          </a:stretch>
+        </p:blipFill>
+        <p:spPr>
+          <a:xfrm>
+            <a:off x="0" y="658368"/>
+            <a:ext cx="5120640" cy="5833872"/>
+          </a:xfrm>
+          <a:prstGeom prst="rect">
+            <a:avLst/>
+          </a:prstGeom>
+        </p:spPr>
+      </p:pic>
+      <p:sp>
+        <p:nvSpPr>
+          <p:cNvPr id="4" name="Text 1"/>
+          <p:cNvSpPr/>
+          <p:nvPr/>
+        </p:nvSpPr>
+        <p:spPr>
+          <a:xfrm>
+            <a:off x="5349240" y="1005840"/>
+            <a:ext cx="6522415" cy="731520"/>
+          </a:xfrm>
+          <a:prstGeom prst="rect">
+            <a:avLst/>
+          </a:prstGeom>
+          <a:noFill/>
+          <a:ln/>
+        </p:spPr>
+        <p:txBody>
+          <a:bodyPr wrap="square" lIns="0" tIns="0" rIns="0" bIns="0" rtlCol="0" anchor="ctr">
+            <a:normAutofit/>
+          </a:bodyPr>
+          <a:lstStyle/>
+          <a:p>
+            <a:pPr algn="ctr" indent="0" marL="0">
+              <a:buNone/>
+            </a:pPr>
+            <a:r>
+              <a:rPr lang="en-US" sz="3600" b="1" dirty="0">
+                <a:solidFill>
+                  <a:srgbClr val="990011"/>
+                </a:solidFill>
+                <a:latin typeface="Times New Roman" pitchFamily="34" charset="0"/>
+                <a:ea typeface="Times New Roman" pitchFamily="34" charset="-122"/>
+                <a:cs typeface="Times New Roman" pitchFamily="34" charset="-120"/>
+              </a:rPr>
+              <a:t>Next Lesson</a:t>
+            </a:r>
+            <a:endParaRPr lang="en-US" sz="3600" dirty="0"/>
+          </a:p>
+        </p:txBody>
+      </p:sp>
+      <p:sp>
+        <p:nvSpPr>
+          <p:cNvPr id="5" name="Text 2"/>
+          <p:cNvSpPr/>
+          <p:nvPr/>
+        </p:nvSpPr>
+        <p:spPr>
+          <a:xfrm>
+            <a:off x="5349240" y="1783080"/>
+            <a:ext cx="6522415" cy="4663440"/>
+          </a:xfrm>
+          <a:prstGeom prst="rect">
+            <a:avLst/>
+          </a:prstGeom>
+          <a:noFill/>
+          <a:ln/>
+        </p:spPr>
+        <p:txBody>
+          <a:bodyPr wrap="square" lIns="0" tIns="0" rIns="0" bIns="0" rtlCol="0" anchor="ctr"/>
+          <a:lstStyle/>
+          <a:p>
+            <a:pPr algn="ctr" indent="0" marL="0">
+              <a:spcAft>
+                <a:spcPts val="800"/>
+              </a:spcAft>
+              <a:buNone/>
+            </a:pPr>
+            <a:r>
+              <a:rPr lang="en-US" sz="4000" b="1" dirty="0">
+                <a:solidFill>
+                  <a:srgbClr val="111111"/>
+                </a:solidFill>
+                <a:latin typeface="Times New Roman" pitchFamily="34" charset="0"/>
+                <a:ea typeface="Times New Roman" pitchFamily="34" charset="-122"/>
+                <a:cs typeface="Times New Roman" pitchFamily="34" charset="-120"/>
+              </a:rPr>
+              <a:t>Our next lesson will be on:</a:t>
+            </a:r>
+            <a:endParaRPr lang="en-US" sz="4000" dirty="0"/>
+          </a:p>
+          <a:p>
+            <a:pPr algn="ctr" indent="0" marL="0">
+              <a:spcAft>
+                <a:spcPts val="800"/>
+              </a:spcAft>
+              <a:buNone/>
+            </a:pPr>
+            <a:r>
+              <a:rPr lang="en-US" sz="4000" b="1" dirty="0">
+                <a:solidFill>
+                  <a:srgbClr val="990011"/>
+                </a:solidFill>
+                <a:latin typeface="Times New Roman" pitchFamily="34" charset="0"/>
+                <a:ea typeface="Times New Roman" pitchFamily="34" charset="-122"/>
+                <a:cs typeface="Times New Roman" pitchFamily="34" charset="-120"/>
+              </a:rPr>
+              <a:t>Lesson 31: Weather and Climate</a:t>
+            </a:r>
+            <a:endParaRPr lang="en-US" sz="4000" dirty="0"/>
+          </a:p>
+        </p:txBody>
+      </p:sp>
+      <p:sp>
+        <p:nvSpPr>
+          <p:cNvPr id="25" name="Slide Number Placeholder 0"/>
+          <p:cNvSpPr>
+            <a:spLocks noGrp="1"/>
+          </p:cNvSpPr>
+          <p:nvPr>
+            <p:ph type="sldNum" sz="quarter" idx="4294967295"/>
+          </p:nvPr>
+        </p:nvSpPr>
+        <p:spPr>
+          <a:xfrm>
+            <a:off x="27432" y="91440"/>
+            <a:ext cx="585216" cy="475488"/>
+          </a:xfrm>
+          <a:prstGeom prst="rect">
+            <a:avLst/>
+          </a:prstGeom>
+          <a:extLst>
+            <a:ext uri="{C572A759-6A51-4108-AA02-DFA0A04FC94B}">
+              <ma14:wrappingTextBoxFlag xmlns:ma14="http://schemas.microsoft.com/office/mac/drawingml/2011/main" val="0"/>
+            </a:ext>
+          </a:extLst>
+        </p:spPr>
+        <p:txBody>
+          <a:bodyPr/>
+          <a:lstStyle>
+            <a:lvl1pPr>
+              <a:defRPr sz="2000">
+                <a:solidFill>
+                  <a:srgbClr val="FFFFFF"/>
+                </a:solidFill>
+                <a:latin typeface="Calibri"/>
+                <a:ea typeface="Calibri"/>
+                <a:cs typeface="Calibri"/>
+              </a:defRPr>
+            </a:lvl1pPr>
+          </a:lstStyle>
+          <a:p>
+            <a:pPr algn="ctr"/>
+            <a:fld id="{F7021451-1387-4CA6-816F-3879F97B5CBC}" type="slidenum">
+              <a:rPr b="1" lang="en-US"/>
+              <a:t>49</a:t>
+            </a:fld>
+            <a:endParaRPr lang="en-US"/>
+          </a:p>
+        </p:txBody>
+      </p:sp>
+    </p:spTree>
+  </p:cSld>
+  <p:clrMapOvr>
+    <a:masterClrMapping/>
+  </p:clrMapOvr>
+</p:sld>
+</file>
+
+<file path=ppt/slides/slide5.xml><?xml version="1.0" encoding="utf-8"?>
+<p:sld xmlns:a="http://schemas.openxmlformats.org/drawingml/2006/main" xmlns:r="http://schemas.openxmlformats.org/officeDocument/2006/relationships" xmlns:p="http://schemas.openxmlformats.org/presentationml/2006/main">
+  <p:cSld name="Slide 5">
+    <p:spTree>
+      <p:nvGrpSpPr>
+        <p:cNvPr id="1" name=""/>
+        <p:cNvGrpSpPr/>
+        <p:nvPr/>
+      </p:nvGrpSpPr>
+      <p:grpSpPr>
+        <a:xfrm>
+          <a:off x="0" y="0"/>
+          <a:ext cx="0" cy="0"/>
+          <a:chOff x="0" y="0"/>
+          <a:chExt cx="0" cy="0"/>
+        </a:xfrm>
+      </p:grpSpPr>
+      <p:sp>
+        <p:nvSpPr>
+          <p:cNvPr id="2" name="Text 0"/>
+          <p:cNvSpPr/>
+          <p:nvPr/>
+        </p:nvSpPr>
+        <p:spPr>
+          <a:xfrm>
+            <a:off x="457200" y="713232"/>
+            <a:ext cx="11368735" cy="274320"/>
+          </a:xfrm>
+          <a:prstGeom prst="rect">
+            <a:avLst/>
+          </a:prstGeom>
+          <a:noFill/>
+          <a:ln/>
+        </p:spPr>
+        <p:txBody>
+          <a:bodyPr wrap="square" lIns="0" tIns="0" rIns="0" bIns="0" rtlCol="0" anchor="ctr"/>
+          <a:lstStyle/>
+          <a:p>
+            <a:pPr algn="r" indent="0" marL="0">
+              <a:buNone/>
+            </a:pPr>
+            <a:r>
+              <a:rPr lang="en-US" sz="1400" b="1" dirty="0">
+                <a:solidFill>
+                  <a:srgbClr val="1C3F6E"/>
+                </a:solidFill>
+                <a:latin typeface="Calibri" pitchFamily="34" charset="0"/>
+                <a:ea typeface="Calibri" pitchFamily="34" charset="-122"/>
+                <a:cs typeface="Calibri" pitchFamily="34" charset="-120"/>
+              </a:rPr>
+              <a:t>HOMEWORK CORRECTION</a:t>
+            </a:r>
+            <a:endParaRPr lang="en-US" sz="1400" dirty="0"/>
+          </a:p>
+        </p:txBody>
+      </p:sp>
+      <p:pic>
+        <p:nvPicPr>
+          <p:cNvPr id="3" name="Image 0" descr="/home/claude/f4/img/minesec_sheet.png">    </p:cNvPr>
+          <p:cNvPicPr>
+            <a:picLocks noChangeAspect="1"/>
+          </p:cNvPicPr>
+          <p:nvPr/>
+        </p:nvPicPr>
+        <p:blipFill>
+          <a:blip r:embed="rId1"/>
+          <a:stretch>
+            <a:fillRect/>
+          </a:stretch>
+        </p:blipFill>
+        <p:spPr>
+          <a:xfrm>
+            <a:off x="0" y="658368"/>
+            <a:ext cx="5120640" cy="5833872"/>
+          </a:xfrm>
+          <a:prstGeom prst="rect">
+            <a:avLst/>
+          </a:prstGeom>
+        </p:spPr>
+      </p:pic>
+      <p:sp>
+        <p:nvSpPr>
+          <p:cNvPr id="4" name="Text 1"/>
+          <p:cNvSpPr/>
+          <p:nvPr/>
+        </p:nvSpPr>
+        <p:spPr>
+          <a:xfrm>
+            <a:off x="5349240" y="1005840"/>
+            <a:ext cx="6522415" cy="731520"/>
+          </a:xfrm>
+          <a:prstGeom prst="rect">
+            <a:avLst/>
+          </a:prstGeom>
+          <a:noFill/>
+          <a:ln/>
+        </p:spPr>
+        <p:txBody>
+          <a:bodyPr wrap="square" lIns="0" tIns="0" rIns="0" bIns="0" rtlCol="0" anchor="ctr">
+            <a:normAutofit/>
+          </a:bodyPr>
+          <a:lstStyle/>
+          <a:p>
+            <a:pPr algn="ctr" indent="0" marL="0">
+              <a:buNone/>
+            </a:pPr>
+            <a:r>
+              <a:rPr lang="en-US" sz="3600" b="1" dirty="0">
+                <a:solidFill>
+                  <a:srgbClr val="990011"/>
+                </a:solidFill>
+                <a:latin typeface="Times New Roman" pitchFamily="34" charset="0"/>
+                <a:ea typeface="Times New Roman" pitchFamily="34" charset="-122"/>
+                <a:cs typeface="Times New Roman" pitchFamily="34" charset="-120"/>
+              </a:rPr>
+              <a:t>Correction: Possible Answer</a:t>
+            </a:r>
+            <a:endParaRPr lang="en-US" sz="3600" dirty="0"/>
+          </a:p>
+        </p:txBody>
+      </p:sp>
+      <p:sp>
+        <p:nvSpPr>
+          <p:cNvPr id="5" name="Text 2"/>
+          <p:cNvSpPr/>
+          <p:nvPr/>
+        </p:nvSpPr>
+        <p:spPr>
+          <a:xfrm>
+            <a:off x="5349240" y="1783080"/>
+            <a:ext cx="6522415" cy="4663440"/>
+          </a:xfrm>
+          <a:prstGeom prst="rect">
+            <a:avLst/>
+          </a:prstGeom>
+          <a:noFill/>
+          <a:ln/>
+        </p:spPr>
+        <p:txBody>
+          <a:bodyPr wrap="square" lIns="0" tIns="0" rIns="0" bIns="0" rtlCol="0" anchor="t"/>
+          <a:lstStyle/>
+          <a:p>
+            <a:pPr algn="l" indent="0" marL="0">
+              <a:spcAft>
+                <a:spcPts val="800"/>
+              </a:spcAft>
+              <a:buNone/>
+            </a:pPr>
+            <a:r>
+              <a:rPr lang="en-US" sz="4000" dirty="0">
+                <a:solidFill>
+                  <a:srgbClr val="111111"/>
+                </a:solidFill>
+                <a:latin typeface="Times New Roman" pitchFamily="34" charset="0"/>
+                <a:ea typeface="Times New Roman" pitchFamily="34" charset="-122"/>
+                <a:cs typeface="Times New Roman" pitchFamily="34" charset="-120"/>
+              </a:rPr>
+              <a:t>The troposphere, the stratosphere, the mesosphere and the thermosphere.</a:t>
+            </a:r>
+            <a:endParaRPr lang="en-US" sz="4000" dirty="0"/>
+          </a:p>
+        </p:txBody>
+      </p:sp>
+      <p:sp>
+        <p:nvSpPr>
+          <p:cNvPr id="25" name="Slide Number Placeholder 0"/>
+          <p:cNvSpPr>
+            <a:spLocks noGrp="1"/>
+          </p:cNvSpPr>
+          <p:nvPr>
+            <p:ph type="sldNum" sz="quarter" idx="4294967295"/>
+          </p:nvPr>
+        </p:nvSpPr>
+        <p:spPr>
+          <a:xfrm>
+            <a:off x="27432" y="91440"/>
+            <a:ext cx="585216" cy="475488"/>
+          </a:xfrm>
+          <a:prstGeom prst="rect">
+            <a:avLst/>
+          </a:prstGeom>
+          <a:extLst>
+            <a:ext uri="{C572A759-6A51-4108-AA02-DFA0A04FC94B}">
+              <ma14:wrappingTextBoxFlag xmlns:ma14="http://schemas.microsoft.com/office/mac/drawingml/2011/main" val="0"/>
+            </a:ext>
+          </a:extLst>
+        </p:spPr>
+        <p:txBody>
+          <a:bodyPr/>
+          <a:lstStyle>
+            <a:lvl1pPr>
+              <a:defRPr sz="2000">
+                <a:solidFill>
+                  <a:srgbClr val="FFFFFF"/>
+                </a:solidFill>
+                <a:latin typeface="Calibri"/>
+                <a:ea typeface="Calibri"/>
+                <a:cs typeface="Calibri"/>
+              </a:defRPr>
+            </a:lvl1pPr>
+          </a:lstStyle>
+          <a:p>
+            <a:pPr algn="ctr"/>
+            <a:fld id="{F7021451-1387-4CA6-816F-3879F97B5CBC}" type="slidenum">
+              <a:rPr b="1" lang="en-US"/>
+              <a:t>5</a:t>
+            </a:fld>
+            <a:endParaRPr lang="en-US"/>
+          </a:p>
+        </p:txBody>
+      </p:sp>
+    </p:spTree>
+  </p:cSld>
+  <p:clrMapOvr>
+    <a:masterClrMapping/>
+  </p:clrMapOvr>
+</p:sld>
+</file>
+
+<file path=ppt/slides/slide50.xml><?xml version="1.0" encoding="utf-8"?>
+<p:sld xmlns:a="http://schemas.openxmlformats.org/drawingml/2006/main" xmlns:r="http://schemas.openxmlformats.org/officeDocument/2006/relationships" xmlns:p="http://schemas.openxmlformats.org/presentationml/2006/main">
+  <p:cSld name="Slide 50">
+    <p:spTree>
+      <p:nvGrpSpPr>
+        <p:cNvPr id="1" name=""/>
+        <p:cNvGrpSpPr/>
+        <p:nvPr/>
+      </p:nvGrpSpPr>
+      <p:grpSpPr>
+        <a:xfrm>
+          <a:off x="0" y="0"/>
+          <a:ext cx="0" cy="0"/>
+          <a:chOff x="0" y="0"/>
+          <a:chExt cx="0" cy="0"/>
+        </a:xfrm>
+      </p:grpSpPr>
+      <p:sp>
+        <p:nvSpPr>
+          <p:cNvPr id="2" name="Text 0"/>
+          <p:cNvSpPr/>
+          <p:nvPr/>
+        </p:nvSpPr>
+        <p:spPr>
+          <a:xfrm>
+            <a:off x="457200" y="713232"/>
+            <a:ext cx="11368735" cy="274320"/>
+          </a:xfrm>
+          <a:prstGeom prst="rect">
+            <a:avLst/>
+          </a:prstGeom>
+          <a:noFill/>
+          <a:ln/>
+        </p:spPr>
+        <p:txBody>
+          <a:bodyPr wrap="square" lIns="0" tIns="0" rIns="0" bIns="0" rtlCol="0" anchor="ctr"/>
+          <a:lstStyle/>
+          <a:p>
+            <a:pPr algn="r" indent="0" marL="0">
+              <a:buNone/>
+            </a:pPr>
+            <a:r>
+              <a:rPr lang="en-US" sz="1400" b="1" dirty="0">
+                <a:solidFill>
+                  <a:srgbClr val="1C3F6E"/>
+                </a:solidFill>
+                <a:latin typeface="Calibri" pitchFamily="34" charset="0"/>
+                <a:ea typeface="Calibri" pitchFamily="34" charset="-122"/>
+                <a:cs typeface="Calibri" pitchFamily="34" charset="-120"/>
+              </a:rPr>
               <a:t>BILINGUAL GAME</a:t>
             </a:r>
             <a:endParaRPr lang="en-US" sz="1400" dirty="0"/>
@@ -16332,7 +18661,7 @@
       </p:sp>
       <p:graphicFrame>
         <p:nvGraphicFramePr>
-          <p:cNvPr id="46" name="Table 0"/>
+          <p:cNvPr id="51" name="Table 0"/>
           <p:cNvGraphicFramePr>
             <a:graphicFrameLocks noGrp="1"/>
           </p:cNvGraphicFramePr>
@@ -17644,7 +19973,7 @@
             <a:pPr algn="ctr"/>
             <a:fld id="{F7021451-1387-4CA6-816F-3879F97B5CBC}" type="slidenum">
               <a:rPr b="1" lang="en-US"/>
-              <a:t>45</a:t>
+              <a:t>50</a:t>
             </a:fld>
             <a:endParaRPr lang="en-US"/>
           </a:p>
@@ -17658,9 +19987,9 @@
 </p:sld>
 </file>
 
-<file path=ppt/slides/slide46.xml><?xml version="1.0" encoding="utf-8"?>
+<file path=ppt/slides/slide51.xml><?xml version="1.0" encoding="utf-8"?>
 <p:sld xmlns:a="http://schemas.openxmlformats.org/drawingml/2006/main" xmlns:r="http://schemas.openxmlformats.org/officeDocument/2006/relationships" xmlns:p="http://schemas.openxmlformats.org/presentationml/2006/main">
-  <p:cSld name="Slide 46">
+  <p:cSld name="Slide 51">
     <p:spTree>
       <p:nvGrpSpPr>
         <p:cNvPr id="1" name=""/>
@@ -17755,7 +20084,7 @@
       </p:sp>
       <p:graphicFrame>
         <p:nvGraphicFramePr>
-          <p:cNvPr id="47" name="Table 0"/>
+          <p:cNvPr id="52" name="Table 0"/>
           <p:cNvGraphicFramePr>
             <a:graphicFrameLocks noGrp="1"/>
           </p:cNvGraphicFramePr>
@@ -18377,7 +20706,7 @@
             <a:pPr algn="ctr"/>
             <a:fld id="{F7021451-1387-4CA6-816F-3879F97B5CBC}" type="slidenum">
               <a:rPr b="1" lang="en-US"/>
-              <a:t>46</a:t>
+              <a:t>51</a:t>
             </a:fld>
             <a:endParaRPr lang="en-US"/>
           </a:p>
@@ -18391,9 +20720,9 @@
 </p:sld>
 </file>
 
-<file path=ppt/slides/slide47.xml><?xml version="1.0" encoding="utf-8"?>
+<file path=ppt/slides/slide52.xml><?xml version="1.0" encoding="utf-8"?>
 <p:sld xmlns:a="http://schemas.openxmlformats.org/drawingml/2006/main" xmlns:r="http://schemas.openxmlformats.org/officeDocument/2006/relationships" xmlns:p="http://schemas.openxmlformats.org/presentationml/2006/main">
-  <p:cSld name="Slide 47">
+  <p:cSld name="Slide 52">
     <p:spTree>
       <p:nvGrpSpPr>
         <p:cNvPr id="1" name=""/>
@@ -18488,7 +20817,7 @@
       </p:sp>
       <p:graphicFrame>
         <p:nvGraphicFramePr>
-          <p:cNvPr id="48" name="Table 0"/>
+          <p:cNvPr id="53" name="Table 0"/>
           <p:cNvGraphicFramePr>
             <a:graphicFrameLocks noGrp="1"/>
           </p:cNvGraphicFramePr>
@@ -18598,7 +20927,7 @@
                           <a:ea typeface="Calibri" pitchFamily="34" charset="-122"/>
                           <a:cs typeface="Calibri" pitchFamily="34" charset="-120"/>
                         </a:rPr>
-                        <a:t>DEFINITIONS; Structure of the Atmosphere; Thermal Structure in the Troposphere and the Stratosphere; Ozone Layer Depletion.</a:t>
+                        <a:t>DEFINITIONS; Structure of the Atmosphere; Thermal Structure in the Troposphere and the Stratosphere; Causes; Effects on People; Effects on Nature; Solutions.</a:t>
                       </a:r>
                       <a:endParaRPr lang="en-US" sz="1600" dirty="0">
                         <a:latin typeface="Calibri" charset="0"/>
@@ -19248,7 +21577,7 @@
             <a:pPr algn="ctr"/>
             <a:fld id="{F7021451-1387-4CA6-816F-3879F97B5CBC}" type="slidenum">
               <a:rPr b="1" lang="en-US"/>
-              <a:t>47</a:t>
+              <a:t>52</a:t>
             </a:fld>
             <a:endParaRPr lang="en-US"/>
           </a:p>
@@ -19262,9 +21591,9 @@
 </p:sld>
 </file>
 
-<file path=ppt/slides/slide48.xml><?xml version="1.0" encoding="utf-8"?>
+<file path=ppt/slides/slide53.xml><?xml version="1.0" encoding="utf-8"?>
 <p:sld xmlns:a="http://schemas.openxmlformats.org/drawingml/2006/main" xmlns:r="http://schemas.openxmlformats.org/officeDocument/2006/relationships" xmlns:p="http://schemas.openxmlformats.org/presentationml/2006/main">
-  <p:cSld name="Slide 48">
+  <p:cSld name="Slide 53">
     <p:spTree>
       <p:nvGrpSpPr>
         <p:cNvPr id="1" name=""/>
@@ -19531,7 +21860,7 @@
             <a:pPr algn="ctr"/>
             <a:fld id="{F7021451-1387-4CA6-816F-3879F97B5CBC}" type="slidenum">
               <a:rPr b="1" lang="en-US"/>
-              <a:t>48</a:t>
+              <a:t>53</a:t>
             </a:fld>
             <a:endParaRPr lang="en-US"/>
           </a:p>
@@ -19545,9 +21874,9 @@
 </p:sld>
 </file>
 
-<file path=ppt/slides/slide49.xml><?xml version="1.0" encoding="utf-8"?>
+<file path=ppt/slides/slide54.xml><?xml version="1.0" encoding="utf-8"?>
 <p:sld xmlns:a="http://schemas.openxmlformats.org/drawingml/2006/main" xmlns:r="http://schemas.openxmlformats.org/officeDocument/2006/relationships" xmlns:p="http://schemas.openxmlformats.org/presentationml/2006/main">
-  <p:cSld name="Slide 49">
+  <p:cSld name="Slide 54">
     <p:spTree>
       <p:nvGrpSpPr>
         <p:cNvPr id="1" name=""/>
@@ -19856,226 +22185,7 @@
             <a:pPr algn="ctr"/>
             <a:fld id="{F7021451-1387-4CA6-816F-3879F97B5CBC}" type="slidenum">
               <a:rPr b="1" lang="en-US"/>
-              <a:t>49</a:t>
-            </a:fld>
-            <a:endParaRPr lang="en-US"/>
-          </a:p>
-        </p:txBody>
-      </p:sp>
-    </p:spTree>
-  </p:cSld>
-  <p:clrMapOvr>
-    <a:masterClrMapping/>
-  </p:clrMapOvr>
-</p:sld>
-</file>
-
-<file path=ppt/slides/slide5.xml><?xml version="1.0" encoding="utf-8"?>
-<p:sld xmlns:a="http://schemas.openxmlformats.org/drawingml/2006/main" xmlns:r="http://schemas.openxmlformats.org/officeDocument/2006/relationships" xmlns:p="http://schemas.openxmlformats.org/presentationml/2006/main">
-  <p:cSld name="Slide 5">
-    <p:spTree>
-      <p:nvGrpSpPr>
-        <p:cNvPr id="1" name=""/>
-        <p:cNvGrpSpPr/>
-        <p:nvPr/>
-      </p:nvGrpSpPr>
-      <p:grpSpPr>
-        <a:xfrm>
-          <a:off x="0" y="0"/>
-          <a:ext cx="0" cy="0"/>
-          <a:chOff x="0" y="0"/>
-          <a:chExt cx="0" cy="0"/>
-        </a:xfrm>
-      </p:grpSpPr>
-      <p:sp>
-        <p:nvSpPr>
-          <p:cNvPr id="2" name="Text 0"/>
-          <p:cNvSpPr/>
-          <p:nvPr/>
-        </p:nvSpPr>
-        <p:spPr>
-          <a:xfrm>
-            <a:off x="457200" y="713232"/>
-            <a:ext cx="11368735" cy="274320"/>
-          </a:xfrm>
-          <a:prstGeom prst="rect">
-            <a:avLst/>
-          </a:prstGeom>
-          <a:noFill/>
-          <a:ln/>
-        </p:spPr>
-        <p:txBody>
-          <a:bodyPr wrap="square" lIns="0" tIns="0" rIns="0" bIns="0" rtlCol="0" anchor="ctr"/>
-          <a:lstStyle/>
-          <a:p>
-            <a:pPr algn="r" indent="0" marL="0">
-              <a:buNone/>
-            </a:pPr>
-            <a:r>
-              <a:rPr lang="en-US" sz="1400" b="1" dirty="0">
-                <a:solidFill>
-                  <a:srgbClr val="1C3F6E"/>
-                </a:solidFill>
-                <a:latin typeface="Calibri" pitchFamily="34" charset="0"/>
-                <a:ea typeface="Calibri" pitchFamily="34" charset="-122"/>
-                <a:cs typeface="Calibri" pitchFamily="34" charset="-120"/>
-              </a:rPr>
-              <a:t>HOMEWORK CORRECTION</a:t>
-            </a:r>
-            <a:endParaRPr lang="en-US" sz="1400" dirty="0"/>
-          </a:p>
-        </p:txBody>
-      </p:sp>
-      <p:pic>
-        <p:nvPicPr>
-          <p:cNvPr id="3" name="Image 0" descr="/home/claude/f4/img/minesec_sheet.png">    </p:cNvPr>
-          <p:cNvPicPr>
-            <a:picLocks noChangeAspect="1"/>
-          </p:cNvPicPr>
-          <p:nvPr/>
-        </p:nvPicPr>
-        <p:blipFill>
-          <a:blip r:embed="rId1"/>
-          <a:stretch>
-            <a:fillRect/>
-          </a:stretch>
-        </p:blipFill>
-        <p:spPr>
-          <a:xfrm>
-            <a:off x="0" y="658368"/>
-            <a:ext cx="5120640" cy="5833872"/>
-          </a:xfrm>
-          <a:prstGeom prst="rect">
-            <a:avLst/>
-          </a:prstGeom>
-        </p:spPr>
-      </p:pic>
-      <p:sp>
-        <p:nvSpPr>
-          <p:cNvPr id="4" name="Text 1"/>
-          <p:cNvSpPr/>
-          <p:nvPr/>
-        </p:nvSpPr>
-        <p:spPr>
-          <a:xfrm>
-            <a:off x="5349240" y="1005840"/>
-            <a:ext cx="6522415" cy="731520"/>
-          </a:xfrm>
-          <a:prstGeom prst="rect">
-            <a:avLst/>
-          </a:prstGeom>
-          <a:noFill/>
-          <a:ln/>
-        </p:spPr>
-        <p:txBody>
-          <a:bodyPr wrap="square" lIns="0" tIns="0" rIns="0" bIns="0" rtlCol="0" anchor="ctr">
-            <a:normAutofit/>
-          </a:bodyPr>
-          <a:lstStyle/>
-          <a:p>
-            <a:pPr algn="ctr" indent="0" marL="0">
-              <a:buNone/>
-            </a:pPr>
-            <a:r>
-              <a:rPr lang="en-US" sz="3600" b="1" dirty="0">
-                <a:solidFill>
-                  <a:srgbClr val="990011"/>
-                </a:solidFill>
-                <a:latin typeface="Times New Roman" pitchFamily="34" charset="0"/>
-                <a:ea typeface="Times New Roman" pitchFamily="34" charset="-122"/>
-                <a:cs typeface="Times New Roman" pitchFamily="34" charset="-120"/>
-              </a:rPr>
-              <a:t>Correction: Possible Answer</a:t>
-            </a:r>
-            <a:endParaRPr lang="en-US" sz="3600" dirty="0"/>
-          </a:p>
-        </p:txBody>
-      </p:sp>
-      <p:sp>
-        <p:nvSpPr>
-          <p:cNvPr id="5" name="Text 2"/>
-          <p:cNvSpPr/>
-          <p:nvPr/>
-        </p:nvSpPr>
-        <p:spPr>
-          <a:xfrm>
-            <a:off x="5349240" y="1783080"/>
-            <a:ext cx="6522415" cy="4663440"/>
-          </a:xfrm>
-          <a:prstGeom prst="rect">
-            <a:avLst/>
-          </a:prstGeom>
-          <a:noFill/>
-          <a:ln/>
-        </p:spPr>
-        <p:txBody>
-          <a:bodyPr wrap="square" lIns="0" tIns="0" rIns="0" bIns="0" rtlCol="0" anchor="t"/>
-          <a:lstStyle/>
-          <a:p>
-            <a:pPr algn="l" indent="0" marL="0">
-              <a:spcAft>
-                <a:spcPts val="800"/>
-              </a:spcAft>
-              <a:buNone/>
-            </a:pPr>
-            <a:r>
-              <a:rPr lang="en-US" sz="4000" dirty="0">
-                <a:solidFill>
-                  <a:srgbClr val="111111"/>
-                </a:solidFill>
-                <a:latin typeface="Times New Roman" pitchFamily="34" charset="0"/>
-                <a:ea typeface="Times New Roman" pitchFamily="34" charset="-122"/>
-                <a:cs typeface="Times New Roman" pitchFamily="34" charset="-120"/>
-              </a:rPr>
-              <a:t>The troposphere, the stratosphere, the mesosphere and the thermosphere.</a:t>
-            </a:r>
-            <a:endParaRPr lang="en-US" sz="4000" dirty="0"/>
-          </a:p>
-        </p:txBody>
-      </p:sp>
-      <p:sp>
-        <p:nvSpPr>
-          <p:cNvPr id="25" name="Slide Number Placeholder 0"/>
-          <p:cNvSpPr>
-            <a:spLocks noGrp="1"/>
-          </p:cNvSpPr>
-          <p:nvPr>
-            <p:ph type="sldNum" sz="quarter" idx="4294967295"/>
-          </p:nvPr>
-        </p:nvSpPr>
-        <p:spPr>
-          <a:xfrm>
-            <a:off x="27432" y="91440"/>
-            <a:ext cx="585216" cy="475488"/>
-          </a:xfrm>
-          <a:prstGeom prst="rect">
-            <a:avLst/>
-          </a:prstGeom>
-          <a:extLst>
-            <a:ext uri="{C572A759-6A51-4108-AA02-DFA0A04FC94B}">
-              <ma14:wrappingTextBoxFlag xmlns:ma14="http://schemas.microsoft.com/office/mac/drawingml/2011/main" val="0"/>
-            </a:ext>
-          </a:extLst>
-        </p:spPr>
-        <p:txBody>
-          <a:bodyPr/>
-          <a:lstStyle>
-            <a:lvl1pPr>
-              <a:defRPr sz="2000">
-                <a:solidFill>
-                  <a:srgbClr val="FFFFFF"/>
-                </a:solidFill>
-                <a:latin typeface="Calibri"/>
-                <a:ea typeface="Calibri"/>
-                <a:cs typeface="Calibri"/>
-              </a:defRPr>
-            </a:lvl1pPr>
-          </a:lstStyle>
-          <a:p>
-            <a:pPr algn="ctr"/>
-            <a:fld id="{F7021451-1387-4CA6-816F-3879F97B5CBC}" type="slidenum">
-              <a:rPr b="1" lang="en-US"/>
-              <a:t>5</a:t>
+              <a:t>54</a:t>
             </a:fld>
             <a:endParaRPr lang="en-US"/>
           </a:p>

--- a/lecons/F3/34_FORM4_LESSON30_The_Atmosphere.pptx
+++ b/lecons/F3/34_FORM4_LESSON30_The_Atmosphere.pptx
@@ -1787,7 +1787,7 @@
           <a:p>
             <a:r>
               <a:rPr lang="en-US" dirty="0"/>
-              <a:t>Activity 2. Look carefully at this diagram: the layers of the atmosphere. Observe every detail before I ask the question.</a:t>
+              <a:t>Activity 2. Look carefully at this picture: the layers of the atmosphere. Observe every detail before I ask the question.</a:t>
             </a:r>
             <a:endParaRPr lang="en-US" dirty="0"/>
           </a:p>
@@ -2843,7 +2843,7 @@
           <a:p>
             <a:r>
               <a:rPr lang="en-US" dirty="0"/>
-              <a:t>Let us copy Thermal Structure in the Troposphere and the Stratosphere. Temperature changes with height as follows. Copy the point on Troposphere on the left, then draw the diagram on the right: temperature and height. Give it a title and label it clearly.</a:t>
+              <a:t>Let us copy Thermal Structure in the Troposphere and the Stratosphere. Temperature changes with height as follows. Copy the point on Troposphere on the left, then draw the diagram on the right: temperature and height in the atmosphere. Give it a title and label it clearly.</a:t>
             </a:r>
             <a:endParaRPr lang="en-US" dirty="0"/>
           </a:p>
@@ -9841,7 +9841,7 @@
       </p:sp>
       <p:pic>
         <p:nvPicPr>
-          <p:cNvPr id="4" name="Image 0" descr="/home/claude/f4/img/v2/atmosphere_big.png">    </p:cNvPr>
+          <p:cNvPr id="4" name="Image 0" descr="/home/claude/f4/img/v2/atm_profile_gce.png">    </p:cNvPr>
           <p:cNvPicPr>
             <a:picLocks noChangeAspect="1"/>
           </p:cNvPicPr>
@@ -9855,8 +9855,8 @@
         </p:blipFill>
         <p:spPr>
           <a:xfrm>
-            <a:off x="629930" y="1783080"/>
-            <a:ext cx="10931835" cy="4270248"/>
+            <a:off x="3775061" y="1783080"/>
+            <a:ext cx="4641574" cy="4270248"/>
           </a:xfrm>
           <a:prstGeom prst="rect">
             <a:avLst/>
@@ -13023,7 +13023,7 @@
       </p:sp>
       <p:pic>
         <p:nvPicPr>
-          <p:cNvPr id="5" name="Image 0" descr="/home/claude/f4/img/v2/atmosphere_big.png">    </p:cNvPr>
+          <p:cNvPr id="5" name="Image 0" descr="/home/claude/f4/img/v2/atm_profile_gce.png">    </p:cNvPr>
           <p:cNvPicPr>
             <a:picLocks noChangeAspect="1"/>
           </p:cNvPicPr>
@@ -13037,8 +13037,8 @@
         </p:blipFill>
         <p:spPr>
           <a:xfrm>
-            <a:off x="5349240" y="2617506"/>
-            <a:ext cx="6659575" cy="2601397"/>
+            <a:off x="6358241" y="1783080"/>
+            <a:ext cx="4641574" cy="4270248"/>
           </a:xfrm>
           <a:prstGeom prst="rect">
             <a:avLst/>
@@ -13628,7 +13628,7 @@
       </p:sp>
       <p:pic>
         <p:nvPicPr>
-          <p:cNvPr id="5" name="Image 0" descr="/home/claude/f4/img/v2/temp_profile_big.png">    </p:cNvPr>
+          <p:cNvPr id="5" name="Image 0" descr="/home/claude/f4/img/v2/atm_profile_gce.png">    </p:cNvPr>
           <p:cNvPicPr>
             <a:picLocks noChangeAspect="1"/>
           </p:cNvPicPr>
@@ -13642,8 +13642,8 @@
         </p:blipFill>
         <p:spPr>
           <a:xfrm>
-            <a:off x="5349240" y="2461422"/>
-            <a:ext cx="6659575" cy="2913564"/>
+            <a:off x="6358241" y="1783080"/>
+            <a:ext cx="4641574" cy="4270248"/>
           </a:xfrm>
           <a:prstGeom prst="rect">
             <a:avLst/>
@@ -13683,7 +13683,7 @@
                 <a:ea typeface="Times New Roman" pitchFamily="34" charset="-122"/>
                 <a:cs typeface="Times New Roman" pitchFamily="34" charset="-120"/>
               </a:rPr>
-              <a:t>Illustration: temperature and height</a:t>
+              <a:t>Illustration: temperature and height in the atmosphere</a:t>
             </a:r>
             <a:endParaRPr lang="en-US" sz="1600" dirty="0"/>
           </a:p>
